--- a/slides/17-variable-importance.pptx
+++ b/slides/17-variable-importance.pptx
@@ -14,13 +14,13 @@
     <p:sldId id="260" r:id="rId5"/>
     <p:sldId id="261" r:id="rId6"/>
     <p:sldId id="262" r:id="rId7"/>
-    <p:sldId id="271" r:id="rId8"/>
-    <p:sldId id="265" r:id="rId9"/>
-    <p:sldId id="266" r:id="rId10"/>
-    <p:sldId id="267" r:id="rId11"/>
-    <p:sldId id="272" r:id="rId12"/>
-    <p:sldId id="268" r:id="rId13"/>
-    <p:sldId id="273" r:id="rId14"/>
+    <p:sldId id="273" r:id="rId8"/>
+    <p:sldId id="271" r:id="rId9"/>
+    <p:sldId id="265" r:id="rId10"/>
+    <p:sldId id="266" r:id="rId11"/>
+    <p:sldId id="267" r:id="rId12"/>
+    <p:sldId id="272" r:id="rId13"/>
+    <p:sldId id="268" r:id="rId14"/>
     <p:sldId id="264" r:id="rId15"/>
     <p:sldId id="269" r:id="rId16"/>
     <p:sldId id="270" r:id="rId17"/>
@@ -212,7 +212,7 @@
           <a:p>
             <a:fld id="{A5320152-7289-42ED-97D3-BBB411F9F8C0}" type="datetimeFigureOut">
               <a:rPr lang="en-US" smtClean="0"/>
-              <a:t>3/18/2026</a:t>
+              <a:t>3/24/2026</a:t>
             </a:fld>
             <a:endParaRPr lang="en-US"/>
           </a:p>
@@ -632,7 +632,7 @@
           <a:p>
             <a:fld id="{D1D1EADE-8E88-4C7C-8AC5-FB148DE4940E}" type="datetime1">
               <a:rPr lang="en-US" smtClean="0"/>
-              <a:t>3/18/2026</a:t>
+              <a:t>3/24/2026</a:t>
             </a:fld>
             <a:endParaRPr lang="en-US"/>
           </a:p>
@@ -832,7 +832,7 @@
           <a:p>
             <a:fld id="{EC3C8B9C-477D-492A-96AD-1FC2CC997A73}" type="datetime1">
               <a:rPr lang="en-US" smtClean="0"/>
-              <a:t>3/18/2026</a:t>
+              <a:t>3/24/2026</a:t>
             </a:fld>
             <a:endParaRPr lang="en-US"/>
           </a:p>
@@ -1042,7 +1042,7 @@
           <a:p>
             <a:fld id="{42D3AED5-E26D-4E29-B1B3-7847B6779594}" type="datetime1">
               <a:rPr lang="en-US" smtClean="0"/>
-              <a:t>3/18/2026</a:t>
+              <a:t>3/24/2026</a:t>
             </a:fld>
             <a:endParaRPr lang="en-US"/>
           </a:p>
@@ -1242,7 +1242,7 @@
           <a:p>
             <a:fld id="{157B6794-849E-4626-908B-D15793550EFB}" type="datetime1">
               <a:rPr lang="en-US" smtClean="0"/>
-              <a:t>3/18/2026</a:t>
+              <a:t>3/24/2026</a:t>
             </a:fld>
             <a:endParaRPr lang="en-US"/>
           </a:p>
@@ -1518,7 +1518,7 @@
           <a:p>
             <a:fld id="{63DB64E7-5594-42A3-ADBF-E95A7ACEAD64}" type="datetime1">
               <a:rPr lang="en-US" smtClean="0"/>
-              <a:t>3/18/2026</a:t>
+              <a:t>3/24/2026</a:t>
             </a:fld>
             <a:endParaRPr lang="en-US"/>
           </a:p>
@@ -1791,7 +1791,7 @@
           <a:p>
             <a:fld id="{18462B0B-D248-4FFB-8695-AD7FA4B1284A}" type="datetime1">
               <a:rPr lang="en-US" smtClean="0"/>
-              <a:t>3/18/2026</a:t>
+              <a:t>3/24/2026</a:t>
             </a:fld>
             <a:endParaRPr lang="en-US"/>
           </a:p>
@@ -2214,7 +2214,7 @@
           <a:p>
             <a:fld id="{D0378EFB-9159-4510-B73F-4F0409ADE937}" type="datetime1">
               <a:rPr lang="en-US" smtClean="0"/>
-              <a:t>3/18/2026</a:t>
+              <a:t>3/24/2026</a:t>
             </a:fld>
             <a:endParaRPr lang="en-US"/>
           </a:p>
@@ -2356,7 +2356,7 @@
           <a:p>
             <a:fld id="{89BC9412-2452-4BED-A324-9D8C115361AD}" type="datetime1">
               <a:rPr lang="en-US" smtClean="0"/>
-              <a:t>3/18/2026</a:t>
+              <a:t>3/24/2026</a:t>
             </a:fld>
             <a:endParaRPr lang="en-US"/>
           </a:p>
@@ -2469,7 +2469,7 @@
           <a:p>
             <a:fld id="{F5318F62-D251-40E8-A23C-F4CFE9FEAB41}" type="datetime1">
               <a:rPr lang="en-US" smtClean="0"/>
-              <a:t>3/18/2026</a:t>
+              <a:t>3/24/2026</a:t>
             </a:fld>
             <a:endParaRPr lang="en-US"/>
           </a:p>
@@ -2782,7 +2782,7 @@
           <a:p>
             <a:fld id="{44F76144-149E-4874-93A5-554A0357CF82}" type="datetime1">
               <a:rPr lang="en-US" smtClean="0"/>
-              <a:t>3/18/2026</a:t>
+              <a:t>3/24/2026</a:t>
             </a:fld>
             <a:endParaRPr lang="en-US"/>
           </a:p>
@@ -3075,7 +3075,7 @@
           <a:p>
             <a:fld id="{50BA65D8-0540-4835-AE5C-25D29DBA01BE}" type="datetime1">
               <a:rPr lang="en-US" smtClean="0"/>
-              <a:t>3/18/2026</a:t>
+              <a:t>3/24/2026</a:t>
             </a:fld>
             <a:endParaRPr lang="en-US"/>
           </a:p>
@@ -3317,7 +3317,7 @@
           <a:p>
             <a:fld id="{E31BA835-12AC-4E8F-955A-EA3F4DE2791F}" type="datetime1">
               <a:rPr lang="en-US" smtClean="0"/>
-              <a:t>3/18/2026</a:t>
+              <a:t>3/24/2026</a:t>
             </a:fld>
             <a:endParaRPr lang="en-US"/>
           </a:p>
@@ -4185,6 +4185,1135 @@
           <p:cNvPr id="2" name="Title 1">
             <a:extLst>
               <a:ext uri="{FF2B5EF4-FFF2-40B4-BE49-F238E27FC236}">
+                <a16:creationId xmlns:a16="http://schemas.microsoft.com/office/drawing/2014/main" id="{1E2A6041-637B-6D78-5506-92BFDCE375ED}"/>
+              </a:ext>
+            </a:extLst>
+          </p:cNvPr>
+          <p:cNvSpPr>
+            <a:spLocks noGrp="1"/>
+          </p:cNvSpPr>
+          <p:nvPr>
+            <p:ph type="title"/>
+          </p:nvPr>
+        </p:nvSpPr>
+        <p:spPr/>
+        <p:txBody>
+          <a:bodyPr/>
+          <a:lstStyle/>
+          <a:p>
+            <a:r>
+              <a:rPr lang="en-US" dirty="0"/>
+              <a:t>Impurity Functions</a:t>
+            </a:r>
+          </a:p>
+        </p:txBody>
+      </p:sp>
+      <mc:AlternateContent xmlns:mc="http://schemas.openxmlformats.org/markup-compatibility/2006" xmlns:a14="http://schemas.microsoft.com/office/drawing/2010/main">
+        <mc:Choice Requires="a14">
+          <p:sp>
+            <p:nvSpPr>
+              <p:cNvPr id="4" name="Content Placeholder 3">
+                <a:extLst>
+                  <a:ext uri="{FF2B5EF4-FFF2-40B4-BE49-F238E27FC236}">
+                    <a16:creationId xmlns:a16="http://schemas.microsoft.com/office/drawing/2014/main" id="{A115A7E1-21F4-7DD9-E149-771F0FD3728E}"/>
+                  </a:ext>
+                </a:extLst>
+              </p:cNvPr>
+              <p:cNvSpPr>
+                <a:spLocks noGrp="1"/>
+              </p:cNvSpPr>
+              <p:nvPr>
+                <p:ph sz="half" idx="2"/>
+              </p:nvPr>
+            </p:nvSpPr>
+            <p:spPr>
+              <a:xfrm>
+                <a:off x="704088" y="1682305"/>
+                <a:ext cx="5212080" cy="3519185"/>
+              </a:xfrm>
+            </p:spPr>
+            <p:txBody>
+              <a:bodyPr>
+                <a:normAutofit fontScale="92500" lnSpcReduction="10000"/>
+              </a:bodyPr>
+              <a:lstStyle/>
+              <a:p>
+                <a:r>
+                  <a:rPr lang="en-US" b="1" dirty="0"/>
+                  <a:t>Classification (Gini impurity)</a:t>
+                </a:r>
+              </a:p>
+              <a:p>
+                <a14:m>
+                  <m:oMath xmlns:m="http://schemas.openxmlformats.org/officeDocument/2006/math">
+                    <m:r>
+                      <a:rPr lang="en-US" i="1">
+                        <a:latin typeface="Cambria Math" panose="02040503050406030204" pitchFamily="18" charset="0"/>
+                      </a:rPr>
+                      <m:t>𝐼</m:t>
+                    </m:r>
+                    <m:d>
+                      <m:dPr>
+                        <m:ctrlPr>
+                          <a:rPr lang="ar-AE" i="1">
+                            <a:latin typeface="Cambria Math" panose="02040503050406030204" pitchFamily="18" charset="0"/>
+                          </a:rPr>
+                        </m:ctrlPr>
+                      </m:dPr>
+                      <m:e>
+                        <m:r>
+                          <a:rPr lang="ar-AE" i="1">
+                            <a:latin typeface="Cambria Math" panose="02040503050406030204" pitchFamily="18" charset="0"/>
+                          </a:rPr>
+                          <m:t>𝑡</m:t>
+                        </m:r>
+                      </m:e>
+                    </m:d>
+                    <m:r>
+                      <a:rPr lang="ar-AE">
+                        <a:latin typeface="Cambria Math" panose="02040503050406030204" pitchFamily="18" charset="0"/>
+                      </a:rPr>
+                      <m:t>=</m:t>
+                    </m:r>
+                    <m:r>
+                      <a:rPr lang="ar-AE">
+                        <a:latin typeface="Cambria Math" panose="02040503050406030204" pitchFamily="18" charset="0"/>
+                      </a:rPr>
+                      <m:t>1</m:t>
+                    </m:r>
+                    <m:r>
+                      <a:rPr lang="ar-AE">
+                        <a:latin typeface="Cambria Math" panose="02040503050406030204" pitchFamily="18" charset="0"/>
+                      </a:rPr>
+                      <m:t>−</m:t>
+                    </m:r>
+                    <m:nary>
+                      <m:naryPr>
+                        <m:chr m:val="∑"/>
+                        <m:grow m:val="on"/>
+                        <m:ctrlPr>
+                          <a:rPr lang="ar-AE" i="1">
+                            <a:latin typeface="Cambria Math" panose="02040503050406030204" pitchFamily="18" charset="0"/>
+                          </a:rPr>
+                        </m:ctrlPr>
+                      </m:naryPr>
+                      <m:sub>
+                        <m:r>
+                          <a:rPr lang="ar-AE" i="1">
+                            <a:latin typeface="Cambria Math" panose="02040503050406030204" pitchFamily="18" charset="0"/>
+                          </a:rPr>
+                          <m:t>𝑘</m:t>
+                        </m:r>
+                        <m:r>
+                          <a:rPr lang="ar-AE">
+                            <a:latin typeface="Cambria Math" panose="02040503050406030204" pitchFamily="18" charset="0"/>
+                          </a:rPr>
+                          <m:t>=</m:t>
+                        </m:r>
+                        <m:r>
+                          <a:rPr lang="ar-AE">
+                            <a:latin typeface="Cambria Math" panose="02040503050406030204" pitchFamily="18" charset="0"/>
+                          </a:rPr>
+                          <m:t>1</m:t>
+                        </m:r>
+                      </m:sub>
+                      <m:sup>
+                        <m:r>
+                          <a:rPr lang="ar-AE" i="1">
+                            <a:latin typeface="Cambria Math" panose="02040503050406030204" pitchFamily="18" charset="0"/>
+                          </a:rPr>
+                          <m:t>𝐾</m:t>
+                        </m:r>
+                      </m:sup>
+                      <m:e>
+                        <m:sSub>
+                          <m:sSubPr>
+                            <m:ctrlPr>
+                              <a:rPr lang="ar-AE" i="1">
+                                <a:latin typeface="Cambria Math" panose="02040503050406030204" pitchFamily="18" charset="0"/>
+                              </a:rPr>
+                            </m:ctrlPr>
+                          </m:sSubPr>
+                          <m:e>
+                            <m:r>
+                              <a:rPr lang="ar-AE" i="1">
+                                <a:latin typeface="Cambria Math" panose="02040503050406030204" pitchFamily="18" charset="0"/>
+                              </a:rPr>
+                              <m:t>𝑝</m:t>
+                            </m:r>
+                          </m:e>
+                          <m:sub>
+                            <m:r>
+                              <a:rPr lang="ar-AE" i="1">
+                                <a:latin typeface="Cambria Math" panose="02040503050406030204" pitchFamily="18" charset="0"/>
+                              </a:rPr>
+                              <m:t>𝑘</m:t>
+                            </m:r>
+                          </m:sub>
+                        </m:sSub>
+                      </m:e>
+                    </m:nary>
+                    <m:d>
+                      <m:dPr>
+                        <m:endChr m:val=""/>
+                        <m:ctrlPr>
+                          <a:rPr lang="ar-AE" i="1">
+                            <a:latin typeface="Cambria Math" panose="02040503050406030204" pitchFamily="18" charset="0"/>
+                          </a:rPr>
+                        </m:ctrlPr>
+                      </m:dPr>
+                      <m:e>
+                        <m:r>
+                          <a:rPr lang="ar-AE" i="1">
+                            <a:latin typeface="Cambria Math" panose="02040503050406030204" pitchFamily="18" charset="0"/>
+                          </a:rPr>
+                          <m:t>𝑡</m:t>
+                        </m:r>
+                        <m:sSup>
+                          <m:sSupPr>
+                            <m:ctrlPr>
+                              <a:rPr lang="ar-AE" i="1">
+                                <a:latin typeface="Cambria Math" panose="02040503050406030204" pitchFamily="18" charset="0"/>
+                              </a:rPr>
+                            </m:ctrlPr>
+                          </m:sSupPr>
+                          <m:e>
+                            <m:d>
+                              <m:dPr>
+                                <m:begChr m:val=""/>
+                                <m:endChr m:val=""/>
+                                <m:ctrlPr>
+                                  <a:rPr lang="ar-AE" i="1">
+                                    <a:latin typeface="Cambria Math" panose="02040503050406030204" pitchFamily="18" charset="0"/>
+                                  </a:rPr>
+                                </m:ctrlPr>
+                              </m:dPr>
+                              <m:e>
+                                <m:r>
+                                  <a:rPr lang="ar-AE">
+                                    <a:latin typeface="Cambria Math" panose="02040503050406030204" pitchFamily="18" charset="0"/>
+                                  </a:rPr>
+                                  <m:t>)</m:t>
+                                </m:r>
+                              </m:e>
+                            </m:d>
+                          </m:e>
+                          <m:sup>
+                            <m:r>
+                              <a:rPr lang="ar-AE">
+                                <a:latin typeface="Cambria Math" panose="02040503050406030204" pitchFamily="18" charset="0"/>
+                              </a:rPr>
+                              <m:t>2</m:t>
+                            </m:r>
+                          </m:sup>
+                        </m:sSup>
+                      </m:e>
+                    </m:d>
+                  </m:oMath>
+                </a14:m>
+                <a:endParaRPr lang="ar-AE" dirty="0"/>
+              </a:p>
+              <a:p>
+                <a:r>
+                  <a:rPr lang="en-US" dirty="0"/>
+                  <a:t>where </a:t>
+                </a:r>
+                <a14:m>
+                  <m:oMath xmlns:m="http://schemas.openxmlformats.org/officeDocument/2006/math">
+                    <m:sSub>
+                      <m:sSubPr>
+                        <m:ctrlPr>
+                          <a:rPr lang="ar-AE" i="1">
+                            <a:latin typeface="Cambria Math" panose="02040503050406030204" pitchFamily="18" charset="0"/>
+                          </a:rPr>
+                        </m:ctrlPr>
+                      </m:sSubPr>
+                      <m:e>
+                        <m:r>
+                          <a:rPr lang="ar-AE" i="1">
+                            <a:latin typeface="Cambria Math" panose="02040503050406030204" pitchFamily="18" charset="0"/>
+                          </a:rPr>
+                          <m:t>𝑝</m:t>
+                        </m:r>
+                      </m:e>
+                      <m:sub>
+                        <m:r>
+                          <a:rPr lang="ar-AE" i="1">
+                            <a:latin typeface="Cambria Math" panose="02040503050406030204" pitchFamily="18" charset="0"/>
+                          </a:rPr>
+                          <m:t>𝑘</m:t>
+                        </m:r>
+                      </m:sub>
+                    </m:sSub>
+                    <m:d>
+                      <m:dPr>
+                        <m:ctrlPr>
+                          <a:rPr lang="ar-AE" i="1">
+                            <a:latin typeface="Cambria Math" panose="02040503050406030204" pitchFamily="18" charset="0"/>
+                          </a:rPr>
+                        </m:ctrlPr>
+                      </m:dPr>
+                      <m:e>
+                        <m:r>
+                          <a:rPr lang="ar-AE" i="1">
+                            <a:latin typeface="Cambria Math" panose="02040503050406030204" pitchFamily="18" charset="0"/>
+                          </a:rPr>
+                          <m:t>𝑡</m:t>
+                        </m:r>
+                      </m:e>
+                    </m:d>
+                  </m:oMath>
+                </a14:m>
+                <a:r>
+                  <a:rPr lang="en-US" dirty="0"/>
+                  <a:t>is the proportion of class </a:t>
+                </a:r>
+                <a14:m>
+                  <m:oMath xmlns:m="http://schemas.openxmlformats.org/officeDocument/2006/math">
+                    <m:r>
+                      <a:rPr lang="en-US" i="1">
+                        <a:latin typeface="Cambria Math" panose="02040503050406030204" pitchFamily="18" charset="0"/>
+                      </a:rPr>
+                      <m:t>𝑘</m:t>
+                    </m:r>
+                  </m:oMath>
+                </a14:m>
+                <a:r>
+                  <a:rPr lang="en-US" dirty="0"/>
+                  <a:t>in node </a:t>
+                </a:r>
+                <a14:m>
+                  <m:oMath xmlns:m="http://schemas.openxmlformats.org/officeDocument/2006/math">
+                    <m:r>
+                      <a:rPr lang="en-US" i="1">
+                        <a:latin typeface="Cambria Math" panose="02040503050406030204" pitchFamily="18" charset="0"/>
+                      </a:rPr>
+                      <m:t>𝑡</m:t>
+                    </m:r>
+                  </m:oMath>
+                </a14:m>
+                <a:r>
+                  <a:rPr lang="en-US" dirty="0"/>
+                  <a:t>.</a:t>
+                </a:r>
+              </a:p>
+              <a:p>
+                <a:r>
+                  <a:rPr lang="en-US" b="1" dirty="0"/>
+                  <a:t>Regression (Variance / MSE)</a:t>
+                </a:r>
+              </a:p>
+              <a:p>
+                <a14:m>
+                  <m:oMath xmlns:m="http://schemas.openxmlformats.org/officeDocument/2006/math">
+                    <m:r>
+                      <a:rPr lang="en-US" i="1">
+                        <a:latin typeface="Cambria Math" panose="02040503050406030204" pitchFamily="18" charset="0"/>
+                      </a:rPr>
+                      <m:t>𝐼</m:t>
+                    </m:r>
+                    <m:d>
+                      <m:dPr>
+                        <m:ctrlPr>
+                          <a:rPr lang="ar-AE" i="1">
+                            <a:latin typeface="Cambria Math" panose="02040503050406030204" pitchFamily="18" charset="0"/>
+                          </a:rPr>
+                        </m:ctrlPr>
+                      </m:dPr>
+                      <m:e>
+                        <m:r>
+                          <a:rPr lang="ar-AE" i="1">
+                            <a:latin typeface="Cambria Math" panose="02040503050406030204" pitchFamily="18" charset="0"/>
+                          </a:rPr>
+                          <m:t>𝑡</m:t>
+                        </m:r>
+                      </m:e>
+                    </m:d>
+                    <m:r>
+                      <a:rPr lang="ar-AE">
+                        <a:latin typeface="Cambria Math" panose="02040503050406030204" pitchFamily="18" charset="0"/>
+                      </a:rPr>
+                      <m:t>=</m:t>
+                    </m:r>
+                    <m:f>
+                      <m:fPr>
+                        <m:ctrlPr>
+                          <a:rPr lang="ar-AE" i="1">
+                            <a:latin typeface="Cambria Math" panose="02040503050406030204" pitchFamily="18" charset="0"/>
+                          </a:rPr>
+                        </m:ctrlPr>
+                      </m:fPr>
+                      <m:num>
+                        <m:r>
+                          <a:rPr lang="ar-AE">
+                            <a:latin typeface="Cambria Math" panose="02040503050406030204" pitchFamily="18" charset="0"/>
+                          </a:rPr>
+                          <m:t>1</m:t>
+                        </m:r>
+                      </m:num>
+                      <m:den>
+                        <m:sSub>
+                          <m:sSubPr>
+                            <m:ctrlPr>
+                              <a:rPr lang="ar-AE" i="1">
+                                <a:latin typeface="Cambria Math" panose="02040503050406030204" pitchFamily="18" charset="0"/>
+                              </a:rPr>
+                            </m:ctrlPr>
+                          </m:sSubPr>
+                          <m:e>
+                            <m:r>
+                              <a:rPr lang="ar-AE" i="1">
+                                <a:latin typeface="Cambria Math" panose="02040503050406030204" pitchFamily="18" charset="0"/>
+                              </a:rPr>
+                              <m:t>𝑛</m:t>
+                            </m:r>
+                          </m:e>
+                          <m:sub>
+                            <m:r>
+                              <a:rPr lang="ar-AE" i="1">
+                                <a:latin typeface="Cambria Math" panose="02040503050406030204" pitchFamily="18" charset="0"/>
+                              </a:rPr>
+                              <m:t>𝑡</m:t>
+                            </m:r>
+                          </m:sub>
+                        </m:sSub>
+                      </m:den>
+                    </m:f>
+                    <m:nary>
+                      <m:naryPr>
+                        <m:chr m:val="∑"/>
+                        <m:grow m:val="on"/>
+                        <m:supHide m:val="on"/>
+                        <m:ctrlPr>
+                          <a:rPr lang="ar-AE" i="1">
+                            <a:latin typeface="Cambria Math" panose="02040503050406030204" pitchFamily="18" charset="0"/>
+                          </a:rPr>
+                        </m:ctrlPr>
+                      </m:naryPr>
+                      <m:sub>
+                        <m:r>
+                          <a:rPr lang="ar-AE" i="1">
+                            <a:latin typeface="Cambria Math" panose="02040503050406030204" pitchFamily="18" charset="0"/>
+                          </a:rPr>
+                          <m:t>𝑖</m:t>
+                        </m:r>
+                        <m:r>
+                          <a:rPr lang="ar-AE">
+                            <a:latin typeface="Cambria Math" panose="02040503050406030204" pitchFamily="18" charset="0"/>
+                          </a:rPr>
+                          <m:t>∈</m:t>
+                        </m:r>
+                        <m:r>
+                          <a:rPr lang="ar-AE" i="1">
+                            <a:latin typeface="Cambria Math" panose="02040503050406030204" pitchFamily="18" charset="0"/>
+                          </a:rPr>
+                          <m:t>𝑡</m:t>
+                        </m:r>
+                      </m:sub>
+                      <m:sup/>
+                      <m:e>
+                        <m:r>
+                          <a:rPr lang="ar-AE">
+                            <a:latin typeface="Cambria Math" panose="02040503050406030204" pitchFamily="18" charset="0"/>
+                          </a:rPr>
+                          <m:t>(</m:t>
+                        </m:r>
+                      </m:e>
+                    </m:nary>
+                    <m:d>
+                      <m:dPr>
+                        <m:begChr m:val=""/>
+                        <m:endChr m:val=""/>
+                        <m:ctrlPr>
+                          <a:rPr lang="ar-AE" i="1">
+                            <a:latin typeface="Cambria Math" panose="02040503050406030204" pitchFamily="18" charset="0"/>
+                          </a:rPr>
+                        </m:ctrlPr>
+                      </m:dPr>
+                      <m:e>
+                        <m:sSub>
+                          <m:sSubPr>
+                            <m:ctrlPr>
+                              <a:rPr lang="ar-AE" i="1">
+                                <a:latin typeface="Cambria Math" panose="02040503050406030204" pitchFamily="18" charset="0"/>
+                              </a:rPr>
+                            </m:ctrlPr>
+                          </m:sSubPr>
+                          <m:e>
+                            <m:r>
+                              <a:rPr lang="ar-AE" i="1">
+                                <a:latin typeface="Cambria Math" panose="02040503050406030204" pitchFamily="18" charset="0"/>
+                              </a:rPr>
+                              <m:t>𝑦</m:t>
+                            </m:r>
+                          </m:e>
+                          <m:sub>
+                            <m:r>
+                              <a:rPr lang="ar-AE" i="1">
+                                <a:latin typeface="Cambria Math" panose="02040503050406030204" pitchFamily="18" charset="0"/>
+                              </a:rPr>
+                              <m:t>𝑖</m:t>
+                            </m:r>
+                          </m:sub>
+                        </m:sSub>
+                        <m:r>
+                          <a:rPr lang="ar-AE">
+                            <a:latin typeface="Cambria Math" panose="02040503050406030204" pitchFamily="18" charset="0"/>
+                          </a:rPr>
+                          <m:t>−</m:t>
+                        </m:r>
+                        <m:sSub>
+                          <m:sSubPr>
+                            <m:ctrlPr>
+                              <a:rPr lang="ar-AE" i="1">
+                                <a:latin typeface="Cambria Math" panose="02040503050406030204" pitchFamily="18" charset="0"/>
+                              </a:rPr>
+                            </m:ctrlPr>
+                          </m:sSubPr>
+                          <m:e>
+                            <m:limUpp>
+                              <m:limUppPr>
+                                <m:ctrlPr>
+                                  <a:rPr lang="ar-AE" i="1" smtClean="0">
+                                    <a:latin typeface="Cambria Math" panose="02040503050406030204" pitchFamily="18" charset="0"/>
+                                  </a:rPr>
+                                </m:ctrlPr>
+                              </m:limUppPr>
+                              <m:e>
+                                <m:r>
+                                  <a:rPr lang="ar-AE" i="1">
+                                    <a:latin typeface="Cambria Math" panose="02040503050406030204" pitchFamily="18" charset="0"/>
+                                  </a:rPr>
+                                  <m:t>𝑦</m:t>
+                                </m:r>
+                              </m:e>
+                              <m:lim>
+                                <m:r>
+                                  <a:rPr lang="ar-AE">
+                                    <a:latin typeface="Cambria Math" panose="02040503050406030204" pitchFamily="18" charset="0"/>
+                                  </a:rPr>
+                                  <m:t>ˉ</m:t>
+                                </m:r>
+                              </m:lim>
+                            </m:limUpp>
+                          </m:e>
+                          <m:sub>
+                            <m:r>
+                              <a:rPr lang="ar-AE" i="1">
+                                <a:latin typeface="Cambria Math" panose="02040503050406030204" pitchFamily="18" charset="0"/>
+                              </a:rPr>
+                              <m:t>𝑡</m:t>
+                            </m:r>
+                          </m:sub>
+                        </m:sSub>
+                        <m:sSup>
+                          <m:sSupPr>
+                            <m:ctrlPr>
+                              <a:rPr lang="ar-AE" i="1">
+                                <a:latin typeface="Cambria Math" panose="02040503050406030204" pitchFamily="18" charset="0"/>
+                              </a:rPr>
+                            </m:ctrlPr>
+                          </m:sSupPr>
+                          <m:e>
+                            <m:d>
+                              <m:dPr>
+                                <m:begChr m:val=""/>
+                                <m:endChr m:val=""/>
+                                <m:ctrlPr>
+                                  <a:rPr lang="ar-AE" i="1">
+                                    <a:latin typeface="Cambria Math" panose="02040503050406030204" pitchFamily="18" charset="0"/>
+                                  </a:rPr>
+                                </m:ctrlPr>
+                              </m:dPr>
+                              <m:e>
+                                <m:r>
+                                  <a:rPr lang="ar-AE">
+                                    <a:latin typeface="Cambria Math" panose="02040503050406030204" pitchFamily="18" charset="0"/>
+                                  </a:rPr>
+                                  <m:t>)</m:t>
+                                </m:r>
+                              </m:e>
+                            </m:d>
+                          </m:e>
+                          <m:sup>
+                            <m:r>
+                              <a:rPr lang="ar-AE">
+                                <a:latin typeface="Cambria Math" panose="02040503050406030204" pitchFamily="18" charset="0"/>
+                              </a:rPr>
+                              <m:t>2</m:t>
+                            </m:r>
+                          </m:sup>
+                        </m:sSup>
+                      </m:e>
+                    </m:d>
+                  </m:oMath>
+                </a14:m>
+                <a:endParaRPr lang="ar-AE" dirty="0"/>
+              </a:p>
+              <a:p>
+                <a:endParaRPr lang="en-US" dirty="0"/>
+              </a:p>
+            </p:txBody>
+          </p:sp>
+        </mc:Choice>
+        <mc:Fallback xmlns="">
+          <p:sp>
+            <p:nvSpPr>
+              <p:cNvPr id="4" name="Content Placeholder 3">
+                <a:extLst>
+                  <a:ext uri="{FF2B5EF4-FFF2-40B4-BE49-F238E27FC236}">
+                    <a16:creationId xmlns:a16="http://schemas.microsoft.com/office/drawing/2014/main" id="{A115A7E1-21F4-7DD9-E149-771F0FD3728E}"/>
+                  </a:ext>
+                </a:extLst>
+              </p:cNvPr>
+              <p:cNvSpPr>
+                <a:spLocks noGrp="1" noRot="1" noChangeAspect="1" noMove="1" noResize="1" noEditPoints="1" noAdjustHandles="1" noChangeArrowheads="1" noChangeShapeType="1" noTextEdit="1"/>
+              </p:cNvSpPr>
+              <p:nvPr>
+                <p:ph sz="half" idx="2"/>
+              </p:nvPr>
+            </p:nvSpPr>
+            <p:spPr>
+              <a:xfrm>
+                <a:off x="704088" y="1682305"/>
+                <a:ext cx="5212080" cy="3519185"/>
+              </a:xfrm>
+              <a:blipFill>
+                <a:blip r:embed="rId2"/>
+                <a:stretch>
+                  <a:fillRect l="-936" t="-1040" r="-1053"/>
+                </a:stretch>
+              </a:blipFill>
+            </p:spPr>
+            <p:txBody>
+              <a:bodyPr/>
+              <a:lstStyle/>
+              <a:p>
+                <a:r>
+                  <a:rPr lang="en-US">
+                    <a:noFill/>
+                  </a:rPr>
+                  <a:t> </a:t>
+                </a:r>
+              </a:p>
+            </p:txBody>
+          </p:sp>
+        </mc:Fallback>
+      </mc:AlternateContent>
+      <mc:AlternateContent xmlns:mc="http://schemas.openxmlformats.org/markup-compatibility/2006" xmlns:a14="http://schemas.microsoft.com/office/drawing/2010/main">
+        <mc:Choice Requires="a14">
+          <p:sp>
+            <p:nvSpPr>
+              <p:cNvPr id="6" name="Content Placeholder 5">
+                <a:extLst>
+                  <a:ext uri="{FF2B5EF4-FFF2-40B4-BE49-F238E27FC236}">
+                    <a16:creationId xmlns:a16="http://schemas.microsoft.com/office/drawing/2014/main" id="{2B77987E-1EED-C6F7-FF43-794A92C808ED}"/>
+                  </a:ext>
+                </a:extLst>
+              </p:cNvPr>
+              <p:cNvSpPr>
+                <a:spLocks noGrp="1"/>
+              </p:cNvSpPr>
+              <p:nvPr>
+                <p:ph sz="quarter" idx="4"/>
+              </p:nvPr>
+            </p:nvSpPr>
+            <p:spPr>
+              <a:xfrm>
+                <a:off x="6181344" y="1682305"/>
+                <a:ext cx="5212080" cy="3519185"/>
+              </a:xfrm>
+            </p:spPr>
+            <p:txBody>
+              <a:bodyPr>
+                <a:normAutofit fontScale="92500" lnSpcReduction="10000"/>
+              </a:bodyPr>
+              <a:lstStyle/>
+              <a:p>
+                <a:pPr marL="0" indent="0">
+                  <a:buNone/>
+                </a:pPr>
+                <a:r>
+                  <a:rPr lang="en-US" dirty="0"/>
+                  <a:t>The importance of feature </a:t>
+                </a:r>
+                <a14:m>
+                  <m:oMath xmlns:m="http://schemas.openxmlformats.org/officeDocument/2006/math">
+                    <m:sSub>
+                      <m:sSubPr>
+                        <m:ctrlPr>
+                          <a:rPr lang="ar-AE" i="1">
+                            <a:latin typeface="Cambria Math" panose="02040503050406030204" pitchFamily="18" charset="0"/>
+                          </a:rPr>
+                        </m:ctrlPr>
+                      </m:sSubPr>
+                      <m:e>
+                        <m:r>
+                          <a:rPr lang="ar-AE" i="1">
+                            <a:latin typeface="Cambria Math" panose="02040503050406030204" pitchFamily="18" charset="0"/>
+                          </a:rPr>
+                          <m:t>𝑥</m:t>
+                        </m:r>
+                      </m:e>
+                      <m:sub>
+                        <m:r>
+                          <a:rPr lang="ar-AE" i="1">
+                            <a:latin typeface="Cambria Math" panose="02040503050406030204" pitchFamily="18" charset="0"/>
+                          </a:rPr>
+                          <m:t>𝑗</m:t>
+                        </m:r>
+                      </m:sub>
+                    </m:sSub>
+                  </m:oMath>
+                </a14:m>
+                <a:r>
+                  <a:rPr lang="en-US" dirty="0"/>
+                  <a:t>is the </a:t>
+                </a:r>
+                <a:r>
+                  <a:rPr lang="en-US" b="1" dirty="0"/>
+                  <a:t>total impurity reduction contributed by splits on that feature</a:t>
+                </a:r>
+                <a:r>
+                  <a:rPr lang="en-US" dirty="0"/>
+                  <a:t>:</a:t>
+                </a:r>
+              </a:p>
+              <a:p>
+                <a:pPr marL="0" indent="0">
+                  <a:buNone/>
+                </a:pPr>
+                <a14:m>
+                  <m:oMathPara xmlns:m="http://schemas.openxmlformats.org/officeDocument/2006/math">
+                    <m:oMathParaPr>
+                      <m:jc m:val="centerGroup"/>
+                    </m:oMathParaPr>
+                    <m:oMath xmlns:m="http://schemas.openxmlformats.org/officeDocument/2006/math">
+                      <m:borderBox>
+                        <m:borderBoxPr>
+                          <m:ctrlPr>
+                            <a:rPr lang="ar-AE" i="1">
+                              <a:latin typeface="Cambria Math" panose="02040503050406030204" pitchFamily="18" charset="0"/>
+                            </a:rPr>
+                          </m:ctrlPr>
+                        </m:borderBoxPr>
+                        <m:e>
+                          <m:r>
+                            <a:rPr lang="ar-AE" i="1">
+                              <a:latin typeface="Cambria Math" panose="02040503050406030204" pitchFamily="18" charset="0"/>
+                            </a:rPr>
+                            <m:t>𝑉</m:t>
+                          </m:r>
+                          <m:sSubSup>
+                            <m:sSubSupPr>
+                              <m:ctrlPr>
+                                <a:rPr lang="ar-AE" i="1">
+                                  <a:latin typeface="Cambria Math" panose="02040503050406030204" pitchFamily="18" charset="0"/>
+                                </a:rPr>
+                              </m:ctrlPr>
+                            </m:sSubSupPr>
+                            <m:e>
+                              <m:r>
+                                <a:rPr lang="ar-AE" i="1">
+                                  <a:latin typeface="Cambria Math" panose="02040503050406030204" pitchFamily="18" charset="0"/>
+                                </a:rPr>
+                                <m:t>𝐼</m:t>
+                              </m:r>
+                            </m:e>
+                            <m:sub>
+                              <m:r>
+                                <a:rPr lang="ar-AE" i="1">
+                                  <a:latin typeface="Cambria Math" panose="02040503050406030204" pitchFamily="18" charset="0"/>
+                                </a:rPr>
+                                <m:t>𝑗</m:t>
+                              </m:r>
+                            </m:sub>
+                            <m:sup>
+                              <m:r>
+                                <m:rPr>
+                                  <m:nor/>
+                                </m:rPr>
+                                <a:rPr lang="en-US" i="1"/>
+                                <m:t>tree</m:t>
+                              </m:r>
+                            </m:sup>
+                          </m:sSubSup>
+                          <m:r>
+                            <a:rPr lang="ar-AE">
+                              <a:latin typeface="Cambria Math" panose="02040503050406030204" pitchFamily="18" charset="0"/>
+                            </a:rPr>
+                            <m:t>=</m:t>
+                          </m:r>
+                          <m:nary>
+                            <m:naryPr>
+                              <m:chr m:val="∑"/>
+                              <m:grow m:val="on"/>
+                              <m:supHide m:val="on"/>
+                              <m:ctrlPr>
+                                <a:rPr lang="ar-AE" i="1">
+                                  <a:latin typeface="Cambria Math" panose="02040503050406030204" pitchFamily="18" charset="0"/>
+                                </a:rPr>
+                              </m:ctrlPr>
+                            </m:naryPr>
+                            <m:sub>
+                              <m:r>
+                                <a:rPr lang="ar-AE" i="1">
+                                  <a:latin typeface="Cambria Math" panose="02040503050406030204" pitchFamily="18" charset="0"/>
+                                </a:rPr>
+                                <m:t>𝑡</m:t>
+                              </m:r>
+                              <m:r>
+                                <a:rPr lang="ar-AE">
+                                  <a:latin typeface="Cambria Math" panose="02040503050406030204" pitchFamily="18" charset="0"/>
+                                </a:rPr>
+                                <m:t>∈</m:t>
+                              </m:r>
+                              <m:r>
+                                <a:rPr lang="ar-AE" i="1">
+                                  <a:latin typeface="Cambria Math" panose="02040503050406030204" pitchFamily="18" charset="0"/>
+                                </a:rPr>
+                                <m:t>𝑇</m:t>
+                              </m:r>
+                              <m:r>
+                                <a:rPr lang="ar-AE">
+                                  <a:latin typeface="Cambria Math" panose="02040503050406030204" pitchFamily="18" charset="0"/>
+                                </a:rPr>
+                                <m:t>:</m:t>
+                              </m:r>
+                              <m:r>
+                                <m:rPr>
+                                  <m:nor/>
+                                </m:rPr>
+                                <a:rPr lang="ar-AE" i="1"/>
+                                <m:t> </m:t>
+                              </m:r>
+                              <m:r>
+                                <m:rPr>
+                                  <m:nor/>
+                                </m:rPr>
+                                <a:rPr lang="en-US" i="1"/>
+                                <m:t>split</m:t>
+                              </m:r>
+                              <m:r>
+                                <m:rPr>
+                                  <m:nor/>
+                                </m:rPr>
+                                <a:rPr lang="en-US" i="1"/>
+                                <m:t> </m:t>
+                              </m:r>
+                              <m:r>
+                                <m:rPr>
+                                  <m:nor/>
+                                </m:rPr>
+                                <a:rPr lang="en-US" i="1"/>
+                                <m:t>on</m:t>
+                              </m:r>
+                              <m:r>
+                                <m:rPr>
+                                  <m:nor/>
+                                </m:rPr>
+                                <a:rPr lang="en-US" i="1"/>
+                                <m:t> </m:t>
+                              </m:r>
+                              <m:sSub>
+                                <m:sSubPr>
+                                  <m:ctrlPr>
+                                    <a:rPr lang="ar-AE" i="1">
+                                      <a:latin typeface="Cambria Math" panose="02040503050406030204" pitchFamily="18" charset="0"/>
+                                    </a:rPr>
+                                  </m:ctrlPr>
+                                </m:sSubPr>
+                                <m:e>
+                                  <m:r>
+                                    <a:rPr lang="ar-AE" i="1">
+                                      <a:latin typeface="Cambria Math" panose="02040503050406030204" pitchFamily="18" charset="0"/>
+                                    </a:rPr>
+                                    <m:t>𝑥</m:t>
+                                  </m:r>
+                                </m:e>
+                                <m:sub>
+                                  <m:r>
+                                    <a:rPr lang="ar-AE" i="1">
+                                      <a:latin typeface="Cambria Math" panose="02040503050406030204" pitchFamily="18" charset="0"/>
+                                    </a:rPr>
+                                    <m:t>𝑗</m:t>
+                                  </m:r>
+                                </m:sub>
+                              </m:sSub>
+                            </m:sub>
+                            <m:sup/>
+                            <m:e>
+                              <m:f>
+                                <m:fPr>
+                                  <m:ctrlPr>
+                                    <a:rPr lang="ar-AE" i="1">
+                                      <a:latin typeface="Cambria Math" panose="02040503050406030204" pitchFamily="18" charset="0"/>
+                                    </a:rPr>
+                                  </m:ctrlPr>
+                                </m:fPr>
+                                <m:num>
+                                  <m:sSub>
+                                    <m:sSubPr>
+                                      <m:ctrlPr>
+                                        <a:rPr lang="ar-AE" i="1">
+                                          <a:latin typeface="Cambria Math" panose="02040503050406030204" pitchFamily="18" charset="0"/>
+                                        </a:rPr>
+                                      </m:ctrlPr>
+                                    </m:sSubPr>
+                                    <m:e>
+                                      <m:r>
+                                        <a:rPr lang="ar-AE" i="1">
+                                          <a:latin typeface="Cambria Math" panose="02040503050406030204" pitchFamily="18" charset="0"/>
+                                        </a:rPr>
+                                        <m:t>𝑛</m:t>
+                                      </m:r>
+                                    </m:e>
+                                    <m:sub>
+                                      <m:r>
+                                        <a:rPr lang="ar-AE" i="1">
+                                          <a:latin typeface="Cambria Math" panose="02040503050406030204" pitchFamily="18" charset="0"/>
+                                        </a:rPr>
+                                        <m:t>𝑡</m:t>
+                                      </m:r>
+                                    </m:sub>
+                                  </m:sSub>
+                                </m:num>
+                                <m:den>
+                                  <m:r>
+                                    <a:rPr lang="ar-AE" i="1">
+                                      <a:latin typeface="Cambria Math" panose="02040503050406030204" pitchFamily="18" charset="0"/>
+                                    </a:rPr>
+                                    <m:t>𝑛</m:t>
+                                  </m:r>
+                                </m:den>
+                              </m:f>
+                            </m:e>
+                          </m:nary>
+                          <m:r>
+                            <m:rPr>
+                              <m:nor/>
+                            </m:rPr>
+                            <a:rPr lang="ar-AE" i="1"/>
+                            <m:t> </m:t>
+                          </m:r>
+                          <m:r>
+                            <m:rPr>
+                              <m:sty m:val="p"/>
+                            </m:rPr>
+                            <a:rPr lang="el-GR">
+                              <a:latin typeface="Cambria Math" panose="02040503050406030204" pitchFamily="18" charset="0"/>
+                            </a:rPr>
+                            <m:t>Δ</m:t>
+                          </m:r>
+                          <m:r>
+                            <a:rPr lang="el-GR" i="1">
+                              <a:latin typeface="Cambria Math" panose="02040503050406030204" pitchFamily="18" charset="0"/>
+                            </a:rPr>
+                            <m:t>𝐼</m:t>
+                          </m:r>
+                          <m:d>
+                            <m:dPr>
+                              <m:ctrlPr>
+                                <a:rPr lang="ar-AE" i="1">
+                                  <a:latin typeface="Cambria Math" panose="02040503050406030204" pitchFamily="18" charset="0"/>
+                                </a:rPr>
+                              </m:ctrlPr>
+                            </m:dPr>
+                            <m:e>
+                              <m:r>
+                                <a:rPr lang="ar-AE" i="1">
+                                  <a:latin typeface="Cambria Math" panose="02040503050406030204" pitchFamily="18" charset="0"/>
+                                </a:rPr>
+                                <m:t>𝑡</m:t>
+                              </m:r>
+                            </m:e>
+                          </m:d>
+                        </m:e>
+                      </m:borderBox>
+                    </m:oMath>
+                  </m:oMathPara>
+                </a14:m>
+                <a:endParaRPr lang="ar-AE" b="0" dirty="0"/>
+              </a:p>
+              <a:p>
+                <a:pPr marL="0" indent="0">
+                  <a:buNone/>
+                </a:pPr>
+                <a:r>
+                  <a:rPr lang="en-US" dirty="0"/>
+                  <a:t>where:</a:t>
+                </a:r>
+              </a:p>
+              <a:p>
+                <a14:m>
+                  <m:oMath xmlns:m="http://schemas.openxmlformats.org/officeDocument/2006/math">
+                    <m:f>
+                      <m:fPr>
+                        <m:ctrlPr>
+                          <a:rPr lang="ar-AE" i="1">
+                            <a:latin typeface="Cambria Math" panose="02040503050406030204" pitchFamily="18" charset="0"/>
+                          </a:rPr>
+                        </m:ctrlPr>
+                      </m:fPr>
+                      <m:num>
+                        <m:sSub>
+                          <m:sSubPr>
+                            <m:ctrlPr>
+                              <a:rPr lang="ar-AE" i="1">
+                                <a:latin typeface="Cambria Math" panose="02040503050406030204" pitchFamily="18" charset="0"/>
+                              </a:rPr>
+                            </m:ctrlPr>
+                          </m:sSubPr>
+                          <m:e>
+                            <m:r>
+                              <a:rPr lang="ar-AE" i="1">
+                                <a:latin typeface="Cambria Math" panose="02040503050406030204" pitchFamily="18" charset="0"/>
+                              </a:rPr>
+                              <m:t>𝑛</m:t>
+                            </m:r>
+                          </m:e>
+                          <m:sub>
+                            <m:r>
+                              <a:rPr lang="ar-AE" i="1">
+                                <a:latin typeface="Cambria Math" panose="02040503050406030204" pitchFamily="18" charset="0"/>
+                              </a:rPr>
+                              <m:t>𝑡</m:t>
+                            </m:r>
+                          </m:sub>
+                        </m:sSub>
+                      </m:num>
+                      <m:den>
+                        <m:r>
+                          <a:rPr lang="ar-AE" i="1">
+                            <a:latin typeface="Cambria Math" panose="02040503050406030204" pitchFamily="18" charset="0"/>
+                          </a:rPr>
+                          <m:t>𝑛</m:t>
+                        </m:r>
+                      </m:den>
+                    </m:f>
+                  </m:oMath>
+                </a14:m>
+                <a:r>
+                  <a:rPr lang="ar-AE" dirty="0"/>
+                  <a:t>: </a:t>
+                </a:r>
+                <a:r>
+                  <a:rPr lang="en-US" dirty="0"/>
+                  <a:t>weights splits by how many samples reach node </a:t>
+                </a:r>
+                <a14:m>
+                  <m:oMath xmlns:m="http://schemas.openxmlformats.org/officeDocument/2006/math">
+                    <m:r>
+                      <a:rPr lang="en-US" i="1">
+                        <a:latin typeface="Cambria Math" panose="02040503050406030204" pitchFamily="18" charset="0"/>
+                      </a:rPr>
+                      <m:t>𝑡</m:t>
+                    </m:r>
+                  </m:oMath>
+                </a14:m>
+                <a:endParaRPr lang="en-US" dirty="0"/>
+              </a:p>
+              <a:p>
+                <a14:m>
+                  <m:oMath xmlns:m="http://schemas.openxmlformats.org/officeDocument/2006/math">
+                    <m:r>
+                      <a:rPr lang="en-US" i="1">
+                        <a:latin typeface="Cambria Math" panose="02040503050406030204" pitchFamily="18" charset="0"/>
+                      </a:rPr>
+                      <m:t>𝑛</m:t>
+                    </m:r>
+                  </m:oMath>
+                </a14:m>
+                <a:r>
+                  <a:rPr lang="en-US" dirty="0"/>
+                  <a:t>: total number of samples</a:t>
+                </a:r>
+              </a:p>
+              <a:p>
+                <a:endParaRPr lang="en-US" dirty="0"/>
+              </a:p>
+            </p:txBody>
+          </p:sp>
+        </mc:Choice>
+        <mc:Fallback xmlns="">
+          <p:sp>
+            <p:nvSpPr>
+              <p:cNvPr id="6" name="Content Placeholder 5">
+                <a:extLst>
+                  <a:ext uri="{FF2B5EF4-FFF2-40B4-BE49-F238E27FC236}">
+                    <a16:creationId xmlns:a16="http://schemas.microsoft.com/office/drawing/2014/main" id="{2B77987E-1EED-C6F7-FF43-794A92C808ED}"/>
+                  </a:ext>
+                </a:extLst>
+              </p:cNvPr>
+              <p:cNvSpPr>
+                <a:spLocks noGrp="1" noRot="1" noChangeAspect="1" noMove="1" noResize="1" noEditPoints="1" noAdjustHandles="1" noChangeArrowheads="1" noChangeShapeType="1" noTextEdit="1"/>
+              </p:cNvSpPr>
+              <p:nvPr>
+                <p:ph sz="quarter" idx="4"/>
+              </p:nvPr>
+            </p:nvSpPr>
+            <p:spPr>
+              <a:xfrm>
+                <a:off x="6181344" y="1682305"/>
+                <a:ext cx="5212080" cy="3519185"/>
+              </a:xfrm>
+              <a:blipFill>
+                <a:blip r:embed="rId3"/>
+                <a:stretch>
+                  <a:fillRect l="-1053" t="-1040" r="-1871"/>
+                </a:stretch>
+              </a:blipFill>
+            </p:spPr>
+            <p:txBody>
+              <a:bodyPr/>
+              <a:lstStyle/>
+              <a:p>
+                <a:r>
+                  <a:rPr lang="en-US">
+                    <a:noFill/>
+                  </a:rPr>
+                  <a:t> </a:t>
+                </a:r>
+              </a:p>
+            </p:txBody>
+          </p:sp>
+        </mc:Fallback>
+      </mc:AlternateContent>
+    </p:spTree>
+    <p:extLst>
+      <p:ext uri="{BB962C8B-B14F-4D97-AF65-F5344CB8AC3E}">
+        <p14:creationId xmlns:p14="http://schemas.microsoft.com/office/powerpoint/2010/main" val="471226164"/>
+      </p:ext>
+    </p:extLst>
+  </p:cSld>
+  <p:clrMapOvr>
+    <a:masterClrMapping/>
+  </p:clrMapOvr>
+</p:sld>
+</file>
+
+<file path=ppt/slides/slide11.xml><?xml version="1.0" encoding="utf-8"?>
+<p:sld xmlns:a="http://schemas.openxmlformats.org/drawingml/2006/main" xmlns:r="http://schemas.openxmlformats.org/officeDocument/2006/relationships" xmlns:p="http://schemas.openxmlformats.org/presentationml/2006/main">
+  <p:cSld>
+    <p:spTree>
+      <p:nvGrpSpPr>
+        <p:cNvPr id="1" name=""/>
+        <p:cNvGrpSpPr/>
+        <p:nvPr/>
+      </p:nvGrpSpPr>
+      <p:grpSpPr>
+        <a:xfrm>
+          <a:off x="0" y="0"/>
+          <a:ext cx="0" cy="0"/>
+          <a:chOff x="0" y="0"/>
+          <a:chExt cx="0" cy="0"/>
+        </a:xfrm>
+      </p:grpSpPr>
+      <p:sp>
+        <p:nvSpPr>
+          <p:cNvPr id="2" name="Title 1">
+            <a:extLst>
+              <a:ext uri="{FF2B5EF4-FFF2-40B4-BE49-F238E27FC236}">
                 <a16:creationId xmlns:a16="http://schemas.microsoft.com/office/drawing/2014/main" id="{7DF5C280-96E9-673E-CC19-A7A2DA5DC896}"/>
               </a:ext>
             </a:extLst>
@@ -4208,8 +5337,8 @@
           </a:p>
         </p:txBody>
       </p:sp>
-      <mc:AlternateContent xmlns:mc="http://schemas.openxmlformats.org/markup-compatibility/2006">
-        <mc:Choice xmlns:a14="http://schemas.microsoft.com/office/drawing/2010/main" Requires="a14">
+      <mc:AlternateContent xmlns:mc="http://schemas.openxmlformats.org/markup-compatibility/2006" xmlns:a14="http://schemas.microsoft.com/office/drawing/2010/main">
+        <mc:Choice Requires="a14">
           <p:sp>
             <p:nvSpPr>
               <p:cNvPr id="3" name="Content Placeholder 2">
@@ -4264,29 +5393,39 @@
                       <m:borderBox>
                         <m:borderBoxPr>
                           <m:ctrlPr>
-                            <a:rPr lang="ar-AE"/>
+                            <a:rPr lang="ar-AE" i="1">
+                              <a:latin typeface="Cambria Math" panose="02040503050406030204" pitchFamily="18" charset="0"/>
+                            </a:rPr>
                           </m:ctrlPr>
                         </m:borderBoxPr>
                         <m:e>
                           <m:r>
-                            <a:rPr lang="ar-AE" i="1"/>
+                            <a:rPr lang="ar-AE" i="1">
+                              <a:latin typeface="Cambria Math" panose="02040503050406030204" pitchFamily="18" charset="0"/>
+                            </a:rPr>
                             <m:t>𝑉</m:t>
                           </m:r>
                           <m:sSubSup>
                             <m:sSubSupPr>
                               <m:ctrlPr>
-                                <a:rPr lang="ar-AE" i="1"/>
+                                <a:rPr lang="ar-AE" i="1">
+                                  <a:latin typeface="Cambria Math" panose="02040503050406030204" pitchFamily="18" charset="0"/>
+                                </a:rPr>
                               </m:ctrlPr>
                             </m:sSubSupPr>
                             <m:e>
                               <m:r>
-                                <a:rPr lang="ar-AE" i="1"/>
+                                <a:rPr lang="ar-AE" i="1">
+                                  <a:latin typeface="Cambria Math" panose="02040503050406030204" pitchFamily="18" charset="0"/>
+                                </a:rPr>
                                 <m:t>𝐼</m:t>
                               </m:r>
                             </m:e>
                             <m:sub>
                               <m:r>
-                                <a:rPr lang="ar-AE" i="1"/>
+                                <a:rPr lang="ar-AE" i="1">
+                                  <a:latin typeface="Cambria Math" panose="02040503050406030204" pitchFamily="18" charset="0"/>
+                                </a:rPr>
                                 <m:t>𝑗</m:t>
                               </m:r>
                             </m:sub>
@@ -4301,24 +5440,32 @@
                             </m:sup>
                           </m:sSubSup>
                           <m:r>
-                            <a:rPr lang="ar-AE"/>
+                            <a:rPr lang="ar-AE">
+                              <a:latin typeface="Cambria Math" panose="02040503050406030204" pitchFamily="18" charset="0"/>
+                            </a:rPr>
                             <m:t>=</m:t>
                           </m:r>
                           <m:f>
                             <m:fPr>
                               <m:ctrlPr>
-                                <a:rPr lang="ar-AE" i="1"/>
+                                <a:rPr lang="ar-AE" i="1">
+                                  <a:latin typeface="Cambria Math" panose="02040503050406030204" pitchFamily="18" charset="0"/>
+                                </a:rPr>
                               </m:ctrlPr>
                             </m:fPr>
                             <m:num>
                               <m:r>
-                                <a:rPr lang="ar-AE"/>
+                                <a:rPr lang="ar-AE">
+                                  <a:latin typeface="Cambria Math" panose="02040503050406030204" pitchFamily="18" charset="0"/>
+                                </a:rPr>
                                 <m:t>1</m:t>
                               </m:r>
                             </m:num>
                             <m:den>
                               <m:r>
-                                <a:rPr lang="ar-AE" i="1"/>
+                                <a:rPr lang="ar-AE" i="1">
+                                  <a:latin typeface="Cambria Math" panose="02040503050406030204" pitchFamily="18" charset="0"/>
+                                </a:rPr>
                                 <m:t>𝐵</m:t>
                               </m:r>
                             </m:den>
@@ -4328,32 +5475,44 @@
                               <m:chr m:val="∑"/>
                               <m:grow m:val="on"/>
                               <m:ctrlPr>
-                                <a:rPr lang="ar-AE" i="1"/>
+                                <a:rPr lang="ar-AE" i="1">
+                                  <a:latin typeface="Cambria Math" panose="02040503050406030204" pitchFamily="18" charset="0"/>
+                                </a:rPr>
                               </m:ctrlPr>
                             </m:naryPr>
                             <m:sub>
                               <m:r>
-                                <a:rPr lang="ar-AE" i="1"/>
+                                <a:rPr lang="ar-AE" i="1">
+                                  <a:latin typeface="Cambria Math" panose="02040503050406030204" pitchFamily="18" charset="0"/>
+                                </a:rPr>
                                 <m:t>𝑏</m:t>
                               </m:r>
                               <m:r>
-                                <a:rPr lang="ar-AE"/>
+                                <a:rPr lang="ar-AE">
+                                  <a:latin typeface="Cambria Math" panose="02040503050406030204" pitchFamily="18" charset="0"/>
+                                </a:rPr>
                                 <m:t>=</m:t>
                               </m:r>
                               <m:r>
-                                <a:rPr lang="ar-AE"/>
+                                <a:rPr lang="ar-AE">
+                                  <a:latin typeface="Cambria Math" panose="02040503050406030204" pitchFamily="18" charset="0"/>
+                                </a:rPr>
                                 <m:t>1</m:t>
                               </m:r>
                             </m:sub>
                             <m:sup>
                               <m:r>
-                                <a:rPr lang="ar-AE" i="1"/>
+                                <a:rPr lang="ar-AE" i="1">
+                                  <a:latin typeface="Cambria Math" panose="02040503050406030204" pitchFamily="18" charset="0"/>
+                                </a:rPr>
                                 <m:t>𝐵</m:t>
                               </m:r>
                             </m:sup>
                             <m:e>
                               <m:r>
-                                <a:rPr lang="ar-AE" i="1"/>
+                                <a:rPr lang="ar-AE" i="1">
+                                  <a:latin typeface="Cambria Math" panose="02040503050406030204" pitchFamily="18" charset="0"/>
+                                </a:rPr>
                                 <m:t>𝑉</m:t>
                               </m:r>
                             </m:e>
@@ -4361,18 +5520,24 @@
                           <m:sSubSup>
                             <m:sSubSupPr>
                               <m:ctrlPr>
-                                <a:rPr lang="ar-AE" i="1"/>
+                                <a:rPr lang="ar-AE" i="1">
+                                  <a:latin typeface="Cambria Math" panose="02040503050406030204" pitchFamily="18" charset="0"/>
+                                </a:rPr>
                               </m:ctrlPr>
                             </m:sSubSupPr>
                             <m:e>
                               <m:r>
-                                <a:rPr lang="ar-AE" i="1"/>
+                                <a:rPr lang="ar-AE" i="1">
+                                  <a:latin typeface="Cambria Math" panose="02040503050406030204" pitchFamily="18" charset="0"/>
+                                </a:rPr>
                                 <m:t>𝐼</m:t>
                               </m:r>
                             </m:e>
                             <m:sub>
                               <m:r>
-                                <a:rPr lang="ar-AE" i="1"/>
+                                <a:rPr lang="ar-AE" i="1">
+                                  <a:latin typeface="Cambria Math" panose="02040503050406030204" pitchFamily="18" charset="0"/>
+                                </a:rPr>
                                 <m:t>𝑗</m:t>
                               </m:r>
                             </m:sub>
@@ -4380,12 +5545,16 @@
                               <m:d>
                                 <m:dPr>
                                   <m:ctrlPr>
-                                    <a:rPr lang="ar-AE" i="1"/>
+                                    <a:rPr lang="ar-AE" i="1">
+                                      <a:latin typeface="Cambria Math" panose="02040503050406030204" pitchFamily="18" charset="0"/>
+                                    </a:rPr>
                                   </m:ctrlPr>
                                 </m:dPr>
                                 <m:e>
                                   <m:r>
-                                    <a:rPr lang="ar-AE" i="1"/>
+                                    <a:rPr lang="ar-AE" i="1">
+                                      <a:latin typeface="Cambria Math" panose="02040503050406030204" pitchFamily="18" charset="0"/>
+                                    </a:rPr>
                                     <m:t>𝑏</m:t>
                                   </m:r>
                                 </m:e>
@@ -4408,7 +5577,7 @@
             </p:txBody>
           </p:sp>
         </mc:Choice>
-        <mc:Fallback>
+        <mc:Fallback xmlns="">
           <p:sp>
             <p:nvSpPr>
               <p:cNvPr id="3" name="Content Placeholder 2">
@@ -4461,7 +5630,7 @@
 </p:sld>
 </file>
 
-<file path=ppt/slides/slide11.xml><?xml version="1.0" encoding="utf-8"?>
+<file path=ppt/slides/slide12.xml><?xml version="1.0" encoding="utf-8"?>
 <p:sld xmlns:a="http://schemas.openxmlformats.org/drawingml/2006/main" xmlns:r="http://schemas.openxmlformats.org/officeDocument/2006/relationships" xmlns:p="http://schemas.openxmlformats.org/presentationml/2006/main">
   <p:cSld>
     <p:spTree>
@@ -4592,7 +5761,7 @@
 </p:sld>
 </file>
 
-<file path=ppt/slides/slide12.xml><?xml version="1.0" encoding="utf-8"?>
+<file path=ppt/slides/slide13.xml><?xml version="1.0" encoding="utf-8"?>
 <p:sld xmlns:a="http://schemas.openxmlformats.org/drawingml/2006/main" xmlns:r="http://schemas.openxmlformats.org/officeDocument/2006/relationships" xmlns:p="http://schemas.openxmlformats.org/presentationml/2006/main">
   <p:cSld>
     <p:spTree>
@@ -4637,8 +5806,8 @@
           </a:p>
         </p:txBody>
       </p:sp>
-      <mc:AlternateContent xmlns:mc="http://schemas.openxmlformats.org/markup-compatibility/2006">
-        <mc:Choice xmlns:a14="http://schemas.microsoft.com/office/drawing/2010/main" Requires="a14">
+      <mc:AlternateContent xmlns:mc="http://schemas.openxmlformats.org/markup-compatibility/2006" xmlns:a14="http://schemas.microsoft.com/office/drawing/2010/main">
+        <mc:Choice Requires="a14">
           <p:sp>
             <p:nvSpPr>
               <p:cNvPr id="3" name="Content Placeholder 2">
@@ -4735,41 +5904,55 @@
                     <m:sSub>
                       <m:sSubPr>
                         <m:ctrlPr>
-                          <a:rPr lang="ar-AE"/>
+                          <a:rPr lang="ar-AE" i="1">
+                            <a:latin typeface="Cambria Math" panose="02040503050406030204" pitchFamily="18" charset="0"/>
+                          </a:rPr>
                         </m:ctrlPr>
                       </m:sSubPr>
                       <m:e>
                         <m:r>
-                          <a:rPr lang="ar-AE" i="1"/>
+                          <a:rPr lang="ar-AE" i="1">
+                            <a:latin typeface="Cambria Math" panose="02040503050406030204" pitchFamily="18" charset="0"/>
+                          </a:rPr>
                           <m:t>𝑥</m:t>
                         </m:r>
                       </m:e>
                       <m:sub>
                         <m:r>
-                          <a:rPr lang="ar-AE"/>
+                          <a:rPr lang="ar-AE">
+                            <a:latin typeface="Cambria Math" panose="02040503050406030204" pitchFamily="18" charset="0"/>
+                          </a:rPr>
                           <m:t>1</m:t>
                         </m:r>
                       </m:sub>
                     </m:sSub>
                     <m:r>
-                      <a:rPr lang="ar-AE"/>
+                      <a:rPr lang="ar-AE">
+                        <a:latin typeface="Cambria Math" panose="02040503050406030204" pitchFamily="18" charset="0"/>
+                      </a:rPr>
                       <m:t>≈</m:t>
                     </m:r>
                     <m:sSub>
                       <m:sSubPr>
                         <m:ctrlPr>
-                          <a:rPr lang="ar-AE" i="1"/>
+                          <a:rPr lang="ar-AE" i="1">
+                            <a:latin typeface="Cambria Math" panose="02040503050406030204" pitchFamily="18" charset="0"/>
+                          </a:rPr>
                         </m:ctrlPr>
                       </m:sSubPr>
                       <m:e>
                         <m:r>
-                          <a:rPr lang="ar-AE" i="1"/>
+                          <a:rPr lang="ar-AE" i="1">
+                            <a:latin typeface="Cambria Math" panose="02040503050406030204" pitchFamily="18" charset="0"/>
+                          </a:rPr>
                           <m:t>𝑥</m:t>
                         </m:r>
                       </m:e>
                       <m:sub>
                         <m:r>
-                          <a:rPr lang="ar-AE"/>
+                          <a:rPr lang="ar-AE">
+                            <a:latin typeface="Cambria Math" panose="02040503050406030204" pitchFamily="18" charset="0"/>
+                          </a:rPr>
                           <m:t>2</m:t>
                         </m:r>
                       </m:sub>
@@ -4830,7 +6013,7 @@
             </p:txBody>
           </p:sp>
         </mc:Choice>
-        <mc:Fallback>
+        <mc:Fallback xmlns="">
           <p:sp>
             <p:nvSpPr>
               <p:cNvPr id="3" name="Content Placeholder 2">
@@ -4883,340 +6066,6 @@
 </p:sld>
 </file>
 
-<file path=ppt/slides/slide13.xml><?xml version="1.0" encoding="utf-8"?>
-<p:sld xmlns:a="http://schemas.openxmlformats.org/drawingml/2006/main" xmlns:r="http://schemas.openxmlformats.org/officeDocument/2006/relationships" xmlns:p="http://schemas.openxmlformats.org/presentationml/2006/main">
-  <p:cSld>
-    <p:bg>
-      <p:bgPr>
-        <a:solidFill>
-          <a:schemeClr val="bg1"/>
-        </a:solidFill>
-        <a:effectLst/>
-      </p:bgPr>
-    </p:bg>
-    <p:spTree>
-      <p:nvGrpSpPr>
-        <p:cNvPr id="1" name=""/>
-        <p:cNvGrpSpPr/>
-        <p:nvPr/>
-      </p:nvGrpSpPr>
-      <p:grpSpPr>
-        <a:xfrm>
-          <a:off x="0" y="0"/>
-          <a:ext cx="0" cy="0"/>
-          <a:chOff x="0" y="0"/>
-          <a:chExt cx="0" cy="0"/>
-        </a:xfrm>
-      </p:grpSpPr>
-      <p:sp useBgFill="1">
-        <p:nvSpPr>
-          <p:cNvPr id="12" name="Rectangle 11">
-            <a:extLst>
-              <a:ext uri="{FF2B5EF4-FFF2-40B4-BE49-F238E27FC236}">
-                <a16:creationId xmlns:a16="http://schemas.microsoft.com/office/drawing/2014/main" id="{E49D7415-2F11-44C2-B6AA-13A25B6814B9}"/>
-              </a:ext>
-              <a:ext uri="{C183D7F6-B498-43B3-948B-1728B52AA6E4}">
-                <adec:decorative xmlns:adec="http://schemas.microsoft.com/office/drawing/2017/decorative" val="1"/>
-              </a:ext>
-            </a:extLst>
-          </p:cNvPr>
-          <p:cNvSpPr>
-            <a:spLocks noGrp="1" noRot="1" noChangeAspect="1" noMove="1" noResize="1" noEditPoints="1" noAdjustHandles="1" noChangeArrowheads="1" noChangeShapeType="1" noTextEdit="1"/>
-          </p:cNvSpPr>
-          <p:nvPr>
-            <p:extLst>
-              <p:ext uri="{386F3935-93C4-4BCD-93E2-E3B085C9AB24}">
-                <p16:designElem xmlns:p16="http://schemas.microsoft.com/office/powerpoint/2015/main" val="1"/>
-              </p:ext>
-            </p:extLst>
-          </p:nvPr>
-        </p:nvSpPr>
-        <p:spPr>
-          <a:xfrm>
-            <a:off x="0" y="0"/>
-            <a:ext cx="12192000" cy="6858000"/>
-          </a:xfrm>
-          <a:prstGeom prst="rect">
-            <a:avLst/>
-          </a:prstGeom>
-          <a:ln w="12700" cap="flat" cmpd="sng" algn="ctr">
-            <a:noFill/>
-            <a:prstDash val="solid"/>
-            <a:miter lim="800000"/>
-          </a:ln>
-          <a:effectLst/>
-          <a:extLst>
-            <a:ext uri="{91240B29-F687-4F45-9708-019B960494DF}">
-              <a14:hiddenLine xmlns:a14="http://schemas.microsoft.com/office/drawing/2010/main" w="12700" cap="flat" cmpd="sng" algn="ctr">
-                <a:solidFill>
-                  <a:schemeClr val="accent1">
-                    <a:shade val="50000"/>
-                  </a:schemeClr>
-                </a:solidFill>
-                <a:prstDash val="solid"/>
-                <a:miter lim="800000"/>
-              </a14:hiddenLine>
-            </a:ext>
-          </a:extLst>
-        </p:spPr>
-        <p:style>
-          <a:lnRef idx="2">
-            <a:schemeClr val="accent1">
-              <a:shade val="50000"/>
-            </a:schemeClr>
-          </a:lnRef>
-          <a:fillRef idx="1">
-            <a:schemeClr val="accent1"/>
-          </a:fillRef>
-          <a:effectRef idx="0">
-            <a:schemeClr val="accent1"/>
-          </a:effectRef>
-          <a:fontRef idx="minor">
-            <a:schemeClr val="lt1"/>
-          </a:fontRef>
-        </p:style>
-        <p:txBody>
-          <a:bodyPr rtlCol="0" anchor="ctr"/>
-          <a:lstStyle/>
-          <a:p>
-            <a:pPr algn="ctr"/>
-            <a:endParaRPr lang="en-US"/>
-          </a:p>
-        </p:txBody>
-      </p:sp>
-      <p:sp>
-        <p:nvSpPr>
-          <p:cNvPr id="2" name="Title 1">
-            <a:extLst>
-              <a:ext uri="{FF2B5EF4-FFF2-40B4-BE49-F238E27FC236}">
-                <a16:creationId xmlns:a16="http://schemas.microsoft.com/office/drawing/2014/main" id="{A03F61DF-6AF2-CA0F-A2CF-CB20974D3E82}"/>
-              </a:ext>
-            </a:extLst>
-          </p:cNvPr>
-          <p:cNvSpPr>
-            <a:spLocks noGrp="1"/>
-          </p:cNvSpPr>
-          <p:nvPr>
-            <p:ph type="title"/>
-          </p:nvPr>
-        </p:nvSpPr>
-        <p:spPr>
-          <a:xfrm>
-            <a:off x="704088" y="914400"/>
-            <a:ext cx="10687812" cy="798194"/>
-          </a:xfrm>
-        </p:spPr>
-        <p:txBody>
-          <a:bodyPr vert="horz" lIns="91440" tIns="45720" rIns="91440" bIns="45720" rtlCol="0" anchor="t">
-            <a:normAutofit/>
-          </a:bodyPr>
-          <a:lstStyle/>
-          <a:p>
-            <a:r>
-              <a:rPr lang="en-US"/>
-              <a:t>Correlated Features</a:t>
-            </a:r>
-            <a:endParaRPr lang="en-US" dirty="0"/>
-          </a:p>
-        </p:txBody>
-      </p:sp>
-      <p:cxnSp>
-        <p:nvCxnSpPr>
-          <p:cNvPr id="14" name="Straight Connector 13">
-            <a:extLst>
-              <a:ext uri="{FF2B5EF4-FFF2-40B4-BE49-F238E27FC236}">
-                <a16:creationId xmlns:a16="http://schemas.microsoft.com/office/drawing/2014/main" id="{D2E57F3D-33BE-4306-87E6-245763719516}"/>
-              </a:ext>
-              <a:ext uri="{C183D7F6-B498-43B3-948B-1728B52AA6E4}">
-                <adec:decorative xmlns:adec="http://schemas.microsoft.com/office/drawing/2017/decorative" val="1"/>
-              </a:ext>
-            </a:extLst>
-          </p:cNvPr>
-          <p:cNvCxnSpPr>
-            <a:cxnSpLocks noGrp="1" noRot="1" noChangeAspect="1" noMove="1" noResize="1" noEditPoints="1" noAdjustHandles="1" noChangeArrowheads="1" noChangeShapeType="1"/>
-          </p:cNvCxnSpPr>
-          <p:nvPr>
-            <p:extLst>
-              <p:ext uri="{386F3935-93C4-4BCD-93E2-E3B085C9AB24}">
-                <p16:designElem xmlns:p16="http://schemas.microsoft.com/office/powerpoint/2015/main" val="1"/>
-              </p:ext>
-            </p:extLst>
-          </p:nvPr>
-        </p:nvCxnSpPr>
-        <p:spPr>
-          <a:xfrm>
-            <a:off x="804672" y="723900"/>
-            <a:ext cx="10588752" cy="0"/>
-          </a:xfrm>
-          <a:prstGeom prst="line">
-            <a:avLst/>
-          </a:prstGeom>
-          <a:ln w="44450">
-            <a:solidFill>
-              <a:schemeClr val="tx1"/>
-            </a:solidFill>
-          </a:ln>
-        </p:spPr>
-        <p:style>
-          <a:lnRef idx="1">
-            <a:schemeClr val="accent1"/>
-          </a:lnRef>
-          <a:fillRef idx="0">
-            <a:schemeClr val="accent1"/>
-          </a:fillRef>
-          <a:effectRef idx="0">
-            <a:schemeClr val="accent1"/>
-          </a:effectRef>
-          <a:fontRef idx="minor">
-            <a:schemeClr val="tx1"/>
-          </a:fontRef>
-        </p:style>
-      </p:cxnSp>
-      <p:pic>
-        <p:nvPicPr>
-          <p:cNvPr id="5" name="Content Placeholder 4">
-            <a:extLst>
-              <a:ext uri="{FF2B5EF4-FFF2-40B4-BE49-F238E27FC236}">
-                <a16:creationId xmlns:a16="http://schemas.microsoft.com/office/drawing/2014/main" id="{4B06499E-302F-BAA0-24E4-BAABB67CC416}"/>
-              </a:ext>
-            </a:extLst>
-          </p:cNvPr>
-          <p:cNvPicPr>
-            <a:picLocks noGrp="1" noChangeAspect="1"/>
-          </p:cNvPicPr>
-          <p:nvPr>
-            <p:ph idx="1"/>
-          </p:nvPr>
-        </p:nvPicPr>
-        <p:blipFill>
-          <a:blip r:embed="rId2">
-            <a:extLst>
-              <a:ext uri="{28A0092B-C50C-407E-A947-70E740481C1C}">
-                <a14:useLocalDpi xmlns:a14="http://schemas.microsoft.com/office/drawing/2010/main" val="0"/>
-              </a:ext>
-            </a:extLst>
-          </a:blip>
-          <a:stretch>
-            <a:fillRect/>
-          </a:stretch>
-        </p:blipFill>
-        <p:spPr>
-          <a:xfrm>
-            <a:off x="217406" y="1835573"/>
-            <a:ext cx="6983494" cy="3910755"/>
-          </a:xfrm>
-          <a:prstGeom prst="rect">
-            <a:avLst/>
-          </a:prstGeom>
-        </p:spPr>
-      </p:pic>
-      <p:sp>
-        <p:nvSpPr>
-          <p:cNvPr id="7" name="TextBox 6">
-            <a:extLst>
-              <a:ext uri="{FF2B5EF4-FFF2-40B4-BE49-F238E27FC236}">
-                <a16:creationId xmlns:a16="http://schemas.microsoft.com/office/drawing/2014/main" id="{5FC8F8C5-1E4F-DEE3-2438-5D5CAC176A41}"/>
-              </a:ext>
-            </a:extLst>
-          </p:cNvPr>
-          <p:cNvSpPr txBox="1"/>
-          <p:nvPr/>
-        </p:nvSpPr>
-        <p:spPr>
-          <a:xfrm>
-            <a:off x="7200900" y="1849121"/>
-            <a:ext cx="4191001" cy="4139626"/>
-          </a:xfrm>
-          <a:prstGeom prst="rect">
-            <a:avLst/>
-          </a:prstGeom>
-        </p:spPr>
-        <p:txBody>
-          <a:bodyPr vert="horz" lIns="91440" tIns="45720" rIns="91440" bIns="45720" rtlCol="0" anchor="t">
-            <a:normAutofit/>
-          </a:bodyPr>
-          <a:lstStyle/>
-          <a:p>
-            <a:pPr>
-              <a:lnSpc>
-                <a:spcPct val="110000"/>
-              </a:lnSpc>
-              <a:spcAft>
-                <a:spcPts val="600"/>
-              </a:spcAft>
-            </a:pPr>
-            <a:r>
-              <a:rPr lang="en-US" dirty="0"/>
-              <a:t>With correlated predictors, coefficients can shift between model fits even when overall performance is similar. The predictive signal is shared, so individual coefficient-based importance becomes unstable. Interpret these values cautiously under multicollinearity.</a:t>
-            </a:r>
-          </a:p>
-        </p:txBody>
-      </p:sp>
-      <p:cxnSp>
-        <p:nvCxnSpPr>
-          <p:cNvPr id="19" name="Straight Connector 18">
-            <a:extLst>
-              <a:ext uri="{FF2B5EF4-FFF2-40B4-BE49-F238E27FC236}">
-                <a16:creationId xmlns:a16="http://schemas.microsoft.com/office/drawing/2014/main" id="{8E0104E4-99BC-494F-8342-F250828E574F}"/>
-              </a:ext>
-              <a:ext uri="{C183D7F6-B498-43B3-948B-1728B52AA6E4}">
-                <adec:decorative xmlns:adec="http://schemas.microsoft.com/office/drawing/2017/decorative" val="1"/>
-              </a:ext>
-            </a:extLst>
-          </p:cNvPr>
-          <p:cNvCxnSpPr>
-            <a:cxnSpLocks noGrp="1" noRot="1" noChangeAspect="1" noMove="1" noResize="1" noEditPoints="1" noAdjustHandles="1" noChangeArrowheads="1" noChangeShapeType="1"/>
-          </p:cNvCxnSpPr>
-          <p:nvPr>
-            <p:extLst>
-              <p:ext uri="{386F3935-93C4-4BCD-93E2-E3B085C9AB24}">
-                <p16:designElem xmlns:p16="http://schemas.microsoft.com/office/powerpoint/2015/main" val="1"/>
-              </p:ext>
-            </p:extLst>
-          </p:nvPr>
-        </p:nvCxnSpPr>
-        <p:spPr>
-          <a:xfrm>
-            <a:off x="809065" y="6145599"/>
-            <a:ext cx="10582835" cy="0"/>
-          </a:xfrm>
-          <a:prstGeom prst="line">
-            <a:avLst/>
-          </a:prstGeom>
-          <a:ln w="12700">
-            <a:solidFill>
-              <a:schemeClr val="tx1"/>
-            </a:solidFill>
-          </a:ln>
-        </p:spPr>
-        <p:style>
-          <a:lnRef idx="1">
-            <a:schemeClr val="accent1"/>
-          </a:lnRef>
-          <a:fillRef idx="0">
-            <a:schemeClr val="accent1"/>
-          </a:fillRef>
-          <a:effectRef idx="0">
-            <a:schemeClr val="accent1"/>
-          </a:effectRef>
-          <a:fontRef idx="minor">
-            <a:schemeClr val="tx1"/>
-          </a:fontRef>
-        </p:style>
-      </p:cxnSp>
-    </p:spTree>
-    <p:extLst>
-      <p:ext uri="{BB962C8B-B14F-4D97-AF65-F5344CB8AC3E}">
-        <p14:creationId xmlns:p14="http://schemas.microsoft.com/office/powerpoint/2010/main" val="2389656440"/>
-      </p:ext>
-    </p:extLst>
-  </p:cSld>
-  <p:clrMapOvr>
-    <a:masterClrMapping/>
-  </p:clrMapOvr>
-</p:sld>
-</file>
-
 <file path=ppt/slides/slide14.xml><?xml version="1.0" encoding="utf-8"?>
 <p:sld xmlns:a="http://schemas.openxmlformats.org/drawingml/2006/main" xmlns:r="http://schemas.openxmlformats.org/officeDocument/2006/relationships" xmlns:p="http://schemas.openxmlformats.org/presentationml/2006/main">
   <p:cSld>
@@ -5354,8 +6203,8 @@
           </a:p>
         </p:txBody>
       </p:sp>
-      <mc:AlternateContent xmlns:mc="http://schemas.openxmlformats.org/markup-compatibility/2006">
-        <mc:Choice xmlns:a14="http://schemas.microsoft.com/office/drawing/2010/main" Requires="a14">
+      <mc:AlternateContent xmlns:mc="http://schemas.openxmlformats.org/markup-compatibility/2006" xmlns:a14="http://schemas.microsoft.com/office/drawing/2010/main">
+        <mc:Choice Requires="a14">
           <p:sp>
             <p:nvSpPr>
               <p:cNvPr id="3" name="Content Placeholder 2">
@@ -5394,12 +6243,16 @@
                       <m:accPr>
                         <m:chr m:val="̂"/>
                         <m:ctrlPr>
-                          <a:rPr lang="ar-AE"/>
+                          <a:rPr lang="ar-AE" i="1">
+                            <a:latin typeface="Cambria Math" panose="02040503050406030204" pitchFamily="18" charset="0"/>
+                          </a:rPr>
                         </m:ctrlPr>
                       </m:accPr>
                       <m:e>
                         <m:r>
-                          <a:rPr lang="ar-AE" i="1"/>
+                          <a:rPr lang="ar-AE" i="1">
+                            <a:latin typeface="Cambria Math" panose="02040503050406030204" pitchFamily="18" charset="0"/>
+                          </a:rPr>
                           <m:t>𝑓</m:t>
                         </m:r>
                       </m:e>
@@ -5419,18 +6272,24 @@
                 <a14:m>
                   <m:oMath xmlns:m="http://schemas.openxmlformats.org/officeDocument/2006/math">
                     <m:r>
-                      <a:rPr lang="en-US" i="1"/>
+                      <a:rPr lang="en-US" i="1">
+                        <a:latin typeface="Cambria Math" panose="02040503050406030204" pitchFamily="18" charset="0"/>
+                      </a:rPr>
                       <m:t>𝐿</m:t>
                     </m:r>
                     <m:d>
                       <m:dPr>
                         <m:ctrlPr>
-                          <a:rPr lang="ar-AE" i="1"/>
+                          <a:rPr lang="ar-AE" i="1">
+                            <a:latin typeface="Cambria Math" panose="02040503050406030204" pitchFamily="18" charset="0"/>
+                          </a:rPr>
                         </m:ctrlPr>
                       </m:dPr>
                       <m:e>
                         <m:r>
-                          <a:rPr lang="ar-AE"/>
+                          <a:rPr lang="ar-AE">
+                            <a:latin typeface="Cambria Math" panose="02040503050406030204" pitchFamily="18" charset="0"/>
+                          </a:rPr>
                           <m:t>⋅</m:t>
                         </m:r>
                       </m:e>
@@ -5450,7 +6309,9 @@
                 <a14:m>
                   <m:oMath xmlns:m="http://schemas.openxmlformats.org/officeDocument/2006/math">
                     <m:r>
-                      <a:rPr lang="en-US" i="1"/>
+                      <a:rPr lang="en-US" i="1">
+                        <a:latin typeface="Cambria Math" panose="02040503050406030204" pitchFamily="18" charset="0"/>
+                      </a:rPr>
                       <m:t>𝑋</m:t>
                     </m:r>
                   </m:oMath>
@@ -5466,12 +6327,16 @@
                     <m:sSub>
                       <m:sSubPr>
                         <m:ctrlPr>
-                          <a:rPr lang="ar-AE"/>
+                          <a:rPr lang="ar-AE" i="1">
+                            <a:latin typeface="Cambria Math" panose="02040503050406030204" pitchFamily="18" charset="0"/>
+                          </a:rPr>
                         </m:ctrlPr>
                       </m:sSubPr>
                       <m:e>
                         <m:r>
-                          <a:rPr lang="ar-AE" i="1"/>
+                          <a:rPr lang="ar-AE" i="1">
+                            <a:latin typeface="Cambria Math" panose="02040503050406030204" pitchFamily="18" charset="0"/>
+                          </a:rPr>
                           <m:t>𝑋</m:t>
                         </m:r>
                       </m:e>
@@ -5486,12 +6351,16 @@
                         <m:d>
                           <m:dPr>
                             <m:ctrlPr>
-                              <a:rPr lang="ar-AE" i="1"/>
+                              <a:rPr lang="ar-AE" i="1">
+                                <a:latin typeface="Cambria Math" panose="02040503050406030204" pitchFamily="18" charset="0"/>
+                              </a:rPr>
                             </m:ctrlPr>
                           </m:dPr>
                           <m:e>
                             <m:r>
-                              <a:rPr lang="ar-AE" i="1"/>
+                              <a:rPr lang="ar-AE" i="1">
+                                <a:latin typeface="Cambria Math" panose="02040503050406030204" pitchFamily="18" charset="0"/>
+                              </a:rPr>
                               <m:t>𝑗</m:t>
                             </m:r>
                           </m:e>
@@ -5513,18 +6382,24 @@
                     <m:sSub>
                       <m:sSubPr>
                         <m:ctrlPr>
-                          <a:rPr lang="ar-AE"/>
+                          <a:rPr lang="ar-AE" i="1">
+                            <a:latin typeface="Cambria Math" panose="02040503050406030204" pitchFamily="18" charset="0"/>
+                          </a:rPr>
                         </m:ctrlPr>
                       </m:sSubPr>
                       <m:e>
                         <m:r>
-                          <a:rPr lang="ar-AE" i="1"/>
+                          <a:rPr lang="ar-AE" i="1">
+                            <a:latin typeface="Cambria Math" panose="02040503050406030204" pitchFamily="18" charset="0"/>
+                          </a:rPr>
                           <m:t>𝑥</m:t>
                         </m:r>
                       </m:e>
                       <m:sub>
                         <m:r>
-                          <a:rPr lang="ar-AE" i="1"/>
+                          <a:rPr lang="ar-AE" i="1">
+                            <a:latin typeface="Cambria Math" panose="02040503050406030204" pitchFamily="18" charset="0"/>
+                          </a:rPr>
                           <m:t>𝑗</m:t>
                         </m:r>
                       </m:sub>
@@ -5552,7 +6427,9 @@
                       <m:sSub>
                         <m:sSubPr>
                           <m:ctrlPr>
-                            <a:rPr lang="ar-AE"/>
+                            <a:rPr lang="ar-AE" i="1">
+                              <a:latin typeface="Cambria Math" panose="02040503050406030204" pitchFamily="18" charset="0"/>
+                            </a:rPr>
                           </m:ctrlPr>
                         </m:sSubPr>
                         <m:e>
@@ -5566,33 +6443,45 @@
                         </m:e>
                         <m:sub>
                           <m:r>
-                            <a:rPr lang="ar-AE" b="0" i="1"/>
+                            <a:rPr lang="ar-AE" b="0" i="1">
+                              <a:latin typeface="Cambria Math" panose="02040503050406030204" pitchFamily="18" charset="0"/>
+                            </a:rPr>
                             <m:t>𝑗</m:t>
                           </m:r>
                         </m:sub>
                       </m:sSub>
                       <m:r>
-                        <a:rPr lang="ar-AE"/>
+                        <a:rPr lang="ar-AE">
+                          <a:latin typeface="Cambria Math" panose="02040503050406030204" pitchFamily="18" charset="0"/>
+                        </a:rPr>
                         <m:t>=</m:t>
                       </m:r>
                       <m:r>
-                        <a:rPr lang="ar-AE" i="1"/>
+                        <a:rPr lang="ar-AE" i="1">
+                          <a:latin typeface="Cambria Math" panose="02040503050406030204" pitchFamily="18" charset="0"/>
+                        </a:rPr>
                         <m:t>𝐿</m:t>
                       </m:r>
                       <m:r>
-                        <a:rPr lang="ar-AE"/>
+                        <a:rPr lang="ar-AE">
+                          <a:latin typeface="Cambria Math" panose="02040503050406030204" pitchFamily="18" charset="0"/>
+                        </a:rPr>
                         <m:t>(</m:t>
                       </m:r>
                       <m:acc>
                         <m:accPr>
                           <m:chr m:val="̂"/>
                           <m:ctrlPr>
-                            <a:rPr lang="ar-AE" i="1"/>
+                            <a:rPr lang="ar-AE" i="1">
+                              <a:latin typeface="Cambria Math" panose="02040503050406030204" pitchFamily="18" charset="0"/>
+                            </a:rPr>
                           </m:ctrlPr>
                         </m:accPr>
                         <m:e>
                           <m:r>
-                            <a:rPr lang="ar-AE" i="1"/>
+                            <a:rPr lang="ar-AE" i="1">
+                              <a:latin typeface="Cambria Math" panose="02040503050406030204" pitchFamily="18" charset="0"/>
+                            </a:rPr>
                             <m:t>𝑓</m:t>
                           </m:r>
                         </m:e>
@@ -5600,19 +6489,25 @@
                       <m:d>
                         <m:dPr>
                           <m:ctrlPr>
-                            <a:rPr lang="ar-AE" i="1"/>
+                            <a:rPr lang="ar-AE" i="1">
+                              <a:latin typeface="Cambria Math" panose="02040503050406030204" pitchFamily="18" charset="0"/>
+                            </a:rPr>
                           </m:ctrlPr>
                         </m:dPr>
                         <m:e>
                           <m:sSub>
                             <m:sSubPr>
                               <m:ctrlPr>
-                                <a:rPr lang="ar-AE" i="1"/>
+                                <a:rPr lang="ar-AE" i="1">
+                                  <a:latin typeface="Cambria Math" panose="02040503050406030204" pitchFamily="18" charset="0"/>
+                                </a:rPr>
                               </m:ctrlPr>
                             </m:sSubPr>
                             <m:e>
                               <m:r>
-                                <a:rPr lang="ar-AE" i="1"/>
+                                <a:rPr lang="ar-AE" i="1">
+                                  <a:latin typeface="Cambria Math" panose="02040503050406030204" pitchFamily="18" charset="0"/>
+                                </a:rPr>
                                 <m:t>𝑋</m:t>
                               </m:r>
                             </m:e>
@@ -5627,12 +6522,16 @@
                               <m:d>
                                 <m:dPr>
                                   <m:ctrlPr>
-                                    <a:rPr lang="ar-AE" i="1"/>
+                                    <a:rPr lang="ar-AE" i="1">
+                                      <a:latin typeface="Cambria Math" panose="02040503050406030204" pitchFamily="18" charset="0"/>
+                                    </a:rPr>
                                   </m:ctrlPr>
                                 </m:dPr>
                                 <m:e>
                                   <m:r>
-                                    <a:rPr lang="ar-AE" i="1"/>
+                                    <a:rPr lang="ar-AE" i="1">
+                                      <a:latin typeface="Cambria Math" panose="02040503050406030204" pitchFamily="18" charset="0"/>
+                                    </a:rPr>
                                     <m:t>𝑗</m:t>
                                   </m:r>
                                 </m:e>
@@ -5642,35 +6541,49 @@
                         </m:e>
                       </m:d>
                       <m:r>
-                        <a:rPr lang="ar-AE"/>
+                        <a:rPr lang="ar-AE">
+                          <a:latin typeface="Cambria Math" panose="02040503050406030204" pitchFamily="18" charset="0"/>
+                        </a:rPr>
                         <m:t>,</m:t>
                       </m:r>
                       <m:r>
-                        <a:rPr lang="ar-AE" i="1"/>
+                        <a:rPr lang="ar-AE" i="1">
+                          <a:latin typeface="Cambria Math" panose="02040503050406030204" pitchFamily="18" charset="0"/>
+                        </a:rPr>
                         <m:t>𝑌</m:t>
                       </m:r>
                       <m:r>
-                        <a:rPr lang="ar-AE"/>
+                        <a:rPr lang="ar-AE">
+                          <a:latin typeface="Cambria Math" panose="02040503050406030204" pitchFamily="18" charset="0"/>
+                        </a:rPr>
                         <m:t>)−</m:t>
                       </m:r>
                       <m:r>
-                        <a:rPr lang="ar-AE" i="1"/>
+                        <a:rPr lang="ar-AE" i="1">
+                          <a:latin typeface="Cambria Math" panose="02040503050406030204" pitchFamily="18" charset="0"/>
+                        </a:rPr>
                         <m:t>𝐿</m:t>
                       </m:r>
                       <m:r>
-                        <a:rPr lang="ar-AE"/>
+                        <a:rPr lang="ar-AE">
+                          <a:latin typeface="Cambria Math" panose="02040503050406030204" pitchFamily="18" charset="0"/>
+                        </a:rPr>
                         <m:t>(</m:t>
                       </m:r>
                       <m:acc>
                         <m:accPr>
                           <m:chr m:val="̂"/>
                           <m:ctrlPr>
-                            <a:rPr lang="ar-AE" i="1"/>
+                            <a:rPr lang="ar-AE" i="1">
+                              <a:latin typeface="Cambria Math" panose="02040503050406030204" pitchFamily="18" charset="0"/>
+                            </a:rPr>
                           </m:ctrlPr>
                         </m:accPr>
                         <m:e>
                           <m:r>
-                            <a:rPr lang="ar-AE" i="1"/>
+                            <a:rPr lang="ar-AE" i="1">
+                              <a:latin typeface="Cambria Math" panose="02040503050406030204" pitchFamily="18" charset="0"/>
+                            </a:rPr>
                             <m:t>𝑓</m:t>
                           </m:r>
                         </m:e>
@@ -5678,26 +6591,36 @@
                       <m:d>
                         <m:dPr>
                           <m:ctrlPr>
-                            <a:rPr lang="ar-AE" i="1"/>
+                            <a:rPr lang="ar-AE" i="1">
+                              <a:latin typeface="Cambria Math" panose="02040503050406030204" pitchFamily="18" charset="0"/>
+                            </a:rPr>
                           </m:ctrlPr>
                         </m:dPr>
                         <m:e>
                           <m:r>
-                            <a:rPr lang="ar-AE" i="1"/>
+                            <a:rPr lang="ar-AE" i="1">
+                              <a:latin typeface="Cambria Math" panose="02040503050406030204" pitchFamily="18" charset="0"/>
+                            </a:rPr>
                             <m:t>𝑋</m:t>
                           </m:r>
                         </m:e>
                       </m:d>
                       <m:r>
-                        <a:rPr lang="ar-AE"/>
+                        <a:rPr lang="ar-AE">
+                          <a:latin typeface="Cambria Math" panose="02040503050406030204" pitchFamily="18" charset="0"/>
+                        </a:rPr>
                         <m:t>,</m:t>
                       </m:r>
                       <m:r>
-                        <a:rPr lang="ar-AE" i="1"/>
+                        <a:rPr lang="ar-AE" i="1">
+                          <a:latin typeface="Cambria Math" panose="02040503050406030204" pitchFamily="18" charset="0"/>
+                        </a:rPr>
                         <m:t>𝑌</m:t>
                       </m:r>
                       <m:r>
-                        <a:rPr lang="ar-AE"/>
+                        <a:rPr lang="ar-AE">
+                          <a:latin typeface="Cambria Math" panose="02040503050406030204" pitchFamily="18" charset="0"/>
+                        </a:rPr>
                         <m:t>)</m:t>
                       </m:r>
                     </m:oMath>
@@ -5711,7 +6634,7 @@
             </p:txBody>
           </p:sp>
         </mc:Choice>
-        <mc:Fallback>
+        <mc:Fallback xmlns="">
           <p:sp>
             <p:nvSpPr>
               <p:cNvPr id="3" name="Content Placeholder 2">
@@ -5815,8 +6738,8 @@
           </a:p>
         </p:txBody>
       </p:sp>
-      <mc:AlternateContent xmlns:mc="http://schemas.openxmlformats.org/markup-compatibility/2006">
-        <mc:Choice xmlns:a14="http://schemas.microsoft.com/office/drawing/2010/main" Requires="a14">
+      <mc:AlternateContent xmlns:mc="http://schemas.openxmlformats.org/markup-compatibility/2006" xmlns:a14="http://schemas.microsoft.com/office/drawing/2010/main">
+        <mc:Choice Requires="a14">
           <p:sp>
             <p:nvSpPr>
               <p:cNvPr id="3" name="Content Placeholder 2">
@@ -5863,18 +6786,24 @@
                     <m:sSub>
                       <m:sSubPr>
                         <m:ctrlPr>
-                          <a:rPr lang="ar-AE"/>
+                          <a:rPr lang="ar-AE" i="1">
+                            <a:latin typeface="Cambria Math" panose="02040503050406030204" pitchFamily="18" charset="0"/>
+                          </a:rPr>
                         </m:ctrlPr>
                       </m:sSubPr>
                       <m:e>
                         <m:r>
-                          <a:rPr lang="ar-AE" i="1"/>
+                          <a:rPr lang="ar-AE" i="1">
+                            <a:latin typeface="Cambria Math" panose="02040503050406030204" pitchFamily="18" charset="0"/>
+                          </a:rPr>
                           <m:t>𝑥</m:t>
                         </m:r>
                       </m:e>
                       <m:sub>
                         <m:r>
-                          <a:rPr lang="ar-AE" i="1"/>
+                          <a:rPr lang="ar-AE" i="1">
+                            <a:latin typeface="Cambria Math" panose="02040503050406030204" pitchFamily="18" charset="0"/>
+                          </a:rPr>
                           <m:t>𝑗</m:t>
                         </m:r>
                       </m:sub>
@@ -5898,12 +6827,16 @@
                     <m:sSub>
                       <m:sSubPr>
                         <m:ctrlPr>
-                          <a:rPr lang="ar-AE"/>
+                          <a:rPr lang="ar-AE" i="1">
+                            <a:latin typeface="Cambria Math" panose="02040503050406030204" pitchFamily="18" charset="0"/>
+                          </a:rPr>
                         </m:ctrlPr>
                       </m:sSubPr>
                       <m:e>
                         <m:r>
-                          <a:rPr lang="ar-AE" i="1"/>
+                          <a:rPr lang="ar-AE" i="1">
+                            <a:latin typeface="Cambria Math" panose="02040503050406030204" pitchFamily="18" charset="0"/>
+                          </a:rPr>
                           <m:t>𝑆</m:t>
                         </m:r>
                       </m:e>
@@ -5933,23 +6866,33 @@
                 <a14:m>
                   <m:oMath xmlns:m="http://schemas.openxmlformats.org/officeDocument/2006/math">
                     <m:r>
-                      <a:rPr lang="en-US" i="1"/>
+                      <a:rPr lang="en-US" i="1">
+                        <a:latin typeface="Cambria Math" panose="02040503050406030204" pitchFamily="18" charset="0"/>
+                      </a:rPr>
                       <m:t>𝑟</m:t>
                     </m:r>
                     <m:r>
-                      <a:rPr lang="en-US"/>
+                      <a:rPr lang="en-US">
+                        <a:latin typeface="Cambria Math" panose="02040503050406030204" pitchFamily="18" charset="0"/>
+                      </a:rPr>
                       <m:t>=</m:t>
                     </m:r>
                     <m:r>
-                      <a:rPr lang="en-US"/>
+                      <a:rPr lang="en-US">
+                        <a:latin typeface="Cambria Math" panose="02040503050406030204" pitchFamily="18" charset="0"/>
+                      </a:rPr>
                       <m:t>1</m:t>
                     </m:r>
                     <m:r>
-                      <a:rPr lang="en-US"/>
+                      <a:rPr lang="en-US">
+                        <a:latin typeface="Cambria Math" panose="02040503050406030204" pitchFamily="18" charset="0"/>
+                      </a:rPr>
                       <m:t>,…,</m:t>
                     </m:r>
                     <m:r>
-                      <a:rPr lang="en-US" i="1"/>
+                      <a:rPr lang="en-US" i="1">
+                        <a:latin typeface="Cambria Math" panose="02040503050406030204" pitchFamily="18" charset="0"/>
+                      </a:rPr>
                       <m:t>𝑅</m:t>
                     </m:r>
                   </m:oMath>
@@ -5970,18 +6913,24 @@
                     <m:sSub>
                       <m:sSubPr>
                         <m:ctrlPr>
-                          <a:rPr lang="ar-AE"/>
+                          <a:rPr lang="ar-AE" i="1">
+                            <a:latin typeface="Cambria Math" panose="02040503050406030204" pitchFamily="18" charset="0"/>
+                          </a:rPr>
                         </m:ctrlPr>
                       </m:sSubPr>
                       <m:e>
                         <m:r>
-                          <a:rPr lang="ar-AE" i="1"/>
+                          <a:rPr lang="ar-AE" i="1">
+                            <a:latin typeface="Cambria Math" panose="02040503050406030204" pitchFamily="18" charset="0"/>
+                          </a:rPr>
                           <m:t>𝑥</m:t>
                         </m:r>
                       </m:e>
                       <m:sub>
                         <m:r>
-                          <a:rPr lang="ar-AE" i="1"/>
+                          <a:rPr lang="ar-AE" i="1">
+                            <a:latin typeface="Cambria Math" panose="02040503050406030204" pitchFamily="18" charset="0"/>
+                          </a:rPr>
                           <m:t>𝑗</m:t>
                         </m:r>
                       </m:sub>
@@ -6001,18 +6950,24 @@
                     <m:sSubSup>
                       <m:sSubSupPr>
                         <m:ctrlPr>
-                          <a:rPr lang="ar-AE"/>
+                          <a:rPr lang="ar-AE" i="1">
+                            <a:latin typeface="Cambria Math" panose="02040503050406030204" pitchFamily="18" charset="0"/>
+                          </a:rPr>
                         </m:ctrlPr>
                       </m:sSubSupPr>
                       <m:e>
                         <m:r>
-                          <a:rPr lang="ar-AE" i="1"/>
+                          <a:rPr lang="ar-AE" i="1">
+                            <a:latin typeface="Cambria Math" panose="02040503050406030204" pitchFamily="18" charset="0"/>
+                          </a:rPr>
                           <m:t>𝑆</m:t>
                         </m:r>
                       </m:e>
                       <m:sub>
                         <m:r>
-                          <a:rPr lang="ar-AE" i="1"/>
+                          <a:rPr lang="ar-AE" i="1">
+                            <a:latin typeface="Cambria Math" panose="02040503050406030204" pitchFamily="18" charset="0"/>
+                          </a:rPr>
                           <m:t>𝑗</m:t>
                         </m:r>
                       </m:sub>
@@ -6020,12 +6975,16 @@
                         <m:d>
                           <m:dPr>
                             <m:ctrlPr>
-                              <a:rPr lang="ar-AE" i="1"/>
+                              <a:rPr lang="ar-AE" i="1">
+                                <a:latin typeface="Cambria Math" panose="02040503050406030204" pitchFamily="18" charset="0"/>
+                              </a:rPr>
                             </m:ctrlPr>
                           </m:dPr>
                           <m:e>
                             <m:r>
-                              <a:rPr lang="ar-AE" i="1"/>
+                              <a:rPr lang="ar-AE" i="1">
+                                <a:latin typeface="Cambria Math" panose="02040503050406030204" pitchFamily="18" charset="0"/>
+                              </a:rPr>
                               <m:t>𝑟</m:t>
                             </m:r>
                           </m:e>
@@ -6055,7 +7014,9 @@
                       <m:sSub>
                         <m:sSubPr>
                           <m:ctrlPr>
-                            <a:rPr lang="ar-AE" smtClean="0"/>
+                            <a:rPr lang="ar-AE" i="1" smtClean="0">
+                              <a:latin typeface="Cambria Math" panose="02040503050406030204" pitchFamily="18" charset="0"/>
+                            </a:rPr>
                           </m:ctrlPr>
                         </m:sSubPr>
                         <m:e>
@@ -6069,30 +7030,40 @@
                         </m:e>
                         <m:sub>
                           <m:r>
-                            <a:rPr lang="ar-AE" b="0" i="1"/>
+                            <a:rPr lang="ar-AE" b="0" i="1">
+                              <a:latin typeface="Cambria Math" panose="02040503050406030204" pitchFamily="18" charset="0"/>
+                            </a:rPr>
                             <m:t>𝑗</m:t>
                           </m:r>
                         </m:sub>
                       </m:sSub>
                       <m:r>
-                        <a:rPr lang="ar-AE"/>
+                        <a:rPr lang="ar-AE">
+                          <a:latin typeface="Cambria Math" panose="02040503050406030204" pitchFamily="18" charset="0"/>
+                        </a:rPr>
                         <m:t>=</m:t>
                       </m:r>
                       <m:f>
                         <m:fPr>
                           <m:ctrlPr>
-                            <a:rPr lang="ar-AE" i="1"/>
+                            <a:rPr lang="ar-AE" i="1">
+                              <a:latin typeface="Cambria Math" panose="02040503050406030204" pitchFamily="18" charset="0"/>
+                            </a:rPr>
                           </m:ctrlPr>
                         </m:fPr>
                         <m:num>
                           <m:r>
-                            <a:rPr lang="ar-AE"/>
+                            <a:rPr lang="ar-AE">
+                              <a:latin typeface="Cambria Math" panose="02040503050406030204" pitchFamily="18" charset="0"/>
+                            </a:rPr>
                             <m:t>1</m:t>
                           </m:r>
                         </m:num>
                         <m:den>
                           <m:r>
-                            <a:rPr lang="ar-AE" i="1"/>
+                            <a:rPr lang="ar-AE" i="1">
+                              <a:latin typeface="Cambria Math" panose="02040503050406030204" pitchFamily="18" charset="0"/>
+                            </a:rPr>
                             <m:t>𝑅</m:t>
                           </m:r>
                         </m:den>
@@ -6102,26 +7073,36 @@
                           <m:chr m:val="∑"/>
                           <m:grow m:val="on"/>
                           <m:ctrlPr>
-                            <a:rPr lang="ar-AE" i="1"/>
+                            <a:rPr lang="ar-AE" i="1">
+                              <a:latin typeface="Cambria Math" panose="02040503050406030204" pitchFamily="18" charset="0"/>
+                            </a:rPr>
                           </m:ctrlPr>
                         </m:naryPr>
                         <m:sub>
                           <m:r>
-                            <a:rPr lang="ar-AE" i="1"/>
+                            <a:rPr lang="ar-AE" i="1">
+                              <a:latin typeface="Cambria Math" panose="02040503050406030204" pitchFamily="18" charset="0"/>
+                            </a:rPr>
                             <m:t>𝑟</m:t>
                           </m:r>
                           <m:r>
-                            <a:rPr lang="ar-AE"/>
+                            <a:rPr lang="ar-AE">
+                              <a:latin typeface="Cambria Math" panose="02040503050406030204" pitchFamily="18" charset="0"/>
+                            </a:rPr>
                             <m:t>=</m:t>
                           </m:r>
                           <m:r>
-                            <a:rPr lang="ar-AE"/>
+                            <a:rPr lang="ar-AE">
+                              <a:latin typeface="Cambria Math" panose="02040503050406030204" pitchFamily="18" charset="0"/>
+                            </a:rPr>
                             <m:t>1</m:t>
                           </m:r>
                         </m:sub>
                         <m:sup>
                           <m:r>
-                            <a:rPr lang="ar-AE" i="1"/>
+                            <a:rPr lang="ar-AE" i="1">
+                              <a:latin typeface="Cambria Math" panose="02040503050406030204" pitchFamily="18" charset="0"/>
+                            </a:rPr>
                             <m:t>𝑅</m:t>
                           </m:r>
                         </m:sup>
@@ -6129,19 +7110,25 @@
                           <m:d>
                             <m:dPr>
                               <m:ctrlPr>
-                                <a:rPr lang="ar-AE" i="1"/>
+                                <a:rPr lang="ar-AE" i="1">
+                                  <a:latin typeface="Cambria Math" panose="02040503050406030204" pitchFamily="18" charset="0"/>
+                                </a:rPr>
                               </m:ctrlPr>
                             </m:dPr>
                             <m:e>
                               <m:sSub>
                                 <m:sSubPr>
                                   <m:ctrlPr>
-                                    <a:rPr lang="ar-AE" i="1"/>
+                                    <a:rPr lang="ar-AE" i="1">
+                                      <a:latin typeface="Cambria Math" panose="02040503050406030204" pitchFamily="18" charset="0"/>
+                                    </a:rPr>
                                   </m:ctrlPr>
                                 </m:sSubPr>
                                 <m:e>
                                   <m:r>
-                                    <a:rPr lang="ar-AE" i="1"/>
+                                    <a:rPr lang="ar-AE" i="1">
+                                      <a:latin typeface="Cambria Math" panose="02040503050406030204" pitchFamily="18" charset="0"/>
+                                    </a:rPr>
                                     <m:t>𝑆</m:t>
                                   </m:r>
                                 </m:e>
@@ -6156,24 +7143,32 @@
                                 </m:sub>
                               </m:sSub>
                               <m:r>
-                                <a:rPr lang="ar-AE"/>
+                                <a:rPr lang="ar-AE">
+                                  <a:latin typeface="Cambria Math" panose="02040503050406030204" pitchFamily="18" charset="0"/>
+                                </a:rPr>
                                 <m:t>−</m:t>
                               </m:r>
                               <m:sSubSup>
                                 <m:sSubSupPr>
                                   <m:ctrlPr>
-                                    <a:rPr lang="ar-AE" i="1"/>
+                                    <a:rPr lang="ar-AE" i="1">
+                                      <a:latin typeface="Cambria Math" panose="02040503050406030204" pitchFamily="18" charset="0"/>
+                                    </a:rPr>
                                   </m:ctrlPr>
                                 </m:sSubSupPr>
                                 <m:e>
                                   <m:r>
-                                    <a:rPr lang="ar-AE" i="1"/>
+                                    <a:rPr lang="ar-AE" i="1">
+                                      <a:latin typeface="Cambria Math" panose="02040503050406030204" pitchFamily="18" charset="0"/>
+                                    </a:rPr>
                                     <m:t>𝑆</m:t>
                                   </m:r>
                                 </m:e>
                                 <m:sub>
                                   <m:r>
-                                    <a:rPr lang="ar-AE" i="1"/>
+                                    <a:rPr lang="ar-AE" i="1">
+                                      <a:latin typeface="Cambria Math" panose="02040503050406030204" pitchFamily="18" charset="0"/>
+                                    </a:rPr>
                                     <m:t>𝑗</m:t>
                                   </m:r>
                                 </m:sub>
@@ -6181,12 +7176,16 @@
                                   <m:d>
                                     <m:dPr>
                                       <m:ctrlPr>
-                                        <a:rPr lang="ar-AE" i="1"/>
+                                        <a:rPr lang="ar-AE" i="1">
+                                          <a:latin typeface="Cambria Math" panose="02040503050406030204" pitchFamily="18" charset="0"/>
+                                        </a:rPr>
                                       </m:ctrlPr>
                                     </m:dPr>
                                     <m:e>
                                       <m:r>
-                                        <a:rPr lang="ar-AE" i="1"/>
+                                        <a:rPr lang="ar-AE" i="1">
+                                          <a:latin typeface="Cambria Math" panose="02040503050406030204" pitchFamily="18" charset="0"/>
+                                        </a:rPr>
                                         <m:t>𝑟</m:t>
                                       </m:r>
                                     </m:e>
@@ -6208,7 +7207,7 @@
             </p:txBody>
           </p:sp>
         </mc:Choice>
-        <mc:Fallback>
+        <mc:Fallback xmlns="">
           <p:sp>
             <p:nvSpPr>
               <p:cNvPr id="3" name="Content Placeholder 2">
@@ -6708,8 +7707,8 @@
           </a:p>
         </p:txBody>
       </p:sp>
-      <mc:AlternateContent xmlns:mc="http://schemas.openxmlformats.org/markup-compatibility/2006">
-        <mc:Choice xmlns:a14="http://schemas.microsoft.com/office/drawing/2010/main" Requires="a14">
+      <mc:AlternateContent xmlns:mc="http://schemas.openxmlformats.org/markup-compatibility/2006" xmlns:a14="http://schemas.microsoft.com/office/drawing/2010/main">
+        <mc:Choice Requires="a14">
           <p:sp>
             <p:nvSpPr>
               <p:cNvPr id="3" name="Content Placeholder 2">
@@ -6780,11 +7779,15 @@
                 <a14:m>
                   <m:oMath xmlns:m="http://schemas.openxmlformats.org/officeDocument/2006/math">
                     <m:r>
-                      <a:rPr lang="en-US" sz="2000"/>
+                      <a:rPr lang="en-US" sz="2000">
+                        <a:latin typeface="Cambria Math" panose="02040503050406030204" pitchFamily="18" charset="0"/>
+                      </a:rPr>
                       <m:t>𝒟</m:t>
                     </m:r>
                     <m:r>
-                      <a:rPr lang="en-US" sz="2000"/>
+                      <a:rPr lang="en-US" sz="2000">
+                        <a:latin typeface="Cambria Math" panose="02040503050406030204" pitchFamily="18" charset="0"/>
+                      </a:rPr>
                       <m:t>=</m:t>
                     </m:r>
                     <m:d>
@@ -6792,7 +7795,9 @@
                         <m:begChr m:val="{"/>
                         <m:endChr m:val="}"/>
                         <m:ctrlPr>
-                          <a:rPr lang="ar-AE" sz="2000" i="1"/>
+                          <a:rPr lang="ar-AE" sz="2000" i="1">
+                            <a:latin typeface="Cambria Math" panose="02040503050406030204" pitchFamily="18" charset="0"/>
+                          </a:rPr>
                         </m:ctrlPr>
                       </m:dPr>
                       <m:e>
@@ -6800,25 +7805,33 @@
                           <m:dPr>
                             <m:sepChr m:val=","/>
                             <m:ctrlPr>
-                              <a:rPr lang="ar-AE" sz="2000" i="1"/>
+                              <a:rPr lang="ar-AE" sz="2000" i="1">
+                                <a:latin typeface="Cambria Math" panose="02040503050406030204" pitchFamily="18" charset="0"/>
+                              </a:rPr>
                             </m:ctrlPr>
                           </m:dPr>
                           <m:e>
                             <m:sSub>
                               <m:sSubPr>
                                 <m:ctrlPr>
-                                  <a:rPr lang="ar-AE" sz="2000" i="1"/>
+                                  <a:rPr lang="ar-AE" sz="2000" i="1">
+                                    <a:latin typeface="Cambria Math" panose="02040503050406030204" pitchFamily="18" charset="0"/>
+                                  </a:rPr>
                                 </m:ctrlPr>
                               </m:sSubPr>
                               <m:e>
                                 <m:r>
-                                  <a:rPr lang="ar-AE" sz="2000" i="1"/>
+                                  <a:rPr lang="ar-AE" sz="2000" i="1">
+                                    <a:latin typeface="Cambria Math" panose="02040503050406030204" pitchFamily="18" charset="0"/>
+                                  </a:rPr>
                                   <m:t>𝑥</m:t>
                                 </m:r>
                               </m:e>
                               <m:sub>
                                 <m:r>
-                                  <a:rPr lang="ar-AE" sz="2000" i="1"/>
+                                  <a:rPr lang="ar-AE" sz="2000" i="1">
+                                    <a:latin typeface="Cambria Math" panose="02040503050406030204" pitchFamily="18" charset="0"/>
+                                  </a:rPr>
                                   <m:t>𝑖</m:t>
                                 </m:r>
                               </m:sub>
@@ -6828,18 +7841,24 @@
                             <m:sSub>
                               <m:sSubPr>
                                 <m:ctrlPr>
-                                  <a:rPr lang="ar-AE" sz="2000" i="1"/>
+                                  <a:rPr lang="ar-AE" sz="2000" i="1">
+                                    <a:latin typeface="Cambria Math" panose="02040503050406030204" pitchFamily="18" charset="0"/>
+                                  </a:rPr>
                                 </m:ctrlPr>
                               </m:sSubPr>
                               <m:e>
                                 <m:r>
-                                  <a:rPr lang="ar-AE" sz="2000" i="1"/>
+                                  <a:rPr lang="ar-AE" sz="2000" i="1">
+                                    <a:latin typeface="Cambria Math" panose="02040503050406030204" pitchFamily="18" charset="0"/>
+                                  </a:rPr>
                                   <m:t>𝑦</m:t>
                                 </m:r>
                               </m:e>
                               <m:sub>
                                 <m:r>
-                                  <a:rPr lang="ar-AE" sz="2000" i="1"/>
+                                  <a:rPr lang="ar-AE" sz="2000" i="1">
+                                    <a:latin typeface="Cambria Math" panose="02040503050406030204" pitchFamily="18" charset="0"/>
+                                  </a:rPr>
                                   <m:t>𝑖</m:t>
                                 </m:r>
                               </m:sub>
@@ -6861,36 +7880,48 @@
                 <a14:m>
                   <m:oMath xmlns:m="http://schemas.openxmlformats.org/officeDocument/2006/math">
                     <m:r>
-                      <a:rPr lang="en-US" sz="2000" i="1"/>
+                      <a:rPr lang="en-US" sz="2000" i="1">
+                        <a:latin typeface="Cambria Math" panose="02040503050406030204" pitchFamily="18" charset="0"/>
+                      </a:rPr>
                       <m:t>𝑥</m:t>
                     </m:r>
                     <m:r>
-                      <a:rPr lang="en-US" sz="2000"/>
+                      <a:rPr lang="en-US" sz="2000">
+                        <a:latin typeface="Cambria Math" panose="02040503050406030204" pitchFamily="18" charset="0"/>
+                      </a:rPr>
                       <m:t>=</m:t>
                     </m:r>
                     <m:d>
                       <m:dPr>
                         <m:sepChr m:val=","/>
                         <m:ctrlPr>
-                          <a:rPr lang="ar-AE" sz="2000" i="1"/>
+                          <a:rPr lang="ar-AE" sz="2000" i="1">
+                            <a:latin typeface="Cambria Math" panose="02040503050406030204" pitchFamily="18" charset="0"/>
+                          </a:rPr>
                         </m:ctrlPr>
                       </m:dPr>
                       <m:e>
                         <m:sSub>
                           <m:sSubPr>
                             <m:ctrlPr>
-                              <a:rPr lang="ar-AE" sz="2000" i="1"/>
+                              <a:rPr lang="ar-AE" sz="2000" i="1">
+                                <a:latin typeface="Cambria Math" panose="02040503050406030204" pitchFamily="18" charset="0"/>
+                              </a:rPr>
                             </m:ctrlPr>
                           </m:sSubPr>
                           <m:e>
                             <m:r>
-                              <a:rPr lang="ar-AE" sz="2000" i="1"/>
+                              <a:rPr lang="ar-AE" sz="2000" i="1">
+                                <a:latin typeface="Cambria Math" panose="02040503050406030204" pitchFamily="18" charset="0"/>
+                              </a:rPr>
                               <m:t>𝑥</m:t>
                             </m:r>
                           </m:e>
                           <m:sub>
                             <m:r>
-                              <a:rPr lang="ar-AE" sz="2000"/>
+                              <a:rPr lang="ar-AE" sz="2000">
+                                <a:latin typeface="Cambria Math" panose="02040503050406030204" pitchFamily="18" charset="0"/>
+                              </a:rPr>
                               <m:t>1</m:t>
                             </m:r>
                           </m:sub>
@@ -6898,7 +7929,9 @@
                       </m:e>
                       <m:e>
                         <m:r>
-                          <a:rPr lang="ar-AE" sz="2000"/>
+                          <a:rPr lang="ar-AE" sz="2000">
+                            <a:latin typeface="Cambria Math" panose="02040503050406030204" pitchFamily="18" charset="0"/>
+                          </a:rPr>
                           <m:t>…</m:t>
                         </m:r>
                       </m:e>
@@ -6906,18 +7939,24 @@
                         <m:sSub>
                           <m:sSubPr>
                             <m:ctrlPr>
-                              <a:rPr lang="ar-AE" sz="2000" i="1"/>
+                              <a:rPr lang="ar-AE" sz="2000" i="1">
+                                <a:latin typeface="Cambria Math" panose="02040503050406030204" pitchFamily="18" charset="0"/>
+                              </a:rPr>
                             </m:ctrlPr>
                           </m:sSubPr>
                           <m:e>
                             <m:r>
-                              <a:rPr lang="ar-AE" sz="2000" i="1"/>
+                              <a:rPr lang="ar-AE" sz="2000" i="1">
+                                <a:latin typeface="Cambria Math" panose="02040503050406030204" pitchFamily="18" charset="0"/>
+                              </a:rPr>
                               <m:t>𝑥</m:t>
                             </m:r>
                           </m:e>
                           <m:sub>
                             <m:r>
-                              <a:rPr lang="ar-AE" sz="2000" i="1"/>
+                              <a:rPr lang="ar-AE" sz="2000" i="1">
+                                <a:latin typeface="Cambria Math" panose="02040503050406030204" pitchFamily="18" charset="0"/>
+                              </a:rPr>
                               <m:t>𝑝</m:t>
                             </m:r>
                           </m:sub>
@@ -6940,12 +7979,16 @@
                       <m:accPr>
                         <m:chr m:val="̂"/>
                         <m:ctrlPr>
-                          <a:rPr lang="ar-AE" sz="2000"/>
+                          <a:rPr lang="ar-AE" sz="2000" i="1">
+                            <a:latin typeface="Cambria Math" panose="02040503050406030204" pitchFamily="18" charset="0"/>
+                          </a:rPr>
                         </m:ctrlPr>
                       </m:accPr>
                       <m:e>
                         <m:r>
-                          <a:rPr lang="ar-AE" sz="2000" i="1"/>
+                          <a:rPr lang="ar-AE" sz="2000" i="1">
+                            <a:latin typeface="Cambria Math" panose="02040503050406030204" pitchFamily="18" charset="0"/>
+                          </a:rPr>
                           <m:t>𝑓</m:t>
                         </m:r>
                       </m:e>
@@ -6953,12 +7996,16 @@
                     <m:d>
                       <m:dPr>
                         <m:ctrlPr>
-                          <a:rPr lang="ar-AE" sz="2000" i="1"/>
+                          <a:rPr lang="ar-AE" sz="2000" i="1">
+                            <a:latin typeface="Cambria Math" panose="02040503050406030204" pitchFamily="18" charset="0"/>
+                          </a:rPr>
                         </m:ctrlPr>
                       </m:dPr>
                       <m:e>
                         <m:r>
-                          <a:rPr lang="ar-AE" sz="2000" i="1"/>
+                          <a:rPr lang="ar-AE" sz="2000" i="1">
+                            <a:latin typeface="Cambria Math" panose="02040503050406030204" pitchFamily="18" charset="0"/>
+                          </a:rPr>
                           <m:t>𝑥</m:t>
                         </m:r>
                       </m:e>
@@ -6980,7 +8027,7 @@
             </p:txBody>
           </p:sp>
         </mc:Choice>
-        <mc:Fallback>
+        <mc:Fallback xmlns="">
           <p:sp>
             <p:nvSpPr>
               <p:cNvPr id="3" name="Content Placeholder 2">
@@ -7078,8 +8125,8 @@
           </a:p>
         </p:txBody>
       </p:sp>
-      <mc:AlternateContent xmlns:mc="http://schemas.openxmlformats.org/markup-compatibility/2006">
-        <mc:Choice xmlns:a14="http://schemas.microsoft.com/office/drawing/2010/main" Requires="a14">
+      <mc:AlternateContent xmlns:mc="http://schemas.openxmlformats.org/markup-compatibility/2006" xmlns:a14="http://schemas.microsoft.com/office/drawing/2010/main">
+        <mc:Choice Requires="a14">
           <p:sp>
             <p:nvSpPr>
               <p:cNvPr id="3" name="Content Placeholder 2">
@@ -7119,41 +8166,55 @@
                       <m:accPr>
                         <m:chr m:val="̂"/>
                         <m:ctrlPr>
-                          <a:rPr lang="ar-AE"/>
+                          <a:rPr lang="ar-AE" i="1">
+                            <a:latin typeface="Cambria Math" panose="02040503050406030204" pitchFamily="18" charset="0"/>
+                          </a:rPr>
                         </m:ctrlPr>
                       </m:accPr>
                       <m:e>
                         <m:r>
-                          <a:rPr lang="ar-AE" i="1"/>
+                          <a:rPr lang="ar-AE" i="1">
+                            <a:latin typeface="Cambria Math" panose="02040503050406030204" pitchFamily="18" charset="0"/>
+                          </a:rPr>
                           <m:t>𝑦</m:t>
                         </m:r>
                       </m:e>
                     </m:acc>
                     <m:r>
-                      <a:rPr lang="ar-AE"/>
+                      <a:rPr lang="ar-AE">
+                        <a:latin typeface="Cambria Math" panose="02040503050406030204" pitchFamily="18" charset="0"/>
+                      </a:rPr>
                       <m:t>=</m:t>
                     </m:r>
                     <m:sSub>
                       <m:sSubPr>
                         <m:ctrlPr>
-                          <a:rPr lang="ar-AE" i="1"/>
+                          <a:rPr lang="ar-AE" i="1">
+                            <a:latin typeface="Cambria Math" panose="02040503050406030204" pitchFamily="18" charset="0"/>
+                          </a:rPr>
                         </m:ctrlPr>
                       </m:sSubPr>
                       <m:e>
                         <m:r>
-                          <a:rPr lang="ar-AE" i="1"/>
+                          <a:rPr lang="ar-AE" i="1">
+                            <a:latin typeface="Cambria Math" panose="02040503050406030204" pitchFamily="18" charset="0"/>
+                          </a:rPr>
                           <m:t>𝛽</m:t>
                         </m:r>
                       </m:e>
                       <m:sub>
                         <m:r>
-                          <a:rPr lang="ar-AE"/>
+                          <a:rPr lang="ar-AE">
+                            <a:latin typeface="Cambria Math" panose="02040503050406030204" pitchFamily="18" charset="0"/>
+                          </a:rPr>
                           <m:t>0</m:t>
                         </m:r>
                       </m:sub>
                     </m:sSub>
                     <m:r>
-                      <a:rPr lang="ar-AE"/>
+                      <a:rPr lang="ar-AE">
+                        <a:latin typeface="Cambria Math" panose="02040503050406030204" pitchFamily="18" charset="0"/>
+                      </a:rPr>
                       <m:t>+</m:t>
                     </m:r>
                     <m:nary>
@@ -7161,26 +8222,36 @@
                         <m:chr m:val="∑"/>
                         <m:grow m:val="on"/>
                         <m:ctrlPr>
-                          <a:rPr lang="ar-AE" i="1"/>
+                          <a:rPr lang="ar-AE" i="1">
+                            <a:latin typeface="Cambria Math" panose="02040503050406030204" pitchFamily="18" charset="0"/>
+                          </a:rPr>
                         </m:ctrlPr>
                       </m:naryPr>
                       <m:sub>
                         <m:r>
-                          <a:rPr lang="ar-AE" i="1"/>
+                          <a:rPr lang="ar-AE" i="1">
+                            <a:latin typeface="Cambria Math" panose="02040503050406030204" pitchFamily="18" charset="0"/>
+                          </a:rPr>
                           <m:t>𝑗</m:t>
                         </m:r>
                         <m:r>
-                          <a:rPr lang="ar-AE"/>
+                          <a:rPr lang="ar-AE">
+                            <a:latin typeface="Cambria Math" panose="02040503050406030204" pitchFamily="18" charset="0"/>
+                          </a:rPr>
                           <m:t>=</m:t>
                         </m:r>
                         <m:r>
-                          <a:rPr lang="ar-AE"/>
+                          <a:rPr lang="ar-AE">
+                            <a:latin typeface="Cambria Math" panose="02040503050406030204" pitchFamily="18" charset="0"/>
+                          </a:rPr>
                           <m:t>1</m:t>
                         </m:r>
                       </m:sub>
                       <m:sup>
                         <m:r>
-                          <a:rPr lang="ar-AE" i="1"/>
+                          <a:rPr lang="ar-AE" i="1">
+                            <a:latin typeface="Cambria Math" panose="02040503050406030204" pitchFamily="18" charset="0"/>
+                          </a:rPr>
                           <m:t>𝑝</m:t>
                         </m:r>
                       </m:sup>
@@ -7188,18 +8259,24 @@
                         <m:sSub>
                           <m:sSubPr>
                             <m:ctrlPr>
-                              <a:rPr lang="ar-AE" i="1"/>
+                              <a:rPr lang="ar-AE" i="1">
+                                <a:latin typeface="Cambria Math" panose="02040503050406030204" pitchFamily="18" charset="0"/>
+                              </a:rPr>
                             </m:ctrlPr>
                           </m:sSubPr>
                           <m:e>
                             <m:r>
-                              <a:rPr lang="ar-AE" i="1"/>
+                              <a:rPr lang="ar-AE" i="1">
+                                <a:latin typeface="Cambria Math" panose="02040503050406030204" pitchFamily="18" charset="0"/>
+                              </a:rPr>
                               <m:t>𝛽</m:t>
                             </m:r>
                           </m:e>
                           <m:sub>
                             <m:r>
-                              <a:rPr lang="ar-AE" i="1"/>
+                              <a:rPr lang="ar-AE" i="1">
+                                <a:latin typeface="Cambria Math" panose="02040503050406030204" pitchFamily="18" charset="0"/>
+                              </a:rPr>
                               <m:t>𝑗</m:t>
                             </m:r>
                           </m:sub>
@@ -7209,18 +8286,24 @@
                     <m:sSub>
                       <m:sSubPr>
                         <m:ctrlPr>
-                          <a:rPr lang="ar-AE" i="1"/>
+                          <a:rPr lang="ar-AE" i="1">
+                            <a:latin typeface="Cambria Math" panose="02040503050406030204" pitchFamily="18" charset="0"/>
+                          </a:rPr>
                         </m:ctrlPr>
                       </m:sSubPr>
                       <m:e>
                         <m:r>
-                          <a:rPr lang="ar-AE" i="1"/>
+                          <a:rPr lang="ar-AE" i="1">
+                            <a:latin typeface="Cambria Math" panose="02040503050406030204" pitchFamily="18" charset="0"/>
+                          </a:rPr>
                           <m:t>𝑥</m:t>
                         </m:r>
                       </m:e>
                       <m:sub>
                         <m:r>
-                          <a:rPr lang="ar-AE" i="1"/>
+                          <a:rPr lang="ar-AE" i="1">
+                            <a:latin typeface="Cambria Math" panose="02040503050406030204" pitchFamily="18" charset="0"/>
+                          </a:rPr>
                           <m:t>𝑗</m:t>
                         </m:r>
                       </m:sub>
@@ -7260,125 +8343,175 @@
                       <m:accPr>
                         <m:chr m:val="̂"/>
                         <m:ctrlPr>
-                          <a:rPr lang="ar-AE"/>
+                          <a:rPr lang="ar-AE" i="1">
+                            <a:latin typeface="Cambria Math" panose="02040503050406030204" pitchFamily="18" charset="0"/>
+                          </a:rPr>
                         </m:ctrlPr>
                       </m:accPr>
                       <m:e>
                         <m:r>
-                          <a:rPr lang="ar-AE" i="1"/>
+                          <a:rPr lang="ar-AE" i="1">
+                            <a:latin typeface="Cambria Math" panose="02040503050406030204" pitchFamily="18" charset="0"/>
+                          </a:rPr>
                           <m:t>𝑦</m:t>
                         </m:r>
                       </m:e>
                     </m:acc>
                     <m:r>
-                      <a:rPr lang="ar-AE"/>
+                      <a:rPr lang="ar-AE">
+                        <a:latin typeface="Cambria Math" panose="02040503050406030204" pitchFamily="18" charset="0"/>
+                      </a:rPr>
                       <m:t>=</m:t>
                     </m:r>
                     <m:r>
-                      <a:rPr lang="ar-AE"/>
+                      <a:rPr lang="ar-AE">
+                        <a:latin typeface="Cambria Math" panose="02040503050406030204" pitchFamily="18" charset="0"/>
+                      </a:rPr>
                       <m:t>50</m:t>
                     </m:r>
                     <m:r>
-                      <a:rPr lang="ar-AE"/>
+                      <a:rPr lang="ar-AE">
+                        <a:latin typeface="Cambria Math" panose="02040503050406030204" pitchFamily="18" charset="0"/>
+                      </a:rPr>
                       <m:t>,</m:t>
                     </m:r>
                     <m:r>
-                      <a:rPr lang="ar-AE"/>
+                      <a:rPr lang="ar-AE">
+                        <a:latin typeface="Cambria Math" panose="02040503050406030204" pitchFamily="18" charset="0"/>
+                      </a:rPr>
                       <m:t>000</m:t>
                     </m:r>
                     <m:r>
-                      <a:rPr lang="ar-AE"/>
+                      <a:rPr lang="ar-AE">
+                        <a:latin typeface="Cambria Math" panose="02040503050406030204" pitchFamily="18" charset="0"/>
+                      </a:rPr>
                       <m:t>+</m:t>
                     </m:r>
                     <m:r>
-                      <a:rPr lang="ar-AE"/>
+                      <a:rPr lang="ar-AE">
+                        <a:latin typeface="Cambria Math" panose="02040503050406030204" pitchFamily="18" charset="0"/>
+                      </a:rPr>
                       <m:t>150</m:t>
                     </m:r>
                     <m:sSub>
                       <m:sSubPr>
                         <m:ctrlPr>
-                          <a:rPr lang="ar-AE" i="1"/>
+                          <a:rPr lang="ar-AE" i="1">
+                            <a:latin typeface="Cambria Math" panose="02040503050406030204" pitchFamily="18" charset="0"/>
+                          </a:rPr>
                         </m:ctrlPr>
                       </m:sSubPr>
                       <m:e>
                         <m:r>
-                          <a:rPr lang="ar-AE" i="1"/>
+                          <a:rPr lang="ar-AE" i="1">
+                            <a:latin typeface="Cambria Math" panose="02040503050406030204" pitchFamily="18" charset="0"/>
+                          </a:rPr>
                           <m:t>𝑥</m:t>
                         </m:r>
                       </m:e>
                       <m:sub>
                         <m:r>
-                          <a:rPr lang="ar-AE"/>
+                          <a:rPr lang="ar-AE">
+                            <a:latin typeface="Cambria Math" panose="02040503050406030204" pitchFamily="18" charset="0"/>
+                          </a:rPr>
                           <m:t>1</m:t>
                         </m:r>
                       </m:sub>
                     </m:sSub>
                     <m:r>
-                      <a:rPr lang="ar-AE"/>
+                      <a:rPr lang="ar-AE">
+                        <a:latin typeface="Cambria Math" panose="02040503050406030204" pitchFamily="18" charset="0"/>
+                      </a:rPr>
                       <m:t>+</m:t>
                     </m:r>
                     <m:r>
-                      <a:rPr lang="ar-AE"/>
+                      <a:rPr lang="ar-AE">
+                        <a:latin typeface="Cambria Math" panose="02040503050406030204" pitchFamily="18" charset="0"/>
+                      </a:rPr>
                       <m:t>20</m:t>
                     </m:r>
                     <m:r>
-                      <a:rPr lang="ar-AE"/>
+                      <a:rPr lang="ar-AE">
+                        <a:latin typeface="Cambria Math" panose="02040503050406030204" pitchFamily="18" charset="0"/>
+                      </a:rPr>
                       <m:t>,</m:t>
                     </m:r>
                     <m:r>
-                      <a:rPr lang="ar-AE"/>
+                      <a:rPr lang="ar-AE">
+                        <a:latin typeface="Cambria Math" panose="02040503050406030204" pitchFamily="18" charset="0"/>
+                      </a:rPr>
                       <m:t>000</m:t>
                     </m:r>
                     <m:sSub>
                       <m:sSubPr>
                         <m:ctrlPr>
-                          <a:rPr lang="ar-AE" i="1"/>
+                          <a:rPr lang="ar-AE" i="1">
+                            <a:latin typeface="Cambria Math" panose="02040503050406030204" pitchFamily="18" charset="0"/>
+                          </a:rPr>
                         </m:ctrlPr>
                       </m:sSubPr>
                       <m:e>
                         <m:r>
-                          <a:rPr lang="ar-AE" i="1"/>
+                          <a:rPr lang="ar-AE" i="1">
+                            <a:latin typeface="Cambria Math" panose="02040503050406030204" pitchFamily="18" charset="0"/>
+                          </a:rPr>
                           <m:t>𝑥</m:t>
                         </m:r>
                       </m:e>
                       <m:sub>
                         <m:r>
-                          <a:rPr lang="ar-AE"/>
+                          <a:rPr lang="ar-AE">
+                            <a:latin typeface="Cambria Math" panose="02040503050406030204" pitchFamily="18" charset="0"/>
+                          </a:rPr>
                           <m:t>2</m:t>
                         </m:r>
                       </m:sub>
                     </m:sSub>
                     <m:r>
-                      <a:rPr lang="ar-AE"/>
+                      <a:rPr lang="ar-AE">
+                        <a:latin typeface="Cambria Math" panose="02040503050406030204" pitchFamily="18" charset="0"/>
+                      </a:rPr>
                       <m:t>−</m:t>
                     </m:r>
                     <m:r>
-                      <a:rPr lang="ar-AE"/>
+                      <a:rPr lang="ar-AE">
+                        <a:latin typeface="Cambria Math" panose="02040503050406030204" pitchFamily="18" charset="0"/>
+                      </a:rPr>
                       <m:t>5</m:t>
                     </m:r>
                     <m:r>
-                      <a:rPr lang="ar-AE"/>
+                      <a:rPr lang="ar-AE">
+                        <a:latin typeface="Cambria Math" panose="02040503050406030204" pitchFamily="18" charset="0"/>
+                      </a:rPr>
                       <m:t>,</m:t>
                     </m:r>
                     <m:r>
-                      <a:rPr lang="ar-AE"/>
+                      <a:rPr lang="ar-AE">
+                        <a:latin typeface="Cambria Math" panose="02040503050406030204" pitchFamily="18" charset="0"/>
+                      </a:rPr>
                       <m:t>000</m:t>
                     </m:r>
                     <m:sSub>
                       <m:sSubPr>
                         <m:ctrlPr>
-                          <a:rPr lang="ar-AE" i="1"/>
+                          <a:rPr lang="ar-AE" i="1">
+                            <a:latin typeface="Cambria Math" panose="02040503050406030204" pitchFamily="18" charset="0"/>
+                          </a:rPr>
                         </m:ctrlPr>
                       </m:sSubPr>
                       <m:e>
                         <m:r>
-                          <a:rPr lang="ar-AE" i="1"/>
+                          <a:rPr lang="ar-AE" i="1">
+                            <a:latin typeface="Cambria Math" panose="02040503050406030204" pitchFamily="18" charset="0"/>
+                          </a:rPr>
                           <m:t>𝑥</m:t>
                         </m:r>
                       </m:e>
                       <m:sub>
                         <m:r>
-                          <a:rPr lang="ar-AE"/>
+                          <a:rPr lang="ar-AE">
+                            <a:latin typeface="Cambria Math" panose="02040503050406030204" pitchFamily="18" charset="0"/>
+                          </a:rPr>
                           <m:t>3</m:t>
                         </m:r>
                       </m:sub>
@@ -7427,7 +8560,7 @@
             </p:txBody>
           </p:sp>
         </mc:Choice>
-        <mc:Fallback>
+        <mc:Fallback xmlns="">
           <p:sp>
             <p:nvSpPr>
               <p:cNvPr id="3" name="Content Placeholder 2">
@@ -7604,8 +8737,8 @@
           </a:p>
         </p:txBody>
       </p:sp>
-      <mc:AlternateContent xmlns:mc="http://schemas.openxmlformats.org/markup-compatibility/2006">
-        <mc:Choice xmlns:a14="http://schemas.microsoft.com/office/drawing/2010/main" Requires="a14">
+      <mc:AlternateContent xmlns:mc="http://schemas.openxmlformats.org/markup-compatibility/2006" xmlns:a14="http://schemas.microsoft.com/office/drawing/2010/main">
+        <mc:Choice Requires="a14">
           <p:sp>
             <p:nvSpPr>
               <p:cNvPr id="3" name="Content Placeholder 2">
@@ -7654,18 +8787,24 @@
                     <m:sSubSup>
                       <m:sSubSupPr>
                         <m:ctrlPr>
-                          <a:rPr lang="ar-AE"/>
+                          <a:rPr lang="ar-AE" i="1">
+                            <a:latin typeface="Cambria Math" panose="02040503050406030204" pitchFamily="18" charset="0"/>
+                          </a:rPr>
                         </m:ctrlPr>
                       </m:sSubSupPr>
                       <m:e>
                         <m:r>
-                          <a:rPr lang="ar-AE" i="1"/>
+                          <a:rPr lang="ar-AE" i="1">
+                            <a:latin typeface="Cambria Math" panose="02040503050406030204" pitchFamily="18" charset="0"/>
+                          </a:rPr>
                           <m:t>𝑥</m:t>
                         </m:r>
                       </m:e>
                       <m:sub>
                         <m:r>
-                          <a:rPr lang="ar-AE" i="1"/>
+                          <a:rPr lang="ar-AE" i="1">
+                            <a:latin typeface="Cambria Math" panose="02040503050406030204" pitchFamily="18" charset="0"/>
+                          </a:rPr>
                           <m:t>𝑗</m:t>
                         </m:r>
                       </m:sub>
@@ -7673,7 +8812,9 @@
                         <m:d>
                           <m:dPr>
                             <m:ctrlPr>
-                              <a:rPr lang="ar-AE" i="1"/>
+                              <a:rPr lang="ar-AE" i="1">
+                                <a:latin typeface="Cambria Math" panose="02040503050406030204" pitchFamily="18" charset="0"/>
+                              </a:rPr>
                             </m:ctrlPr>
                           </m:dPr>
                           <m:e>
@@ -7681,7 +8822,9 @@
                               <m:rPr>
                                 <m:sty m:val="p"/>
                               </m:rPr>
-                              <a:rPr lang="en-US"/>
+                              <a:rPr lang="en-US">
+                                <a:latin typeface="Cambria Math" panose="02040503050406030204" pitchFamily="18" charset="0"/>
+                              </a:rPr>
                               <m:t>std</m:t>
                             </m:r>
                           </m:e>
@@ -7689,54 +8832,72 @@
                       </m:sup>
                     </m:sSubSup>
                     <m:r>
-                      <a:rPr lang="ar-AE"/>
+                      <a:rPr lang="ar-AE">
+                        <a:latin typeface="Cambria Math" panose="02040503050406030204" pitchFamily="18" charset="0"/>
+                      </a:rPr>
                       <m:t>=</m:t>
                     </m:r>
                     <m:f>
                       <m:fPr>
                         <m:ctrlPr>
-                          <a:rPr lang="ar-AE" i="1"/>
+                          <a:rPr lang="ar-AE" i="1">
+                            <a:latin typeface="Cambria Math" panose="02040503050406030204" pitchFamily="18" charset="0"/>
+                          </a:rPr>
                         </m:ctrlPr>
                       </m:fPr>
                       <m:num>
                         <m:sSub>
                           <m:sSubPr>
                             <m:ctrlPr>
-                              <a:rPr lang="ar-AE" i="1"/>
+                              <a:rPr lang="ar-AE" i="1">
+                                <a:latin typeface="Cambria Math" panose="02040503050406030204" pitchFamily="18" charset="0"/>
+                              </a:rPr>
                             </m:ctrlPr>
                           </m:sSubPr>
                           <m:e>
                             <m:r>
-                              <a:rPr lang="ar-AE" i="1"/>
+                              <a:rPr lang="ar-AE" i="1">
+                                <a:latin typeface="Cambria Math" panose="02040503050406030204" pitchFamily="18" charset="0"/>
+                              </a:rPr>
                               <m:t>𝑥</m:t>
                             </m:r>
                           </m:e>
                           <m:sub>
                             <m:r>
-                              <a:rPr lang="ar-AE" i="1"/>
+                              <a:rPr lang="ar-AE" i="1">
+                                <a:latin typeface="Cambria Math" panose="02040503050406030204" pitchFamily="18" charset="0"/>
+                              </a:rPr>
                               <m:t>𝑗</m:t>
                             </m:r>
                           </m:sub>
                         </m:sSub>
                         <m:r>
-                          <a:rPr lang="ar-AE"/>
+                          <a:rPr lang="ar-AE">
+                            <a:latin typeface="Cambria Math" panose="02040503050406030204" pitchFamily="18" charset="0"/>
+                          </a:rPr>
                           <m:t>−</m:t>
                         </m:r>
                         <m:sSub>
                           <m:sSubPr>
                             <m:ctrlPr>
-                              <a:rPr lang="ar-AE" i="1"/>
+                              <a:rPr lang="ar-AE" i="1">
+                                <a:latin typeface="Cambria Math" panose="02040503050406030204" pitchFamily="18" charset="0"/>
+                              </a:rPr>
                             </m:ctrlPr>
                           </m:sSubPr>
                           <m:e>
                             <m:r>
-                              <a:rPr lang="ar-AE" i="1"/>
+                              <a:rPr lang="ar-AE" i="1">
+                                <a:latin typeface="Cambria Math" panose="02040503050406030204" pitchFamily="18" charset="0"/>
+                              </a:rPr>
                               <m:t>𝜇</m:t>
                             </m:r>
                           </m:e>
                           <m:sub>
                             <m:r>
-                              <a:rPr lang="ar-AE" i="1"/>
+                              <a:rPr lang="ar-AE" i="1">
+                                <a:latin typeface="Cambria Math" panose="02040503050406030204" pitchFamily="18" charset="0"/>
+                              </a:rPr>
                               <m:t>𝑗</m:t>
                             </m:r>
                           </m:sub>
@@ -7746,18 +8907,24 @@
                         <m:sSub>
                           <m:sSubPr>
                             <m:ctrlPr>
-                              <a:rPr lang="ar-AE" i="1"/>
+                              <a:rPr lang="ar-AE" i="1">
+                                <a:latin typeface="Cambria Math" panose="02040503050406030204" pitchFamily="18" charset="0"/>
+                              </a:rPr>
                             </m:ctrlPr>
                           </m:sSubPr>
                           <m:e>
                             <m:r>
-                              <a:rPr lang="ar-AE" i="1"/>
+                              <a:rPr lang="ar-AE" i="1">
+                                <a:latin typeface="Cambria Math" panose="02040503050406030204" pitchFamily="18" charset="0"/>
+                              </a:rPr>
                               <m:t>𝜎</m:t>
                             </m:r>
                           </m:e>
                           <m:sub>
                             <m:r>
-                              <a:rPr lang="ar-AE" i="1"/>
+                              <a:rPr lang="ar-AE" i="1">
+                                <a:latin typeface="Cambria Math" panose="02040503050406030204" pitchFamily="18" charset="0"/>
+                              </a:rPr>
                               <m:t>𝑗</m:t>
                             </m:r>
                           </m:sub>
@@ -7782,41 +8949,55 @@
                       <m:accPr>
                         <m:chr m:val="̂"/>
                         <m:ctrlPr>
-                          <a:rPr lang="ar-AE"/>
+                          <a:rPr lang="ar-AE" i="1">
+                            <a:latin typeface="Cambria Math" panose="02040503050406030204" pitchFamily="18" charset="0"/>
+                          </a:rPr>
                         </m:ctrlPr>
                       </m:accPr>
                       <m:e>
                         <m:r>
-                          <a:rPr lang="ar-AE" i="1"/>
+                          <a:rPr lang="ar-AE" i="1">
+                            <a:latin typeface="Cambria Math" panose="02040503050406030204" pitchFamily="18" charset="0"/>
+                          </a:rPr>
                           <m:t>𝑦</m:t>
                         </m:r>
                       </m:e>
                     </m:acc>
                     <m:r>
-                      <a:rPr lang="ar-AE"/>
+                      <a:rPr lang="ar-AE">
+                        <a:latin typeface="Cambria Math" panose="02040503050406030204" pitchFamily="18" charset="0"/>
+                      </a:rPr>
                       <m:t>=</m:t>
                     </m:r>
                     <m:sSub>
                       <m:sSubPr>
                         <m:ctrlPr>
-                          <a:rPr lang="ar-AE" i="1"/>
+                          <a:rPr lang="ar-AE" i="1">
+                            <a:latin typeface="Cambria Math" panose="02040503050406030204" pitchFamily="18" charset="0"/>
+                          </a:rPr>
                         </m:ctrlPr>
                       </m:sSubPr>
                       <m:e>
                         <m:r>
-                          <a:rPr lang="ar-AE" i="1"/>
+                          <a:rPr lang="ar-AE" i="1">
+                            <a:latin typeface="Cambria Math" panose="02040503050406030204" pitchFamily="18" charset="0"/>
+                          </a:rPr>
                           <m:t>𝛽</m:t>
                         </m:r>
                       </m:e>
                       <m:sub>
                         <m:r>
-                          <a:rPr lang="ar-AE"/>
+                          <a:rPr lang="ar-AE">
+                            <a:latin typeface="Cambria Math" panose="02040503050406030204" pitchFamily="18" charset="0"/>
+                          </a:rPr>
                           <m:t>0</m:t>
                         </m:r>
                       </m:sub>
                     </m:sSub>
                     <m:r>
-                      <a:rPr lang="ar-AE"/>
+                      <a:rPr lang="ar-AE">
+                        <a:latin typeface="Cambria Math" panose="02040503050406030204" pitchFamily="18" charset="0"/>
+                      </a:rPr>
                       <m:t>+</m:t>
                     </m:r>
                     <m:nary>
@@ -7826,7 +9007,9 @@
                         <m:subHide m:val="on"/>
                         <m:supHide m:val="on"/>
                         <m:ctrlPr>
-                          <a:rPr lang="ar-AE" i="1"/>
+                          <a:rPr lang="ar-AE" i="1">
+                            <a:latin typeface="Cambria Math" panose="02040503050406030204" pitchFamily="18" charset="0"/>
+                          </a:rPr>
                         </m:ctrlPr>
                       </m:naryPr>
                       <m:sub/>
@@ -7835,18 +9018,24 @@
                         <m:sSubSup>
                           <m:sSubSupPr>
                             <m:ctrlPr>
-                              <a:rPr lang="ar-AE" i="1"/>
+                              <a:rPr lang="ar-AE" i="1">
+                                <a:latin typeface="Cambria Math" panose="02040503050406030204" pitchFamily="18" charset="0"/>
+                              </a:rPr>
                             </m:ctrlPr>
                           </m:sSubSupPr>
                           <m:e>
                             <m:r>
-                              <a:rPr lang="ar-AE" i="1"/>
+                              <a:rPr lang="ar-AE" i="1">
+                                <a:latin typeface="Cambria Math" panose="02040503050406030204" pitchFamily="18" charset="0"/>
+                              </a:rPr>
                               <m:t>𝛽</m:t>
                             </m:r>
                           </m:e>
                           <m:sub>
                             <m:r>
-                              <a:rPr lang="ar-AE" i="1"/>
+                              <a:rPr lang="ar-AE" i="1">
+                                <a:latin typeface="Cambria Math" panose="02040503050406030204" pitchFamily="18" charset="0"/>
+                              </a:rPr>
                               <m:t>𝑗</m:t>
                             </m:r>
                           </m:sub>
@@ -7854,7 +9043,9 @@
                             <m:d>
                               <m:dPr>
                                 <m:ctrlPr>
-                                  <a:rPr lang="ar-AE" i="1"/>
+                                  <a:rPr lang="ar-AE" i="1">
+                                    <a:latin typeface="Cambria Math" panose="02040503050406030204" pitchFamily="18" charset="0"/>
+                                  </a:rPr>
                                 </m:ctrlPr>
                               </m:dPr>
                               <m:e>
@@ -7862,7 +9053,9 @@
                                   <m:rPr>
                                     <m:sty m:val="p"/>
                                   </m:rPr>
-                                  <a:rPr lang="en-US"/>
+                                  <a:rPr lang="en-US">
+                                    <a:latin typeface="Cambria Math" panose="02040503050406030204" pitchFamily="18" charset="0"/>
+                                  </a:rPr>
                                   <m:t>std</m:t>
                                 </m:r>
                               </m:e>
@@ -7874,18 +9067,24 @@
                     <m:sSubSup>
                       <m:sSubSupPr>
                         <m:ctrlPr>
-                          <a:rPr lang="ar-AE" i="1"/>
+                          <a:rPr lang="ar-AE" i="1">
+                            <a:latin typeface="Cambria Math" panose="02040503050406030204" pitchFamily="18" charset="0"/>
+                          </a:rPr>
                         </m:ctrlPr>
                       </m:sSubSupPr>
                       <m:e>
                         <m:r>
-                          <a:rPr lang="ar-AE" i="1"/>
+                          <a:rPr lang="ar-AE" i="1">
+                            <a:latin typeface="Cambria Math" panose="02040503050406030204" pitchFamily="18" charset="0"/>
+                          </a:rPr>
                           <m:t>𝑥</m:t>
                         </m:r>
                       </m:e>
                       <m:sub>
                         <m:r>
-                          <a:rPr lang="ar-AE" i="1"/>
+                          <a:rPr lang="ar-AE" i="1">
+                            <a:latin typeface="Cambria Math" panose="02040503050406030204" pitchFamily="18" charset="0"/>
+                          </a:rPr>
                           <m:t>𝑗</m:t>
                         </m:r>
                       </m:sub>
@@ -7893,7 +9092,9 @@
                         <m:d>
                           <m:dPr>
                             <m:ctrlPr>
-                              <a:rPr lang="ar-AE" i="1"/>
+                              <a:rPr lang="ar-AE" i="1">
+                                <a:latin typeface="Cambria Math" panose="02040503050406030204" pitchFamily="18" charset="0"/>
+                              </a:rPr>
                             </m:ctrlPr>
                           </m:dPr>
                           <m:e>
@@ -7901,7 +9102,9 @@
                               <m:rPr>
                                 <m:sty m:val="p"/>
                               </m:rPr>
-                              <a:rPr lang="en-US"/>
+                              <a:rPr lang="en-US">
+                                <a:latin typeface="Cambria Math" panose="02040503050406030204" pitchFamily="18" charset="0"/>
+                              </a:rPr>
                               <m:t>std</m:t>
                             </m:r>
                           </m:e>
@@ -7957,7 +9160,7 @@
             </p:txBody>
           </p:sp>
         </mc:Choice>
-        <mc:Fallback>
+        <mc:Fallback xmlns="">
           <p:sp>
             <p:nvSpPr>
               <p:cNvPr id="3" name="Content Placeholder 2">
@@ -8130,8 +9333,8 @@
           </a:p>
         </p:txBody>
       </p:sp>
-      <mc:AlternateContent xmlns:mc="http://schemas.openxmlformats.org/markup-compatibility/2006">
-        <mc:Choice xmlns:a14="http://schemas.microsoft.com/office/drawing/2010/main" Requires="a14">
+      <mc:AlternateContent xmlns:mc="http://schemas.openxmlformats.org/markup-compatibility/2006" xmlns:a14="http://schemas.microsoft.com/office/drawing/2010/main">
+        <mc:Choice Requires="a14">
           <p:sp>
             <p:nvSpPr>
               <p:cNvPr id="3" name="Content Placeholder 2">
@@ -8172,7 +9375,9 @@
                       <m:func>
                         <m:funcPr>
                           <m:ctrlPr>
-                            <a:rPr lang="ar-AE" smtClean="0"/>
+                            <a:rPr lang="ar-AE" i="1" smtClean="0">
+                              <a:latin typeface="Cambria Math" panose="02040503050406030204" pitchFamily="18" charset="0"/>
+                            </a:rPr>
                           </m:ctrlPr>
                         </m:funcPr>
                         <m:fName>
@@ -8180,7 +9385,9 @@
                             <m:rPr>
                               <m:sty m:val="p"/>
                             </m:rPr>
-                            <a:rPr lang="en-US"/>
+                            <a:rPr lang="en-US">
+                              <a:latin typeface="Cambria Math" panose="02040503050406030204" pitchFamily="18" charset="0"/>
+                            </a:rPr>
                             <m:t>log</m:t>
                           </m:r>
                         </m:fName>
@@ -8188,33 +9395,45 @@
                           <m:d>
                             <m:dPr>
                               <m:ctrlPr>
-                                <a:rPr lang="ar-AE" i="1"/>
+                                <a:rPr lang="ar-AE" i="1">
+                                  <a:latin typeface="Cambria Math" panose="02040503050406030204" pitchFamily="18" charset="0"/>
+                                </a:rPr>
                               </m:ctrlPr>
                             </m:dPr>
                             <m:e>
                               <m:f>
                                 <m:fPr>
                                   <m:ctrlPr>
-                                    <a:rPr lang="ar-AE" i="1"/>
+                                    <a:rPr lang="ar-AE" i="1">
+                                      <a:latin typeface="Cambria Math" panose="02040503050406030204" pitchFamily="18" charset="0"/>
+                                    </a:rPr>
                                   </m:ctrlPr>
                                 </m:fPr>
                                 <m:num>
                                   <m:r>
-                                    <a:rPr lang="ar-AE" i="1"/>
+                                    <a:rPr lang="ar-AE" i="1">
+                                      <a:latin typeface="Cambria Math" panose="02040503050406030204" pitchFamily="18" charset="0"/>
+                                    </a:rPr>
                                     <m:t>𝑝</m:t>
                                   </m:r>
                                 </m:num>
                                 <m:den>
                                   <m:r>
-                                    <a:rPr lang="ar-AE"/>
+                                    <a:rPr lang="ar-AE">
+                                      <a:latin typeface="Cambria Math" panose="02040503050406030204" pitchFamily="18" charset="0"/>
+                                    </a:rPr>
                                     <m:t>1</m:t>
                                   </m:r>
                                   <m:r>
-                                    <a:rPr lang="ar-AE"/>
+                                    <a:rPr lang="ar-AE">
+                                      <a:latin typeface="Cambria Math" panose="02040503050406030204" pitchFamily="18" charset="0"/>
+                                    </a:rPr>
                                     <m:t>−</m:t>
                                   </m:r>
                                   <m:r>
-                                    <a:rPr lang="ar-AE" i="1"/>
+                                    <a:rPr lang="ar-AE" i="1">
+                                      <a:latin typeface="Cambria Math" panose="02040503050406030204" pitchFamily="18" charset="0"/>
+                                    </a:rPr>
                                     <m:t>𝑝</m:t>
                                   </m:r>
                                 </m:den>
@@ -8224,114 +9443,160 @@
                         </m:e>
                       </m:func>
                       <m:r>
-                        <a:rPr lang="ar-AE"/>
+                        <a:rPr lang="ar-AE">
+                          <a:latin typeface="Cambria Math" panose="02040503050406030204" pitchFamily="18" charset="0"/>
+                        </a:rPr>
                         <m:t>=−</m:t>
                       </m:r>
                       <m:r>
-                        <a:rPr lang="ar-AE"/>
+                        <a:rPr lang="ar-AE">
+                          <a:latin typeface="Cambria Math" panose="02040503050406030204" pitchFamily="18" charset="0"/>
+                        </a:rPr>
                         <m:t>5</m:t>
                       </m:r>
                       <m:r>
-                        <a:rPr lang="ar-AE"/>
+                        <a:rPr lang="ar-AE">
+                          <a:latin typeface="Cambria Math" panose="02040503050406030204" pitchFamily="18" charset="0"/>
+                        </a:rPr>
                         <m:t>+</m:t>
                       </m:r>
                       <m:r>
-                        <a:rPr lang="ar-AE"/>
+                        <a:rPr lang="ar-AE">
+                          <a:latin typeface="Cambria Math" panose="02040503050406030204" pitchFamily="18" charset="0"/>
+                        </a:rPr>
                         <m:t>0</m:t>
                       </m:r>
                       <m:r>
-                        <a:rPr lang="ar-AE"/>
+                        <a:rPr lang="ar-AE">
+                          <a:latin typeface="Cambria Math" panose="02040503050406030204" pitchFamily="18" charset="0"/>
+                        </a:rPr>
                         <m:t>.</m:t>
                       </m:r>
                       <m:r>
-                        <a:rPr lang="ar-AE"/>
+                        <a:rPr lang="ar-AE">
+                          <a:latin typeface="Cambria Math" panose="02040503050406030204" pitchFamily="18" charset="0"/>
+                        </a:rPr>
                         <m:t>04</m:t>
                       </m:r>
                       <m:sSub>
                         <m:sSubPr>
                           <m:ctrlPr>
-                            <a:rPr lang="ar-AE" i="1"/>
+                            <a:rPr lang="ar-AE" i="1">
+                              <a:latin typeface="Cambria Math" panose="02040503050406030204" pitchFamily="18" charset="0"/>
+                            </a:rPr>
                           </m:ctrlPr>
                         </m:sSubPr>
                         <m:e>
                           <m:r>
-                            <a:rPr lang="ar-AE" i="1"/>
+                            <a:rPr lang="ar-AE" i="1">
+                              <a:latin typeface="Cambria Math" panose="02040503050406030204" pitchFamily="18" charset="0"/>
+                            </a:rPr>
                             <m:t>𝑥</m:t>
                           </m:r>
                         </m:e>
                         <m:sub>
                           <m:r>
-                            <a:rPr lang="ar-AE"/>
+                            <a:rPr lang="ar-AE">
+                              <a:latin typeface="Cambria Math" panose="02040503050406030204" pitchFamily="18" charset="0"/>
+                            </a:rPr>
                             <m:t>1</m:t>
                           </m:r>
                         </m:sub>
                       </m:sSub>
                       <m:r>
-                        <a:rPr lang="ar-AE"/>
+                        <a:rPr lang="ar-AE">
+                          <a:latin typeface="Cambria Math" panose="02040503050406030204" pitchFamily="18" charset="0"/>
+                        </a:rPr>
                         <m:t>+</m:t>
                       </m:r>
                       <m:r>
-                        <a:rPr lang="ar-AE"/>
+                        <a:rPr lang="ar-AE">
+                          <a:latin typeface="Cambria Math" panose="02040503050406030204" pitchFamily="18" charset="0"/>
+                        </a:rPr>
                         <m:t>1</m:t>
                       </m:r>
                       <m:r>
-                        <a:rPr lang="ar-AE"/>
+                        <a:rPr lang="ar-AE">
+                          <a:latin typeface="Cambria Math" panose="02040503050406030204" pitchFamily="18" charset="0"/>
+                        </a:rPr>
                         <m:t>.</m:t>
                       </m:r>
                       <m:r>
-                        <a:rPr lang="ar-AE"/>
+                        <a:rPr lang="ar-AE">
+                          <a:latin typeface="Cambria Math" panose="02040503050406030204" pitchFamily="18" charset="0"/>
+                        </a:rPr>
                         <m:t>2</m:t>
                       </m:r>
                       <m:sSub>
                         <m:sSubPr>
                           <m:ctrlPr>
-                            <a:rPr lang="ar-AE" i="1"/>
+                            <a:rPr lang="ar-AE" i="1">
+                              <a:latin typeface="Cambria Math" panose="02040503050406030204" pitchFamily="18" charset="0"/>
+                            </a:rPr>
                           </m:ctrlPr>
                         </m:sSubPr>
                         <m:e>
                           <m:r>
-                            <a:rPr lang="ar-AE" i="1"/>
+                            <a:rPr lang="ar-AE" i="1">
+                              <a:latin typeface="Cambria Math" panose="02040503050406030204" pitchFamily="18" charset="0"/>
+                            </a:rPr>
                             <m:t>𝑥</m:t>
                           </m:r>
                         </m:e>
                         <m:sub>
                           <m:r>
-                            <a:rPr lang="ar-AE"/>
+                            <a:rPr lang="ar-AE">
+                              <a:latin typeface="Cambria Math" panose="02040503050406030204" pitchFamily="18" charset="0"/>
+                            </a:rPr>
                             <m:t>2</m:t>
                           </m:r>
                         </m:sub>
                       </m:sSub>
                       <m:r>
-                        <a:rPr lang="ar-AE"/>
+                        <a:rPr lang="ar-AE">
+                          <a:latin typeface="Cambria Math" panose="02040503050406030204" pitchFamily="18" charset="0"/>
+                        </a:rPr>
                         <m:t>+</m:t>
                       </m:r>
                       <m:r>
-                        <a:rPr lang="ar-AE"/>
+                        <a:rPr lang="ar-AE">
+                          <a:latin typeface="Cambria Math" panose="02040503050406030204" pitchFamily="18" charset="0"/>
+                        </a:rPr>
                         <m:t>0</m:t>
                       </m:r>
                       <m:r>
-                        <a:rPr lang="ar-AE"/>
+                        <a:rPr lang="ar-AE">
+                          <a:latin typeface="Cambria Math" panose="02040503050406030204" pitchFamily="18" charset="0"/>
+                        </a:rPr>
                         <m:t>.</m:t>
                       </m:r>
                       <m:r>
-                        <a:rPr lang="ar-AE"/>
+                        <a:rPr lang="ar-AE">
+                          <a:latin typeface="Cambria Math" panose="02040503050406030204" pitchFamily="18" charset="0"/>
+                        </a:rPr>
                         <m:t>8</m:t>
                       </m:r>
                       <m:sSub>
                         <m:sSubPr>
                           <m:ctrlPr>
-                            <a:rPr lang="ar-AE" i="1"/>
+                            <a:rPr lang="ar-AE" i="1">
+                              <a:latin typeface="Cambria Math" panose="02040503050406030204" pitchFamily="18" charset="0"/>
+                            </a:rPr>
                           </m:ctrlPr>
                         </m:sSubPr>
                         <m:e>
                           <m:r>
-                            <a:rPr lang="ar-AE" i="1"/>
+                            <a:rPr lang="ar-AE" i="1">
+                              <a:latin typeface="Cambria Math" panose="02040503050406030204" pitchFamily="18" charset="0"/>
+                            </a:rPr>
                             <m:t>𝑥</m:t>
                           </m:r>
                         </m:e>
                         <m:sub>
                           <m:r>
-                            <a:rPr lang="ar-AE"/>
+                            <a:rPr lang="ar-AE">
+                              <a:latin typeface="Cambria Math" panose="02040503050406030204" pitchFamily="18" charset="0"/>
+                            </a:rPr>
                             <m:t>3</m:t>
                           </m:r>
                         </m:sub>
@@ -8347,18 +9612,24 @@
                     <m:sSub>
                       <m:sSubPr>
                         <m:ctrlPr>
-                          <a:rPr lang="ar-AE"/>
+                          <a:rPr lang="ar-AE" i="1">
+                            <a:latin typeface="Cambria Math" panose="02040503050406030204" pitchFamily="18" charset="0"/>
+                          </a:rPr>
                         </m:ctrlPr>
                       </m:sSubPr>
                       <m:e>
                         <m:r>
-                          <a:rPr lang="ar-AE" i="1"/>
+                          <a:rPr lang="ar-AE" i="1">
+                            <a:latin typeface="Cambria Math" panose="02040503050406030204" pitchFamily="18" charset="0"/>
+                          </a:rPr>
                           <m:t>𝑥</m:t>
                         </m:r>
                       </m:e>
                       <m:sub>
                         <m:r>
-                          <a:rPr lang="ar-AE"/>
+                          <a:rPr lang="ar-AE">
+                            <a:latin typeface="Cambria Math" panose="02040503050406030204" pitchFamily="18" charset="0"/>
+                          </a:rPr>
                           <m:t>1</m:t>
                         </m:r>
                       </m:sub>
@@ -8380,18 +9651,24 @@
                     <m:sSub>
                       <m:sSubPr>
                         <m:ctrlPr>
-                          <a:rPr lang="ar-AE"/>
+                          <a:rPr lang="ar-AE" i="1">
+                            <a:latin typeface="Cambria Math" panose="02040503050406030204" pitchFamily="18" charset="0"/>
+                          </a:rPr>
                         </m:ctrlPr>
                       </m:sSubPr>
                       <m:e>
                         <m:r>
-                          <a:rPr lang="ar-AE" i="1"/>
+                          <a:rPr lang="ar-AE" i="1">
+                            <a:latin typeface="Cambria Math" panose="02040503050406030204" pitchFamily="18" charset="0"/>
+                          </a:rPr>
                           <m:t>𝑥</m:t>
                         </m:r>
                       </m:e>
                       <m:sub>
                         <m:r>
-                          <a:rPr lang="ar-AE" smtClean="0"/>
+                          <a:rPr lang="ar-AE" smtClean="0">
+                            <a:latin typeface="Cambria Math" panose="02040503050406030204" pitchFamily="18" charset="0"/>
+                          </a:rPr>
                           <m:t>2</m:t>
                         </m:r>
                       </m:sub>
@@ -8413,18 +9690,24 @@
                     <m:sSub>
                       <m:sSubPr>
                         <m:ctrlPr>
-                          <a:rPr lang="ar-AE"/>
+                          <a:rPr lang="ar-AE" i="1">
+                            <a:latin typeface="Cambria Math" panose="02040503050406030204" pitchFamily="18" charset="0"/>
+                          </a:rPr>
                         </m:ctrlPr>
                       </m:sSubPr>
                       <m:e>
                         <m:r>
-                          <a:rPr lang="ar-AE" i="1"/>
+                          <a:rPr lang="ar-AE" i="1">
+                            <a:latin typeface="Cambria Math" panose="02040503050406030204" pitchFamily="18" charset="0"/>
+                          </a:rPr>
                           <m:t>𝑥</m:t>
                         </m:r>
                       </m:e>
                       <m:sub>
                         <m:r>
-                          <a:rPr lang="ar-AE"/>
+                          <a:rPr lang="ar-AE">
+                            <a:latin typeface="Cambria Math" panose="02040503050406030204" pitchFamily="18" charset="0"/>
+                          </a:rPr>
                           <m:t>3</m:t>
                         </m:r>
                       </m:sub>
@@ -8463,44 +9746,62 @@
                     <m:sSup>
                       <m:sSupPr>
                         <m:ctrlPr>
-                          <a:rPr lang="ar-AE"/>
+                          <a:rPr lang="ar-AE" i="1">
+                            <a:latin typeface="Cambria Math" panose="02040503050406030204" pitchFamily="18" charset="0"/>
+                          </a:rPr>
                         </m:ctrlPr>
                       </m:sSupPr>
                       <m:e>
                         <m:r>
-                          <a:rPr lang="ar-AE" i="1"/>
+                          <a:rPr lang="ar-AE" i="1">
+                            <a:latin typeface="Cambria Math" panose="02040503050406030204" pitchFamily="18" charset="0"/>
+                          </a:rPr>
                           <m:t>𝑒</m:t>
                         </m:r>
                       </m:e>
                       <m:sup>
                         <m:r>
-                          <a:rPr lang="ar-AE"/>
+                          <a:rPr lang="ar-AE">
+                            <a:latin typeface="Cambria Math" panose="02040503050406030204" pitchFamily="18" charset="0"/>
+                          </a:rPr>
                           <m:t>0</m:t>
                         </m:r>
                         <m:r>
-                          <a:rPr lang="ar-AE"/>
+                          <a:rPr lang="ar-AE">
+                            <a:latin typeface="Cambria Math" panose="02040503050406030204" pitchFamily="18" charset="0"/>
+                          </a:rPr>
                           <m:t>.</m:t>
                         </m:r>
                         <m:r>
-                          <a:rPr lang="ar-AE"/>
+                          <a:rPr lang="ar-AE">
+                            <a:latin typeface="Cambria Math" panose="02040503050406030204" pitchFamily="18" charset="0"/>
+                          </a:rPr>
                           <m:t>04</m:t>
                         </m:r>
                       </m:sup>
                     </m:sSup>
                     <m:r>
-                      <a:rPr lang="ar-AE"/>
+                      <a:rPr lang="ar-AE">
+                        <a:latin typeface="Cambria Math" panose="02040503050406030204" pitchFamily="18" charset="0"/>
+                      </a:rPr>
                       <m:t>=</m:t>
                     </m:r>
                     <m:r>
-                      <a:rPr lang="ar-AE"/>
+                      <a:rPr lang="ar-AE">
+                        <a:latin typeface="Cambria Math" panose="02040503050406030204" pitchFamily="18" charset="0"/>
+                      </a:rPr>
                       <m:t>1</m:t>
                     </m:r>
                     <m:r>
-                      <a:rPr lang="ar-AE"/>
+                      <a:rPr lang="ar-AE">
+                        <a:latin typeface="Cambria Math" panose="02040503050406030204" pitchFamily="18" charset="0"/>
+                      </a:rPr>
                       <m:t>.</m:t>
                     </m:r>
                     <m:r>
-                      <a:rPr lang="ar-AE"/>
+                      <a:rPr lang="ar-AE">
+                        <a:latin typeface="Cambria Math" panose="02040503050406030204" pitchFamily="18" charset="0"/>
+                      </a:rPr>
                       <m:t>04</m:t>
                     </m:r>
                   </m:oMath>
@@ -8517,44 +9818,62 @@
                     <m:sSup>
                       <m:sSupPr>
                         <m:ctrlPr>
-                          <a:rPr lang="ar-AE"/>
+                          <a:rPr lang="ar-AE" i="1">
+                            <a:latin typeface="Cambria Math" panose="02040503050406030204" pitchFamily="18" charset="0"/>
+                          </a:rPr>
                         </m:ctrlPr>
                       </m:sSupPr>
                       <m:e>
                         <m:r>
-                          <a:rPr lang="ar-AE" i="1"/>
+                          <a:rPr lang="ar-AE" i="1">
+                            <a:latin typeface="Cambria Math" panose="02040503050406030204" pitchFamily="18" charset="0"/>
+                          </a:rPr>
                           <m:t>𝑒</m:t>
                         </m:r>
                       </m:e>
                       <m:sup>
                         <m:r>
-                          <a:rPr lang="ar-AE"/>
+                          <a:rPr lang="ar-AE">
+                            <a:latin typeface="Cambria Math" panose="02040503050406030204" pitchFamily="18" charset="0"/>
+                          </a:rPr>
                           <m:t>1</m:t>
                         </m:r>
                         <m:r>
-                          <a:rPr lang="ar-AE"/>
+                          <a:rPr lang="ar-AE">
+                            <a:latin typeface="Cambria Math" panose="02040503050406030204" pitchFamily="18" charset="0"/>
+                          </a:rPr>
                           <m:t>.</m:t>
                         </m:r>
                         <m:r>
-                          <a:rPr lang="ar-AE"/>
+                          <a:rPr lang="ar-AE">
+                            <a:latin typeface="Cambria Math" panose="02040503050406030204" pitchFamily="18" charset="0"/>
+                          </a:rPr>
                           <m:t>2</m:t>
                         </m:r>
                       </m:sup>
                     </m:sSup>
                     <m:r>
-                      <a:rPr lang="ar-AE"/>
+                      <a:rPr lang="ar-AE">
+                        <a:latin typeface="Cambria Math" panose="02040503050406030204" pitchFamily="18" charset="0"/>
+                      </a:rPr>
                       <m:t>=</m:t>
                     </m:r>
                     <m:r>
-                      <a:rPr lang="ar-AE"/>
+                      <a:rPr lang="ar-AE">
+                        <a:latin typeface="Cambria Math" panose="02040503050406030204" pitchFamily="18" charset="0"/>
+                      </a:rPr>
                       <m:t>3</m:t>
                     </m:r>
                     <m:r>
-                      <a:rPr lang="ar-AE"/>
+                      <a:rPr lang="ar-AE">
+                        <a:latin typeface="Cambria Math" panose="02040503050406030204" pitchFamily="18" charset="0"/>
+                      </a:rPr>
                       <m:t>.</m:t>
                     </m:r>
                     <m:r>
-                      <a:rPr lang="ar-AE"/>
+                      <a:rPr lang="ar-AE">
+                        <a:latin typeface="Cambria Math" panose="02040503050406030204" pitchFamily="18" charset="0"/>
+                      </a:rPr>
                       <m:t>32</m:t>
                     </m:r>
                   </m:oMath>
@@ -8571,44 +9890,62 @@
                     <m:sSup>
                       <m:sSupPr>
                         <m:ctrlPr>
-                          <a:rPr lang="ar-AE"/>
+                          <a:rPr lang="ar-AE" i="1">
+                            <a:latin typeface="Cambria Math" panose="02040503050406030204" pitchFamily="18" charset="0"/>
+                          </a:rPr>
                         </m:ctrlPr>
                       </m:sSupPr>
                       <m:e>
                         <m:r>
-                          <a:rPr lang="ar-AE" i="1"/>
+                          <a:rPr lang="ar-AE" i="1">
+                            <a:latin typeface="Cambria Math" panose="02040503050406030204" pitchFamily="18" charset="0"/>
+                          </a:rPr>
                           <m:t>𝑒</m:t>
                         </m:r>
                       </m:e>
                       <m:sup>
                         <m:r>
-                          <a:rPr lang="ar-AE"/>
+                          <a:rPr lang="ar-AE">
+                            <a:latin typeface="Cambria Math" panose="02040503050406030204" pitchFamily="18" charset="0"/>
+                          </a:rPr>
                           <m:t>0</m:t>
                         </m:r>
                         <m:r>
-                          <a:rPr lang="ar-AE"/>
+                          <a:rPr lang="ar-AE">
+                            <a:latin typeface="Cambria Math" panose="02040503050406030204" pitchFamily="18" charset="0"/>
+                          </a:rPr>
                           <m:t>.</m:t>
                         </m:r>
                         <m:r>
-                          <a:rPr lang="ar-AE"/>
+                          <a:rPr lang="ar-AE">
+                            <a:latin typeface="Cambria Math" panose="02040503050406030204" pitchFamily="18" charset="0"/>
+                          </a:rPr>
                           <m:t>8</m:t>
                         </m:r>
                       </m:sup>
                     </m:sSup>
                     <m:r>
-                      <a:rPr lang="ar-AE"/>
+                      <a:rPr lang="ar-AE">
+                        <a:latin typeface="Cambria Math" panose="02040503050406030204" pitchFamily="18" charset="0"/>
+                      </a:rPr>
                       <m:t>=</m:t>
                     </m:r>
                     <m:r>
-                      <a:rPr lang="ar-AE"/>
+                      <a:rPr lang="ar-AE">
+                        <a:latin typeface="Cambria Math" panose="02040503050406030204" pitchFamily="18" charset="0"/>
+                      </a:rPr>
                       <m:t>2</m:t>
                     </m:r>
                     <m:r>
-                      <a:rPr lang="ar-AE"/>
+                      <a:rPr lang="ar-AE">
+                        <a:latin typeface="Cambria Math" panose="02040503050406030204" pitchFamily="18" charset="0"/>
+                      </a:rPr>
                       <m:t>.</m:t>
                     </m:r>
                     <m:r>
-                      <a:rPr lang="ar-AE"/>
+                      <a:rPr lang="ar-AE">
+                        <a:latin typeface="Cambria Math" panose="02040503050406030204" pitchFamily="18" charset="0"/>
+                      </a:rPr>
                       <m:t>23</m:t>
                     </m:r>
                   </m:oMath>
@@ -8627,7 +9964,7 @@
             </p:txBody>
           </p:sp>
         </mc:Choice>
-        <mc:Fallback>
+        <mc:Fallback xmlns="">
           <p:sp>
             <p:nvSpPr>
               <p:cNvPr id="3" name="Content Placeholder 2">
@@ -8759,6 +10096,340 @@
 </file>
 
 <file path=ppt/slides/slide7.xml><?xml version="1.0" encoding="utf-8"?>
+<p:sld xmlns:a="http://schemas.openxmlformats.org/drawingml/2006/main" xmlns:r="http://schemas.openxmlformats.org/officeDocument/2006/relationships" xmlns:p="http://schemas.openxmlformats.org/presentationml/2006/main">
+  <p:cSld>
+    <p:bg>
+      <p:bgPr>
+        <a:solidFill>
+          <a:schemeClr val="bg1"/>
+        </a:solidFill>
+        <a:effectLst/>
+      </p:bgPr>
+    </p:bg>
+    <p:spTree>
+      <p:nvGrpSpPr>
+        <p:cNvPr id="1" name=""/>
+        <p:cNvGrpSpPr/>
+        <p:nvPr/>
+      </p:nvGrpSpPr>
+      <p:grpSpPr>
+        <a:xfrm>
+          <a:off x="0" y="0"/>
+          <a:ext cx="0" cy="0"/>
+          <a:chOff x="0" y="0"/>
+          <a:chExt cx="0" cy="0"/>
+        </a:xfrm>
+      </p:grpSpPr>
+      <p:sp useBgFill="1">
+        <p:nvSpPr>
+          <p:cNvPr id="12" name="Rectangle 11">
+            <a:extLst>
+              <a:ext uri="{FF2B5EF4-FFF2-40B4-BE49-F238E27FC236}">
+                <a16:creationId xmlns:a16="http://schemas.microsoft.com/office/drawing/2014/main" id="{E49D7415-2F11-44C2-B6AA-13A25B6814B9}"/>
+              </a:ext>
+              <a:ext uri="{C183D7F6-B498-43B3-948B-1728B52AA6E4}">
+                <adec:decorative xmlns:adec="http://schemas.microsoft.com/office/drawing/2017/decorative" val="1"/>
+              </a:ext>
+            </a:extLst>
+          </p:cNvPr>
+          <p:cNvSpPr>
+            <a:spLocks noGrp="1" noRot="1" noChangeAspect="1" noMove="1" noResize="1" noEditPoints="1" noAdjustHandles="1" noChangeArrowheads="1" noChangeShapeType="1" noTextEdit="1"/>
+          </p:cNvSpPr>
+          <p:nvPr>
+            <p:extLst>
+              <p:ext uri="{386F3935-93C4-4BCD-93E2-E3B085C9AB24}">
+                <p16:designElem xmlns:p16="http://schemas.microsoft.com/office/powerpoint/2015/main" val="1"/>
+              </p:ext>
+            </p:extLst>
+          </p:nvPr>
+        </p:nvSpPr>
+        <p:spPr>
+          <a:xfrm>
+            <a:off x="0" y="0"/>
+            <a:ext cx="12192000" cy="6858000"/>
+          </a:xfrm>
+          <a:prstGeom prst="rect">
+            <a:avLst/>
+          </a:prstGeom>
+          <a:ln w="12700" cap="flat" cmpd="sng" algn="ctr">
+            <a:noFill/>
+            <a:prstDash val="solid"/>
+            <a:miter lim="800000"/>
+          </a:ln>
+          <a:effectLst/>
+          <a:extLst>
+            <a:ext uri="{91240B29-F687-4F45-9708-019B960494DF}">
+              <a14:hiddenLine xmlns:a14="http://schemas.microsoft.com/office/drawing/2010/main" w="12700" cap="flat" cmpd="sng" algn="ctr">
+                <a:solidFill>
+                  <a:schemeClr val="accent1">
+                    <a:shade val="50000"/>
+                  </a:schemeClr>
+                </a:solidFill>
+                <a:prstDash val="solid"/>
+                <a:miter lim="800000"/>
+              </a14:hiddenLine>
+            </a:ext>
+          </a:extLst>
+        </p:spPr>
+        <p:style>
+          <a:lnRef idx="2">
+            <a:schemeClr val="accent1">
+              <a:shade val="50000"/>
+            </a:schemeClr>
+          </a:lnRef>
+          <a:fillRef idx="1">
+            <a:schemeClr val="accent1"/>
+          </a:fillRef>
+          <a:effectRef idx="0">
+            <a:schemeClr val="accent1"/>
+          </a:effectRef>
+          <a:fontRef idx="minor">
+            <a:schemeClr val="lt1"/>
+          </a:fontRef>
+        </p:style>
+        <p:txBody>
+          <a:bodyPr rtlCol="0" anchor="ctr"/>
+          <a:lstStyle/>
+          <a:p>
+            <a:pPr algn="ctr"/>
+            <a:endParaRPr lang="en-US"/>
+          </a:p>
+        </p:txBody>
+      </p:sp>
+      <p:sp>
+        <p:nvSpPr>
+          <p:cNvPr id="2" name="Title 1">
+            <a:extLst>
+              <a:ext uri="{FF2B5EF4-FFF2-40B4-BE49-F238E27FC236}">
+                <a16:creationId xmlns:a16="http://schemas.microsoft.com/office/drawing/2014/main" id="{A03F61DF-6AF2-CA0F-A2CF-CB20974D3E82}"/>
+              </a:ext>
+            </a:extLst>
+          </p:cNvPr>
+          <p:cNvSpPr>
+            <a:spLocks noGrp="1"/>
+          </p:cNvSpPr>
+          <p:nvPr>
+            <p:ph type="title"/>
+          </p:nvPr>
+        </p:nvSpPr>
+        <p:spPr>
+          <a:xfrm>
+            <a:off x="704088" y="914400"/>
+            <a:ext cx="10687812" cy="798194"/>
+          </a:xfrm>
+        </p:spPr>
+        <p:txBody>
+          <a:bodyPr vert="horz" lIns="91440" tIns="45720" rIns="91440" bIns="45720" rtlCol="0" anchor="t">
+            <a:normAutofit/>
+          </a:bodyPr>
+          <a:lstStyle/>
+          <a:p>
+            <a:r>
+              <a:rPr lang="en-US"/>
+              <a:t>Correlated Features</a:t>
+            </a:r>
+            <a:endParaRPr lang="en-US" dirty="0"/>
+          </a:p>
+        </p:txBody>
+      </p:sp>
+      <p:cxnSp>
+        <p:nvCxnSpPr>
+          <p:cNvPr id="14" name="Straight Connector 13">
+            <a:extLst>
+              <a:ext uri="{FF2B5EF4-FFF2-40B4-BE49-F238E27FC236}">
+                <a16:creationId xmlns:a16="http://schemas.microsoft.com/office/drawing/2014/main" id="{D2E57F3D-33BE-4306-87E6-245763719516}"/>
+              </a:ext>
+              <a:ext uri="{C183D7F6-B498-43B3-948B-1728B52AA6E4}">
+                <adec:decorative xmlns:adec="http://schemas.microsoft.com/office/drawing/2017/decorative" val="1"/>
+              </a:ext>
+            </a:extLst>
+          </p:cNvPr>
+          <p:cNvCxnSpPr>
+            <a:cxnSpLocks noGrp="1" noRot="1" noChangeAspect="1" noMove="1" noResize="1" noEditPoints="1" noAdjustHandles="1" noChangeArrowheads="1" noChangeShapeType="1"/>
+          </p:cNvCxnSpPr>
+          <p:nvPr>
+            <p:extLst>
+              <p:ext uri="{386F3935-93C4-4BCD-93E2-E3B085C9AB24}">
+                <p16:designElem xmlns:p16="http://schemas.microsoft.com/office/powerpoint/2015/main" val="1"/>
+              </p:ext>
+            </p:extLst>
+          </p:nvPr>
+        </p:nvCxnSpPr>
+        <p:spPr>
+          <a:xfrm>
+            <a:off x="804672" y="723900"/>
+            <a:ext cx="10588752" cy="0"/>
+          </a:xfrm>
+          <a:prstGeom prst="line">
+            <a:avLst/>
+          </a:prstGeom>
+          <a:ln w="44450">
+            <a:solidFill>
+              <a:schemeClr val="tx1"/>
+            </a:solidFill>
+          </a:ln>
+        </p:spPr>
+        <p:style>
+          <a:lnRef idx="1">
+            <a:schemeClr val="accent1"/>
+          </a:lnRef>
+          <a:fillRef idx="0">
+            <a:schemeClr val="accent1"/>
+          </a:fillRef>
+          <a:effectRef idx="0">
+            <a:schemeClr val="accent1"/>
+          </a:effectRef>
+          <a:fontRef idx="minor">
+            <a:schemeClr val="tx1"/>
+          </a:fontRef>
+        </p:style>
+      </p:cxnSp>
+      <p:pic>
+        <p:nvPicPr>
+          <p:cNvPr id="5" name="Content Placeholder 4">
+            <a:extLst>
+              <a:ext uri="{FF2B5EF4-FFF2-40B4-BE49-F238E27FC236}">
+                <a16:creationId xmlns:a16="http://schemas.microsoft.com/office/drawing/2014/main" id="{4B06499E-302F-BAA0-24E4-BAABB67CC416}"/>
+              </a:ext>
+            </a:extLst>
+          </p:cNvPr>
+          <p:cNvPicPr>
+            <a:picLocks noGrp="1" noChangeAspect="1"/>
+          </p:cNvPicPr>
+          <p:nvPr>
+            <p:ph idx="1"/>
+          </p:nvPr>
+        </p:nvPicPr>
+        <p:blipFill>
+          <a:blip r:embed="rId2">
+            <a:extLst>
+              <a:ext uri="{28A0092B-C50C-407E-A947-70E740481C1C}">
+                <a14:useLocalDpi xmlns:a14="http://schemas.microsoft.com/office/drawing/2010/main" val="0"/>
+              </a:ext>
+            </a:extLst>
+          </a:blip>
+          <a:stretch>
+            <a:fillRect/>
+          </a:stretch>
+        </p:blipFill>
+        <p:spPr>
+          <a:xfrm>
+            <a:off x="217406" y="1835573"/>
+            <a:ext cx="6983494" cy="3910755"/>
+          </a:xfrm>
+          <a:prstGeom prst="rect">
+            <a:avLst/>
+          </a:prstGeom>
+        </p:spPr>
+      </p:pic>
+      <p:sp>
+        <p:nvSpPr>
+          <p:cNvPr id="7" name="TextBox 6">
+            <a:extLst>
+              <a:ext uri="{FF2B5EF4-FFF2-40B4-BE49-F238E27FC236}">
+                <a16:creationId xmlns:a16="http://schemas.microsoft.com/office/drawing/2014/main" id="{5FC8F8C5-1E4F-DEE3-2438-5D5CAC176A41}"/>
+              </a:ext>
+            </a:extLst>
+          </p:cNvPr>
+          <p:cNvSpPr txBox="1"/>
+          <p:nvPr/>
+        </p:nvSpPr>
+        <p:spPr>
+          <a:xfrm>
+            <a:off x="7200900" y="1849121"/>
+            <a:ext cx="4191001" cy="4139626"/>
+          </a:xfrm>
+          <a:prstGeom prst="rect">
+            <a:avLst/>
+          </a:prstGeom>
+        </p:spPr>
+        <p:txBody>
+          <a:bodyPr vert="horz" lIns="91440" tIns="45720" rIns="91440" bIns="45720" rtlCol="0" anchor="t">
+            <a:normAutofit/>
+          </a:bodyPr>
+          <a:lstStyle/>
+          <a:p>
+            <a:pPr>
+              <a:lnSpc>
+                <a:spcPct val="110000"/>
+              </a:lnSpc>
+              <a:spcAft>
+                <a:spcPts val="600"/>
+              </a:spcAft>
+            </a:pPr>
+            <a:r>
+              <a:rPr lang="en-US" dirty="0"/>
+              <a:t>With correlated predictors, coefficients can shift between model fits even when overall performance is similar. The predictive signal is shared, so individual coefficient-based importance becomes unstable. Interpret these values cautiously under multicollinearity.</a:t>
+            </a:r>
+          </a:p>
+        </p:txBody>
+      </p:sp>
+      <p:cxnSp>
+        <p:nvCxnSpPr>
+          <p:cNvPr id="19" name="Straight Connector 18">
+            <a:extLst>
+              <a:ext uri="{FF2B5EF4-FFF2-40B4-BE49-F238E27FC236}">
+                <a16:creationId xmlns:a16="http://schemas.microsoft.com/office/drawing/2014/main" id="{8E0104E4-99BC-494F-8342-F250828E574F}"/>
+              </a:ext>
+              <a:ext uri="{C183D7F6-B498-43B3-948B-1728B52AA6E4}">
+                <adec:decorative xmlns:adec="http://schemas.microsoft.com/office/drawing/2017/decorative" val="1"/>
+              </a:ext>
+            </a:extLst>
+          </p:cNvPr>
+          <p:cNvCxnSpPr>
+            <a:cxnSpLocks noGrp="1" noRot="1" noChangeAspect="1" noMove="1" noResize="1" noEditPoints="1" noAdjustHandles="1" noChangeArrowheads="1" noChangeShapeType="1"/>
+          </p:cNvCxnSpPr>
+          <p:nvPr>
+            <p:extLst>
+              <p:ext uri="{386F3935-93C4-4BCD-93E2-E3B085C9AB24}">
+                <p16:designElem xmlns:p16="http://schemas.microsoft.com/office/powerpoint/2015/main" val="1"/>
+              </p:ext>
+            </p:extLst>
+          </p:nvPr>
+        </p:nvCxnSpPr>
+        <p:spPr>
+          <a:xfrm>
+            <a:off x="809065" y="6145599"/>
+            <a:ext cx="10582835" cy="0"/>
+          </a:xfrm>
+          <a:prstGeom prst="line">
+            <a:avLst/>
+          </a:prstGeom>
+          <a:ln w="12700">
+            <a:solidFill>
+              <a:schemeClr val="tx1"/>
+            </a:solidFill>
+          </a:ln>
+        </p:spPr>
+        <p:style>
+          <a:lnRef idx="1">
+            <a:schemeClr val="accent1"/>
+          </a:lnRef>
+          <a:fillRef idx="0">
+            <a:schemeClr val="accent1"/>
+          </a:fillRef>
+          <a:effectRef idx="0">
+            <a:schemeClr val="accent1"/>
+          </a:effectRef>
+          <a:fontRef idx="minor">
+            <a:schemeClr val="tx1"/>
+          </a:fontRef>
+        </p:style>
+      </p:cxnSp>
+    </p:spTree>
+    <p:extLst>
+      <p:ext uri="{BB962C8B-B14F-4D97-AF65-F5344CB8AC3E}">
+        <p14:creationId xmlns:p14="http://schemas.microsoft.com/office/powerpoint/2010/main" val="2389656440"/>
+      </p:ext>
+    </p:extLst>
+  </p:cSld>
+  <p:clrMapOvr>
+    <a:masterClrMapping/>
+  </p:clrMapOvr>
+</p:sld>
+</file>
+
+<file path=ppt/slides/slide8.xml><?xml version="1.0" encoding="utf-8"?>
 <p:sld xmlns:a="http://schemas.openxmlformats.org/drawingml/2006/main" xmlns:r="http://schemas.openxmlformats.org/officeDocument/2006/relationships" xmlns:p="http://schemas.openxmlformats.org/presentationml/2006/main">
   <p:cSld>
     <p:spTree>
@@ -9055,7 +10726,7 @@
 </p:sld>
 </file>
 
-<file path=ppt/slides/slide8.xml><?xml version="1.0" encoding="utf-8"?>
+<file path=ppt/slides/slide9.xml><?xml version="1.0" encoding="utf-8"?>
 <p:sld xmlns:a="http://schemas.openxmlformats.org/drawingml/2006/main" xmlns:r="http://schemas.openxmlformats.org/officeDocument/2006/relationships" xmlns:p="http://schemas.openxmlformats.org/presentationml/2006/main">
   <p:cSld>
     <p:spTree>
@@ -9100,8 +10771,8 @@
           </a:p>
         </p:txBody>
       </p:sp>
-      <mc:AlternateContent xmlns:mc="http://schemas.openxmlformats.org/markup-compatibility/2006">
-        <mc:Choice xmlns:a14="http://schemas.microsoft.com/office/drawing/2010/main" Requires="a14">
+      <mc:AlternateContent xmlns:mc="http://schemas.openxmlformats.org/markup-compatibility/2006" xmlns:a14="http://schemas.microsoft.com/office/drawing/2010/main">
+        <mc:Choice Requires="a14">
           <p:sp>
             <p:nvSpPr>
               <p:cNvPr id="3" name="Content Placeholder 2">
@@ -9135,7 +10806,9 @@
                 <a14:m>
                   <m:oMath xmlns:m="http://schemas.openxmlformats.org/officeDocument/2006/math">
                     <m:r>
-                      <a:rPr lang="en-US" i="1"/>
+                      <a:rPr lang="en-US" i="1">
+                        <a:latin typeface="Cambria Math" panose="02040503050406030204" pitchFamily="18" charset="0"/>
+                      </a:rPr>
                       <m:t>𝑇</m:t>
                     </m:r>
                   </m:oMath>
@@ -9149,7 +10822,9 @@
                 <a14:m>
                   <m:oMath xmlns:m="http://schemas.openxmlformats.org/officeDocument/2006/math">
                     <m:r>
-                      <a:rPr lang="en-US" i="1"/>
+                      <a:rPr lang="en-US" i="1">
+                        <a:latin typeface="Cambria Math" panose="02040503050406030204" pitchFamily="18" charset="0"/>
+                      </a:rPr>
                       <m:t>𝑡</m:t>
                     </m:r>
                   </m:oMath>
@@ -9165,18 +10840,24 @@
                     <m:sSub>
                       <m:sSubPr>
                         <m:ctrlPr>
-                          <a:rPr lang="ar-AE"/>
+                          <a:rPr lang="ar-AE" i="1">
+                            <a:latin typeface="Cambria Math" panose="02040503050406030204" pitchFamily="18" charset="0"/>
+                          </a:rPr>
                         </m:ctrlPr>
                       </m:sSubPr>
                       <m:e>
                         <m:r>
-                          <a:rPr lang="ar-AE" i="1"/>
+                          <a:rPr lang="ar-AE" i="1">
+                            <a:latin typeface="Cambria Math" panose="02040503050406030204" pitchFamily="18" charset="0"/>
+                          </a:rPr>
                           <m:t>𝑥</m:t>
                         </m:r>
                       </m:e>
                       <m:sub>
                         <m:r>
-                          <a:rPr lang="ar-AE" i="1"/>
+                          <a:rPr lang="ar-AE" i="1">
+                            <a:latin typeface="Cambria Math" panose="02040503050406030204" pitchFamily="18" charset="0"/>
+                          </a:rPr>
                           <m:t>𝑗</m:t>
                         </m:r>
                       </m:sub>
@@ -9194,7 +10875,9 @@
                 <a14:m>
                   <m:oMath xmlns:m="http://schemas.openxmlformats.org/officeDocument/2006/math">
                     <m:r>
-                      <a:rPr lang="en-US" i="1"/>
+                      <a:rPr lang="en-US" i="1">
+                        <a:latin typeface="Cambria Math" panose="02040503050406030204" pitchFamily="18" charset="0"/>
+                      </a:rPr>
                       <m:t>𝑗</m:t>
                     </m:r>
                   </m:oMath>
@@ -9205,18 +10888,24 @@
                 <a14:m>
                   <m:oMath xmlns:m="http://schemas.openxmlformats.org/officeDocument/2006/math">
                     <m:r>
-                      <a:rPr lang="en-US" i="1"/>
+                      <a:rPr lang="en-US" i="1">
+                        <a:latin typeface="Cambria Math" panose="02040503050406030204" pitchFamily="18" charset="0"/>
+                      </a:rPr>
                       <m:t>𝐼</m:t>
                     </m:r>
                     <m:d>
                       <m:dPr>
                         <m:ctrlPr>
-                          <a:rPr lang="ar-AE" i="1"/>
+                          <a:rPr lang="ar-AE" i="1">
+                            <a:latin typeface="Cambria Math" panose="02040503050406030204" pitchFamily="18" charset="0"/>
+                          </a:rPr>
                         </m:ctrlPr>
                       </m:dPr>
                       <m:e>
                         <m:r>
-                          <a:rPr lang="ar-AE" i="1"/>
+                          <a:rPr lang="ar-AE" i="1">
+                            <a:latin typeface="Cambria Math" panose="02040503050406030204" pitchFamily="18" charset="0"/>
+                          </a:rPr>
                           <m:t>𝑡</m:t>
                         </m:r>
                       </m:e>
@@ -9234,7 +10923,9 @@
                 <a14:m>
                   <m:oMath xmlns:m="http://schemas.openxmlformats.org/officeDocument/2006/math">
                     <m:r>
-                      <a:rPr lang="en-US" i="1"/>
+                      <a:rPr lang="en-US" i="1">
+                        <a:latin typeface="Cambria Math" panose="02040503050406030204" pitchFamily="18" charset="0"/>
+                      </a:rPr>
                       <m:t>𝑡</m:t>
                     </m:r>
                   </m:oMath>
@@ -9247,18 +10938,24 @@
                     <m:sSub>
                       <m:sSubPr>
                         <m:ctrlPr>
-                          <a:rPr lang="ar-AE"/>
+                          <a:rPr lang="ar-AE" i="1">
+                            <a:latin typeface="Cambria Math" panose="02040503050406030204" pitchFamily="18" charset="0"/>
+                          </a:rPr>
                         </m:ctrlPr>
                       </m:sSubPr>
                       <m:e>
                         <m:r>
-                          <a:rPr lang="ar-AE" i="1"/>
+                          <a:rPr lang="ar-AE" i="1">
+                            <a:latin typeface="Cambria Math" panose="02040503050406030204" pitchFamily="18" charset="0"/>
+                          </a:rPr>
                           <m:t>𝑛</m:t>
                         </m:r>
                       </m:e>
                       <m:sub>
                         <m:r>
-                          <a:rPr lang="ar-AE" i="1"/>
+                          <a:rPr lang="ar-AE" i="1">
+                            <a:latin typeface="Cambria Math" panose="02040503050406030204" pitchFamily="18" charset="0"/>
+                          </a:rPr>
                           <m:t>𝑡</m:t>
                         </m:r>
                       </m:sub>
@@ -9276,7 +10973,9 @@
                 <a14:m>
                   <m:oMath xmlns:m="http://schemas.openxmlformats.org/officeDocument/2006/math">
                     <m:r>
-                      <a:rPr lang="en-US" i="1"/>
+                      <a:rPr lang="en-US" i="1">
+                        <a:latin typeface="Cambria Math" panose="02040503050406030204" pitchFamily="18" charset="0"/>
+                      </a:rPr>
                       <m:t>𝑡</m:t>
                     </m:r>
                   </m:oMath>
@@ -9289,7 +10988,7 @@
             </p:txBody>
           </p:sp>
         </mc:Choice>
-        <mc:Fallback>
+        <mc:Fallback xmlns="">
           <p:sp>
             <p:nvSpPr>
               <p:cNvPr id="3" name="Content Placeholder 2">
@@ -9329,8 +11028,8 @@
           </p:sp>
         </mc:Fallback>
       </mc:AlternateContent>
-      <mc:AlternateContent xmlns:mc="http://schemas.openxmlformats.org/markup-compatibility/2006">
-        <mc:Choice xmlns:a14="http://schemas.microsoft.com/office/drawing/2010/main" Requires="a14">
+      <mc:AlternateContent xmlns:mc="http://schemas.openxmlformats.org/markup-compatibility/2006" xmlns:a14="http://schemas.microsoft.com/office/drawing/2010/main">
+        <mc:Choice Requires="a14">
           <p:sp>
             <p:nvSpPr>
               <p:cNvPr id="4" name="Content Placeholder 3">
@@ -9364,7 +11063,9 @@
                 <a14:m>
                   <m:oMath xmlns:m="http://schemas.openxmlformats.org/officeDocument/2006/math">
                     <m:r>
-                      <a:rPr lang="en-US" i="1"/>
+                      <a:rPr lang="en-US" i="1">
+                        <a:latin typeface="Cambria Math" panose="02040503050406030204" pitchFamily="18" charset="0"/>
+                      </a:rPr>
                       <m:t>𝑡</m:t>
                     </m:r>
                   </m:oMath>
@@ -9378,18 +11079,24 @@
                     <m:sSub>
                       <m:sSubPr>
                         <m:ctrlPr>
-                          <a:rPr lang="ar-AE"/>
+                          <a:rPr lang="ar-AE" i="1">
+                            <a:latin typeface="Cambria Math" panose="02040503050406030204" pitchFamily="18" charset="0"/>
+                          </a:rPr>
                         </m:ctrlPr>
                       </m:sSubPr>
                       <m:e>
                         <m:r>
-                          <a:rPr lang="ar-AE" i="1"/>
+                          <a:rPr lang="ar-AE" i="1">
+                            <a:latin typeface="Cambria Math" panose="02040503050406030204" pitchFamily="18" charset="0"/>
+                          </a:rPr>
                           <m:t>𝑥</m:t>
                         </m:r>
                       </m:e>
                       <m:sub>
                         <m:r>
-                          <a:rPr lang="ar-AE" i="1"/>
+                          <a:rPr lang="ar-AE" i="1">
+                            <a:latin typeface="Cambria Math" panose="02040503050406030204" pitchFamily="18" charset="0"/>
+                          </a:rPr>
                           <m:t>𝑗</m:t>
                         </m:r>
                       </m:sub>
@@ -9416,18 +11123,24 @@
                     <m:sSub>
                       <m:sSubPr>
                         <m:ctrlPr>
-                          <a:rPr lang="ar-AE"/>
+                          <a:rPr lang="ar-AE" i="1">
+                            <a:latin typeface="Cambria Math" panose="02040503050406030204" pitchFamily="18" charset="0"/>
+                          </a:rPr>
                         </m:ctrlPr>
                       </m:sSubPr>
                       <m:e>
                         <m:r>
-                          <a:rPr lang="ar-AE" i="1"/>
+                          <a:rPr lang="ar-AE" i="1">
+                            <a:latin typeface="Cambria Math" panose="02040503050406030204" pitchFamily="18" charset="0"/>
+                          </a:rPr>
                           <m:t>𝑡</m:t>
                         </m:r>
                       </m:e>
                       <m:sub>
                         <m:r>
-                          <a:rPr lang="ar-AE" i="1"/>
+                          <a:rPr lang="ar-AE" i="1">
+                            <a:latin typeface="Cambria Math" panose="02040503050406030204" pitchFamily="18" charset="0"/>
+                          </a:rPr>
                           <m:t>𝐿</m:t>
                         </m:r>
                       </m:sub>
@@ -9447,18 +11160,24 @@
                     <m:sSub>
                       <m:sSubPr>
                         <m:ctrlPr>
-                          <a:rPr lang="ar-AE"/>
+                          <a:rPr lang="ar-AE" i="1">
+                            <a:latin typeface="Cambria Math" panose="02040503050406030204" pitchFamily="18" charset="0"/>
+                          </a:rPr>
                         </m:ctrlPr>
                       </m:sSubPr>
                       <m:e>
                         <m:r>
-                          <a:rPr lang="ar-AE" i="1"/>
+                          <a:rPr lang="ar-AE" i="1">
+                            <a:latin typeface="Cambria Math" panose="02040503050406030204" pitchFamily="18" charset="0"/>
+                          </a:rPr>
                           <m:t>𝑡</m:t>
                         </m:r>
                       </m:e>
                       <m:sub>
                         <m:r>
-                          <a:rPr lang="ar-AE" i="1"/>
+                          <a:rPr lang="ar-AE" i="1">
+                            <a:latin typeface="Cambria Math" panose="02040503050406030204" pitchFamily="18" charset="0"/>
+                          </a:rPr>
                           <m:t>𝑅</m:t>
                         </m:r>
                       </m:sub>
@@ -9495,74 +11214,100 @@
                         <m:rPr>
                           <m:sty m:val="p"/>
                         </m:rPr>
-                        <a:rPr lang="el-GR"/>
+                        <a:rPr lang="el-GR">
+                          <a:latin typeface="Cambria Math" panose="02040503050406030204" pitchFamily="18" charset="0"/>
+                        </a:rPr>
                         <m:t>Δ</m:t>
                       </m:r>
                       <m:r>
-                        <a:rPr lang="el-GR" i="1"/>
+                        <a:rPr lang="el-GR" i="1">
+                          <a:latin typeface="Cambria Math" panose="02040503050406030204" pitchFamily="18" charset="0"/>
+                        </a:rPr>
                         <m:t>𝐼</m:t>
                       </m:r>
                       <m:d>
                         <m:dPr>
                           <m:ctrlPr>
-                            <a:rPr lang="ar-AE" i="1"/>
+                            <a:rPr lang="ar-AE" i="1">
+                              <a:latin typeface="Cambria Math" panose="02040503050406030204" pitchFamily="18" charset="0"/>
+                            </a:rPr>
                           </m:ctrlPr>
                         </m:dPr>
                         <m:e>
                           <m:r>
-                            <a:rPr lang="ar-AE" i="1"/>
+                            <a:rPr lang="ar-AE" i="1">
+                              <a:latin typeface="Cambria Math" panose="02040503050406030204" pitchFamily="18" charset="0"/>
+                            </a:rPr>
                             <m:t>𝑡</m:t>
                           </m:r>
                         </m:e>
                       </m:d>
                       <m:r>
-                        <a:rPr lang="ar-AE"/>
+                        <a:rPr lang="ar-AE">
+                          <a:latin typeface="Cambria Math" panose="02040503050406030204" pitchFamily="18" charset="0"/>
+                        </a:rPr>
                         <m:t>=</m:t>
                       </m:r>
                       <m:r>
-                        <a:rPr lang="ar-AE" i="1"/>
+                        <a:rPr lang="ar-AE" i="1">
+                          <a:latin typeface="Cambria Math" panose="02040503050406030204" pitchFamily="18" charset="0"/>
+                        </a:rPr>
                         <m:t>𝐼</m:t>
                       </m:r>
                       <m:d>
                         <m:dPr>
                           <m:ctrlPr>
-                            <a:rPr lang="ar-AE" i="1"/>
+                            <a:rPr lang="ar-AE" i="1">
+                              <a:latin typeface="Cambria Math" panose="02040503050406030204" pitchFamily="18" charset="0"/>
+                            </a:rPr>
                           </m:ctrlPr>
                         </m:dPr>
                         <m:e>
                           <m:r>
-                            <a:rPr lang="ar-AE" i="1"/>
+                            <a:rPr lang="ar-AE" i="1">
+                              <a:latin typeface="Cambria Math" panose="02040503050406030204" pitchFamily="18" charset="0"/>
+                            </a:rPr>
                             <m:t>𝑡</m:t>
                           </m:r>
                         </m:e>
                       </m:d>
                       <m:r>
-                        <a:rPr lang="ar-AE"/>
+                        <a:rPr lang="ar-AE">
+                          <a:latin typeface="Cambria Math" panose="02040503050406030204" pitchFamily="18" charset="0"/>
+                        </a:rPr>
                         <m:t>−</m:t>
                       </m:r>
                       <m:d>
                         <m:dPr>
                           <m:ctrlPr>
-                            <a:rPr lang="ar-AE" i="1"/>
+                            <a:rPr lang="ar-AE" i="1">
+                              <a:latin typeface="Cambria Math" panose="02040503050406030204" pitchFamily="18" charset="0"/>
+                            </a:rPr>
                           </m:ctrlPr>
                         </m:dPr>
                         <m:e>
                           <m:f>
                             <m:fPr>
                               <m:ctrlPr>
-                                <a:rPr lang="ar-AE" i="1"/>
+                                <a:rPr lang="ar-AE" i="1">
+                                  <a:latin typeface="Cambria Math" panose="02040503050406030204" pitchFamily="18" charset="0"/>
+                                </a:rPr>
                               </m:ctrlPr>
                             </m:fPr>
                             <m:num>
                               <m:sSub>
                                 <m:sSubPr>
                                   <m:ctrlPr>
-                                    <a:rPr lang="ar-AE" i="1"/>
+                                    <a:rPr lang="ar-AE" i="1">
+                                      <a:latin typeface="Cambria Math" panose="02040503050406030204" pitchFamily="18" charset="0"/>
+                                    </a:rPr>
                                   </m:ctrlPr>
                                 </m:sSubPr>
                                 <m:e>
                                   <m:r>
-                                    <a:rPr lang="ar-AE" i="1"/>
+                                    <a:rPr lang="ar-AE" i="1">
+                                      <a:latin typeface="Cambria Math" panose="02040503050406030204" pitchFamily="18" charset="0"/>
+                                    </a:rPr>
                                     <m:t>𝑛</m:t>
                                   </m:r>
                                 </m:e>
@@ -9570,18 +11315,24 @@
                                   <m:sSub>
                                     <m:sSubPr>
                                       <m:ctrlPr>
-                                        <a:rPr lang="ar-AE" i="1"/>
+                                        <a:rPr lang="ar-AE" i="1">
+                                          <a:latin typeface="Cambria Math" panose="02040503050406030204" pitchFamily="18" charset="0"/>
+                                        </a:rPr>
                                       </m:ctrlPr>
                                     </m:sSubPr>
                                     <m:e>
                                       <m:r>
-                                        <a:rPr lang="ar-AE" i="1"/>
+                                        <a:rPr lang="ar-AE" i="1">
+                                          <a:latin typeface="Cambria Math" panose="02040503050406030204" pitchFamily="18" charset="0"/>
+                                        </a:rPr>
                                         <m:t>𝑡</m:t>
                                       </m:r>
                                     </m:e>
                                     <m:sub>
                                       <m:r>
-                                        <a:rPr lang="ar-AE" i="1"/>
+                                        <a:rPr lang="ar-AE" i="1">
+                                          <a:latin typeface="Cambria Math" panose="02040503050406030204" pitchFamily="18" charset="0"/>
+                                        </a:rPr>
                                         <m:t>𝐿</m:t>
                                       </m:r>
                                     </m:sub>
@@ -9593,18 +11344,24 @@
                               <m:sSub>
                                 <m:sSubPr>
                                   <m:ctrlPr>
-                                    <a:rPr lang="ar-AE" i="1"/>
+                                    <a:rPr lang="ar-AE" i="1">
+                                      <a:latin typeface="Cambria Math" panose="02040503050406030204" pitchFamily="18" charset="0"/>
+                                    </a:rPr>
                                   </m:ctrlPr>
                                 </m:sSubPr>
                                 <m:e>
                                   <m:r>
-                                    <a:rPr lang="ar-AE" i="1"/>
+                                    <a:rPr lang="ar-AE" i="1">
+                                      <a:latin typeface="Cambria Math" panose="02040503050406030204" pitchFamily="18" charset="0"/>
+                                    </a:rPr>
                                     <m:t>𝑛</m:t>
                                   </m:r>
                                 </m:e>
                                 <m:sub>
                                   <m:r>
-                                    <a:rPr lang="ar-AE" i="1"/>
+                                    <a:rPr lang="ar-AE" i="1">
+                                      <a:latin typeface="Cambria Math" panose="02040503050406030204" pitchFamily="18" charset="0"/>
+                                    </a:rPr>
                                     <m:t>𝑡</m:t>
                                   </m:r>
                                 </m:sub>
@@ -9612,31 +11369,41 @@
                             </m:den>
                           </m:f>
                           <m:r>
-                            <a:rPr lang="ar-AE" i="1"/>
+                            <a:rPr lang="ar-AE" i="1">
+                              <a:latin typeface="Cambria Math" panose="02040503050406030204" pitchFamily="18" charset="0"/>
+                            </a:rPr>
                             <m:t>𝐼</m:t>
                           </m:r>
                           <m:d>
                             <m:dPr>
                               <m:ctrlPr>
-                                <a:rPr lang="ar-AE" i="1"/>
+                                <a:rPr lang="ar-AE" i="1">
+                                  <a:latin typeface="Cambria Math" panose="02040503050406030204" pitchFamily="18" charset="0"/>
+                                </a:rPr>
                               </m:ctrlPr>
                             </m:dPr>
                             <m:e>
                               <m:sSub>
                                 <m:sSubPr>
                                   <m:ctrlPr>
-                                    <a:rPr lang="ar-AE" i="1"/>
+                                    <a:rPr lang="ar-AE" i="1">
+                                      <a:latin typeface="Cambria Math" panose="02040503050406030204" pitchFamily="18" charset="0"/>
+                                    </a:rPr>
                                   </m:ctrlPr>
                                 </m:sSubPr>
                                 <m:e>
                                   <m:r>
-                                    <a:rPr lang="ar-AE" i="1"/>
+                                    <a:rPr lang="ar-AE" i="1">
+                                      <a:latin typeface="Cambria Math" panose="02040503050406030204" pitchFamily="18" charset="0"/>
+                                    </a:rPr>
                                     <m:t>𝑡</m:t>
                                   </m:r>
                                 </m:e>
                                 <m:sub>
                                   <m:r>
-                                    <a:rPr lang="ar-AE" i="1"/>
+                                    <a:rPr lang="ar-AE" i="1">
+                                      <a:latin typeface="Cambria Math" panose="02040503050406030204" pitchFamily="18" charset="0"/>
+                                    </a:rPr>
                                     <m:t>𝐿</m:t>
                                   </m:r>
                                 </m:sub>
@@ -9644,25 +11411,33 @@
                             </m:e>
                           </m:d>
                           <m:r>
-                            <a:rPr lang="ar-AE"/>
+                            <a:rPr lang="ar-AE">
+                              <a:latin typeface="Cambria Math" panose="02040503050406030204" pitchFamily="18" charset="0"/>
+                            </a:rPr>
                             <m:t>+</m:t>
                           </m:r>
                           <m:f>
                             <m:fPr>
                               <m:ctrlPr>
-                                <a:rPr lang="ar-AE" i="1"/>
+                                <a:rPr lang="ar-AE" i="1">
+                                  <a:latin typeface="Cambria Math" panose="02040503050406030204" pitchFamily="18" charset="0"/>
+                                </a:rPr>
                               </m:ctrlPr>
                             </m:fPr>
                             <m:num>
                               <m:sSub>
                                 <m:sSubPr>
                                   <m:ctrlPr>
-                                    <a:rPr lang="ar-AE" i="1"/>
+                                    <a:rPr lang="ar-AE" i="1">
+                                      <a:latin typeface="Cambria Math" panose="02040503050406030204" pitchFamily="18" charset="0"/>
+                                    </a:rPr>
                                   </m:ctrlPr>
                                 </m:sSubPr>
                                 <m:e>
                                   <m:r>
-                                    <a:rPr lang="ar-AE" i="1"/>
+                                    <a:rPr lang="ar-AE" i="1">
+                                      <a:latin typeface="Cambria Math" panose="02040503050406030204" pitchFamily="18" charset="0"/>
+                                    </a:rPr>
                                     <m:t>𝑛</m:t>
                                   </m:r>
                                 </m:e>
@@ -9670,18 +11445,24 @@
                                   <m:sSub>
                                     <m:sSubPr>
                                       <m:ctrlPr>
-                                        <a:rPr lang="ar-AE" i="1"/>
+                                        <a:rPr lang="ar-AE" i="1">
+                                          <a:latin typeface="Cambria Math" panose="02040503050406030204" pitchFamily="18" charset="0"/>
+                                        </a:rPr>
                                       </m:ctrlPr>
                                     </m:sSubPr>
                                     <m:e>
                                       <m:r>
-                                        <a:rPr lang="ar-AE" i="1"/>
+                                        <a:rPr lang="ar-AE" i="1">
+                                          <a:latin typeface="Cambria Math" panose="02040503050406030204" pitchFamily="18" charset="0"/>
+                                        </a:rPr>
                                         <m:t>𝑡</m:t>
                                       </m:r>
                                     </m:e>
                                     <m:sub>
                                       <m:r>
-                                        <a:rPr lang="ar-AE" i="1"/>
+                                        <a:rPr lang="ar-AE" i="1">
+                                          <a:latin typeface="Cambria Math" panose="02040503050406030204" pitchFamily="18" charset="0"/>
+                                        </a:rPr>
                                         <m:t>𝑅</m:t>
                                       </m:r>
                                     </m:sub>
@@ -9693,18 +11474,24 @@
                               <m:sSub>
                                 <m:sSubPr>
                                   <m:ctrlPr>
-                                    <a:rPr lang="ar-AE" i="1"/>
+                                    <a:rPr lang="ar-AE" i="1">
+                                      <a:latin typeface="Cambria Math" panose="02040503050406030204" pitchFamily="18" charset="0"/>
+                                    </a:rPr>
                                   </m:ctrlPr>
                                 </m:sSubPr>
                                 <m:e>
                                   <m:r>
-                                    <a:rPr lang="ar-AE" i="1"/>
+                                    <a:rPr lang="ar-AE" i="1">
+                                      <a:latin typeface="Cambria Math" panose="02040503050406030204" pitchFamily="18" charset="0"/>
+                                    </a:rPr>
                                     <m:t>𝑛</m:t>
                                   </m:r>
                                 </m:e>
                                 <m:sub>
                                   <m:r>
-                                    <a:rPr lang="ar-AE" i="1"/>
+                                    <a:rPr lang="ar-AE" i="1">
+                                      <a:latin typeface="Cambria Math" panose="02040503050406030204" pitchFamily="18" charset="0"/>
+                                    </a:rPr>
                                     <m:t>𝑡</m:t>
                                   </m:r>
                                 </m:sub>
@@ -9712,31 +11499,41 @@
                             </m:den>
                           </m:f>
                           <m:r>
-                            <a:rPr lang="ar-AE" i="1"/>
+                            <a:rPr lang="ar-AE" i="1">
+                              <a:latin typeface="Cambria Math" panose="02040503050406030204" pitchFamily="18" charset="0"/>
+                            </a:rPr>
                             <m:t>𝐼</m:t>
                           </m:r>
                           <m:d>
                             <m:dPr>
                               <m:ctrlPr>
-                                <a:rPr lang="ar-AE" i="1"/>
+                                <a:rPr lang="ar-AE" i="1">
+                                  <a:latin typeface="Cambria Math" panose="02040503050406030204" pitchFamily="18" charset="0"/>
+                                </a:rPr>
                               </m:ctrlPr>
                             </m:dPr>
                             <m:e>
                               <m:sSub>
                                 <m:sSubPr>
                                   <m:ctrlPr>
-                                    <a:rPr lang="ar-AE" i="1"/>
+                                    <a:rPr lang="ar-AE" i="1">
+                                      <a:latin typeface="Cambria Math" panose="02040503050406030204" pitchFamily="18" charset="0"/>
+                                    </a:rPr>
                                   </m:ctrlPr>
                                 </m:sSubPr>
                                 <m:e>
                                   <m:r>
-                                    <a:rPr lang="ar-AE" i="1"/>
+                                    <a:rPr lang="ar-AE" i="1">
+                                      <a:latin typeface="Cambria Math" panose="02040503050406030204" pitchFamily="18" charset="0"/>
+                                    </a:rPr>
                                     <m:t>𝑡</m:t>
                                   </m:r>
                                 </m:e>
                                 <m:sub>
                                   <m:r>
-                                    <a:rPr lang="ar-AE" i="1"/>
+                                    <a:rPr lang="ar-AE" i="1">
+                                      <a:latin typeface="Cambria Math" panose="02040503050406030204" pitchFamily="18" charset="0"/>
+                                    </a:rPr>
                                     <m:t>𝑅</m:t>
                                   </m:r>
                                 </m:sub>
@@ -9756,7 +11553,7 @@
             </p:txBody>
           </p:sp>
         </mc:Choice>
-        <mc:Fallback>
+        <mc:Fallback xmlns="">
           <p:sp>
             <p:nvSpPr>
               <p:cNvPr id="4" name="Content Placeholder 3">
@@ -9804,959 +11601,6 @@
     <p:extLst>
       <p:ext uri="{BB962C8B-B14F-4D97-AF65-F5344CB8AC3E}">
         <p14:creationId xmlns:p14="http://schemas.microsoft.com/office/powerpoint/2010/main" val="1544760181"/>
-      </p:ext>
-    </p:extLst>
-  </p:cSld>
-  <p:clrMapOvr>
-    <a:masterClrMapping/>
-  </p:clrMapOvr>
-</p:sld>
-</file>
-
-<file path=ppt/slides/slide9.xml><?xml version="1.0" encoding="utf-8"?>
-<p:sld xmlns:a="http://schemas.openxmlformats.org/drawingml/2006/main" xmlns:r="http://schemas.openxmlformats.org/officeDocument/2006/relationships" xmlns:p="http://schemas.openxmlformats.org/presentationml/2006/main">
-  <p:cSld>
-    <p:spTree>
-      <p:nvGrpSpPr>
-        <p:cNvPr id="1" name=""/>
-        <p:cNvGrpSpPr/>
-        <p:nvPr/>
-      </p:nvGrpSpPr>
-      <p:grpSpPr>
-        <a:xfrm>
-          <a:off x="0" y="0"/>
-          <a:ext cx="0" cy="0"/>
-          <a:chOff x="0" y="0"/>
-          <a:chExt cx="0" cy="0"/>
-        </a:xfrm>
-      </p:grpSpPr>
-      <p:sp>
-        <p:nvSpPr>
-          <p:cNvPr id="2" name="Title 1">
-            <a:extLst>
-              <a:ext uri="{FF2B5EF4-FFF2-40B4-BE49-F238E27FC236}">
-                <a16:creationId xmlns:a16="http://schemas.microsoft.com/office/drawing/2014/main" id="{1E2A6041-637B-6D78-5506-92BFDCE375ED}"/>
-              </a:ext>
-            </a:extLst>
-          </p:cNvPr>
-          <p:cNvSpPr>
-            <a:spLocks noGrp="1"/>
-          </p:cNvSpPr>
-          <p:nvPr>
-            <p:ph type="title"/>
-          </p:nvPr>
-        </p:nvSpPr>
-        <p:spPr/>
-        <p:txBody>
-          <a:bodyPr/>
-          <a:lstStyle/>
-          <a:p>
-            <a:r>
-              <a:rPr lang="en-US" dirty="0"/>
-              <a:t>Impurity Functions</a:t>
-            </a:r>
-          </a:p>
-        </p:txBody>
-      </p:sp>
-      <mc:AlternateContent xmlns:mc="http://schemas.openxmlformats.org/markup-compatibility/2006">
-        <mc:Choice xmlns:a14="http://schemas.microsoft.com/office/drawing/2010/main" Requires="a14">
-          <p:sp>
-            <p:nvSpPr>
-              <p:cNvPr id="4" name="Content Placeholder 3">
-                <a:extLst>
-                  <a:ext uri="{FF2B5EF4-FFF2-40B4-BE49-F238E27FC236}">
-                    <a16:creationId xmlns:a16="http://schemas.microsoft.com/office/drawing/2014/main" id="{A115A7E1-21F4-7DD9-E149-771F0FD3728E}"/>
-                  </a:ext>
-                </a:extLst>
-              </p:cNvPr>
-              <p:cNvSpPr>
-                <a:spLocks noGrp="1"/>
-              </p:cNvSpPr>
-              <p:nvPr>
-                <p:ph sz="half" idx="2"/>
-              </p:nvPr>
-            </p:nvSpPr>
-            <p:spPr>
-              <a:xfrm>
-                <a:off x="704088" y="1682305"/>
-                <a:ext cx="5212080" cy="3519185"/>
-              </a:xfrm>
-            </p:spPr>
-            <p:txBody>
-              <a:bodyPr>
-                <a:normAutofit fontScale="92500" lnSpcReduction="10000"/>
-              </a:bodyPr>
-              <a:lstStyle/>
-              <a:p>
-                <a:r>
-                  <a:rPr lang="en-US" b="1" dirty="0"/>
-                  <a:t>Classification (Gini impurity)</a:t>
-                </a:r>
-              </a:p>
-              <a:p>
-                <a14:m>
-                  <m:oMath xmlns:m="http://schemas.openxmlformats.org/officeDocument/2006/math">
-                    <m:r>
-                      <a:rPr lang="en-US" i="1"/>
-                      <m:t>𝐼</m:t>
-                    </m:r>
-                    <m:d>
-                      <m:dPr>
-                        <m:ctrlPr>
-                          <a:rPr lang="ar-AE" i="1"/>
-                        </m:ctrlPr>
-                      </m:dPr>
-                      <m:e>
-                        <m:r>
-                          <a:rPr lang="ar-AE" i="1"/>
-                          <m:t>𝑡</m:t>
-                        </m:r>
-                      </m:e>
-                    </m:d>
-                    <m:r>
-                      <a:rPr lang="ar-AE"/>
-                      <m:t>=</m:t>
-                    </m:r>
-                    <m:r>
-                      <a:rPr lang="ar-AE"/>
-                      <m:t>1</m:t>
-                    </m:r>
-                    <m:r>
-                      <a:rPr lang="ar-AE"/>
-                      <m:t>−</m:t>
-                    </m:r>
-                    <m:nary>
-                      <m:naryPr>
-                        <m:chr m:val="∑"/>
-                        <m:grow m:val="on"/>
-                        <m:ctrlPr>
-                          <a:rPr lang="ar-AE" i="1"/>
-                        </m:ctrlPr>
-                      </m:naryPr>
-                      <m:sub>
-                        <m:r>
-                          <a:rPr lang="ar-AE" i="1"/>
-                          <m:t>𝑘</m:t>
-                        </m:r>
-                        <m:r>
-                          <a:rPr lang="ar-AE"/>
-                          <m:t>=</m:t>
-                        </m:r>
-                        <m:r>
-                          <a:rPr lang="ar-AE"/>
-                          <m:t>1</m:t>
-                        </m:r>
-                      </m:sub>
-                      <m:sup>
-                        <m:r>
-                          <a:rPr lang="ar-AE" i="1"/>
-                          <m:t>𝐾</m:t>
-                        </m:r>
-                      </m:sup>
-                      <m:e>
-                        <m:sSub>
-                          <m:sSubPr>
-                            <m:ctrlPr>
-                              <a:rPr lang="ar-AE" i="1"/>
-                            </m:ctrlPr>
-                          </m:sSubPr>
-                          <m:e>
-                            <m:r>
-                              <a:rPr lang="ar-AE" i="1"/>
-                              <m:t>𝑝</m:t>
-                            </m:r>
-                          </m:e>
-                          <m:sub>
-                            <m:r>
-                              <a:rPr lang="ar-AE" i="1"/>
-                              <m:t>𝑘</m:t>
-                            </m:r>
-                          </m:sub>
-                        </m:sSub>
-                      </m:e>
-                    </m:nary>
-                    <m:d>
-                      <m:dPr>
-                        <m:endChr m:val=""/>
-                        <m:ctrlPr>
-                          <a:rPr lang="ar-AE" i="1"/>
-                        </m:ctrlPr>
-                      </m:dPr>
-                      <m:e>
-                        <m:r>
-                          <a:rPr lang="ar-AE" i="1"/>
-                          <m:t>𝑡</m:t>
-                        </m:r>
-                        <m:sSup>
-                          <m:sSupPr>
-                            <m:ctrlPr>
-                              <a:rPr lang="ar-AE" i="1"/>
-                            </m:ctrlPr>
-                          </m:sSupPr>
-                          <m:e>
-                            <m:d>
-                              <m:dPr>
-                                <m:begChr m:val=""/>
-                                <m:endChr m:val=""/>
-                                <m:ctrlPr>
-                                  <a:rPr lang="ar-AE" i="1"/>
-                                </m:ctrlPr>
-                              </m:dPr>
-                              <m:e>
-                                <m:r>
-                                  <a:rPr lang="ar-AE"/>
-                                  <m:t>)</m:t>
-                                </m:r>
-                              </m:e>
-                            </m:d>
-                          </m:e>
-                          <m:sup>
-                            <m:r>
-                              <a:rPr lang="ar-AE"/>
-                              <m:t>2</m:t>
-                            </m:r>
-                          </m:sup>
-                        </m:sSup>
-                      </m:e>
-                    </m:d>
-                  </m:oMath>
-                </a14:m>
-                <a:endParaRPr lang="ar-AE" dirty="0"/>
-              </a:p>
-              <a:p>
-                <a:r>
-                  <a:rPr lang="en-US" dirty="0"/>
-                  <a:t>where </a:t>
-                </a:r>
-                <a14:m>
-                  <m:oMath xmlns:m="http://schemas.openxmlformats.org/officeDocument/2006/math">
-                    <m:sSub>
-                      <m:sSubPr>
-                        <m:ctrlPr>
-                          <a:rPr lang="ar-AE"/>
-                        </m:ctrlPr>
-                      </m:sSubPr>
-                      <m:e>
-                        <m:r>
-                          <a:rPr lang="ar-AE" i="1"/>
-                          <m:t>𝑝</m:t>
-                        </m:r>
-                      </m:e>
-                      <m:sub>
-                        <m:r>
-                          <a:rPr lang="ar-AE" i="1"/>
-                          <m:t>𝑘</m:t>
-                        </m:r>
-                      </m:sub>
-                    </m:sSub>
-                    <m:d>
-                      <m:dPr>
-                        <m:ctrlPr>
-                          <a:rPr lang="ar-AE" i="1"/>
-                        </m:ctrlPr>
-                      </m:dPr>
-                      <m:e>
-                        <m:r>
-                          <a:rPr lang="ar-AE" i="1"/>
-                          <m:t>𝑡</m:t>
-                        </m:r>
-                      </m:e>
-                    </m:d>
-                  </m:oMath>
-                </a14:m>
-                <a:r>
-                  <a:rPr lang="en-US" dirty="0"/>
-                  <a:t>is the proportion of class </a:t>
-                </a:r>
-                <a14:m>
-                  <m:oMath xmlns:m="http://schemas.openxmlformats.org/officeDocument/2006/math">
-                    <m:r>
-                      <a:rPr lang="en-US" i="1"/>
-                      <m:t>𝑘</m:t>
-                    </m:r>
-                  </m:oMath>
-                </a14:m>
-                <a:r>
-                  <a:rPr lang="en-US" dirty="0"/>
-                  <a:t>in node </a:t>
-                </a:r>
-                <a14:m>
-                  <m:oMath xmlns:m="http://schemas.openxmlformats.org/officeDocument/2006/math">
-                    <m:r>
-                      <a:rPr lang="en-US" i="1"/>
-                      <m:t>𝑡</m:t>
-                    </m:r>
-                  </m:oMath>
-                </a14:m>
-                <a:r>
-                  <a:rPr lang="en-US" dirty="0"/>
-                  <a:t>.</a:t>
-                </a:r>
-              </a:p>
-              <a:p>
-                <a:r>
-                  <a:rPr lang="en-US" b="1" dirty="0"/>
-                  <a:t>Regression (Variance / MSE)</a:t>
-                </a:r>
-              </a:p>
-              <a:p>
-                <a14:m>
-                  <m:oMath xmlns:m="http://schemas.openxmlformats.org/officeDocument/2006/math">
-                    <m:r>
-                      <a:rPr lang="en-US" i="1"/>
-                      <m:t>𝐼</m:t>
-                    </m:r>
-                    <m:d>
-                      <m:dPr>
-                        <m:ctrlPr>
-                          <a:rPr lang="ar-AE" i="1"/>
-                        </m:ctrlPr>
-                      </m:dPr>
-                      <m:e>
-                        <m:r>
-                          <a:rPr lang="ar-AE" i="1"/>
-                          <m:t>𝑡</m:t>
-                        </m:r>
-                      </m:e>
-                    </m:d>
-                    <m:r>
-                      <a:rPr lang="ar-AE"/>
-                      <m:t>=</m:t>
-                    </m:r>
-                    <m:f>
-                      <m:fPr>
-                        <m:ctrlPr>
-                          <a:rPr lang="ar-AE" i="1"/>
-                        </m:ctrlPr>
-                      </m:fPr>
-                      <m:num>
-                        <m:r>
-                          <a:rPr lang="ar-AE"/>
-                          <m:t>1</m:t>
-                        </m:r>
-                      </m:num>
-                      <m:den>
-                        <m:sSub>
-                          <m:sSubPr>
-                            <m:ctrlPr>
-                              <a:rPr lang="ar-AE" i="1"/>
-                            </m:ctrlPr>
-                          </m:sSubPr>
-                          <m:e>
-                            <m:r>
-                              <a:rPr lang="ar-AE" i="1"/>
-                              <m:t>𝑛</m:t>
-                            </m:r>
-                          </m:e>
-                          <m:sub>
-                            <m:r>
-                              <a:rPr lang="ar-AE" i="1"/>
-                              <m:t>𝑡</m:t>
-                            </m:r>
-                          </m:sub>
-                        </m:sSub>
-                      </m:den>
-                    </m:f>
-                    <m:nary>
-                      <m:naryPr>
-                        <m:chr m:val="∑"/>
-                        <m:grow m:val="on"/>
-                        <m:supHide m:val="on"/>
-                        <m:ctrlPr>
-                          <a:rPr lang="ar-AE" i="1"/>
-                        </m:ctrlPr>
-                      </m:naryPr>
-                      <m:sub>
-                        <m:r>
-                          <a:rPr lang="ar-AE" i="1"/>
-                          <m:t>𝑖</m:t>
-                        </m:r>
-                        <m:r>
-                          <a:rPr lang="ar-AE"/>
-                          <m:t>∈</m:t>
-                        </m:r>
-                        <m:r>
-                          <a:rPr lang="ar-AE" i="1"/>
-                          <m:t>𝑡</m:t>
-                        </m:r>
-                      </m:sub>
-                      <m:sup/>
-                      <m:e>
-                        <m:r>
-                          <a:rPr lang="ar-AE"/>
-                          <m:t>(</m:t>
-                        </m:r>
-                      </m:e>
-                    </m:nary>
-                    <m:d>
-                      <m:dPr>
-                        <m:begChr m:val=""/>
-                        <m:endChr m:val=""/>
-                        <m:ctrlPr>
-                          <a:rPr lang="ar-AE" i="1"/>
-                        </m:ctrlPr>
-                      </m:dPr>
-                      <m:e>
-                        <m:sSub>
-                          <m:sSubPr>
-                            <m:ctrlPr>
-                              <a:rPr lang="ar-AE" i="1"/>
-                            </m:ctrlPr>
-                          </m:sSubPr>
-                          <m:e>
-                            <m:r>
-                              <a:rPr lang="ar-AE" i="1"/>
-                              <m:t>𝑦</m:t>
-                            </m:r>
-                          </m:e>
-                          <m:sub>
-                            <m:r>
-                              <a:rPr lang="ar-AE" i="1"/>
-                              <m:t>𝑖</m:t>
-                            </m:r>
-                          </m:sub>
-                        </m:sSub>
-                        <m:r>
-                          <a:rPr lang="ar-AE"/>
-                          <m:t>−</m:t>
-                        </m:r>
-                        <m:sSub>
-                          <m:sSubPr>
-                            <m:ctrlPr>
-                              <a:rPr lang="ar-AE" i="1"/>
-                            </m:ctrlPr>
-                          </m:sSubPr>
-                          <m:e>
-                            <m:limUpp>
-                              <m:limUppPr>
-                                <m:ctrlPr>
-                                  <a:rPr lang="ar-AE" i="1" smtClean="0"/>
-                                </m:ctrlPr>
-                              </m:limUppPr>
-                              <m:e>
-                                <m:r>
-                                  <a:rPr lang="ar-AE" i="1"/>
-                                  <m:t>𝑦</m:t>
-                                </m:r>
-                              </m:e>
-                              <m:lim>
-                                <m:r>
-                                  <a:rPr lang="ar-AE"/>
-                                  <m:t>ˉ</m:t>
-                                </m:r>
-                              </m:lim>
-                            </m:limUpp>
-                          </m:e>
-                          <m:sub>
-                            <m:r>
-                              <a:rPr lang="ar-AE" i="1"/>
-                              <m:t>𝑡</m:t>
-                            </m:r>
-                          </m:sub>
-                        </m:sSub>
-                        <m:sSup>
-                          <m:sSupPr>
-                            <m:ctrlPr>
-                              <a:rPr lang="ar-AE" i="1"/>
-                            </m:ctrlPr>
-                          </m:sSupPr>
-                          <m:e>
-                            <m:d>
-                              <m:dPr>
-                                <m:begChr m:val=""/>
-                                <m:endChr m:val=""/>
-                                <m:ctrlPr>
-                                  <a:rPr lang="ar-AE" i="1"/>
-                                </m:ctrlPr>
-                              </m:dPr>
-                              <m:e>
-                                <m:r>
-                                  <a:rPr lang="ar-AE"/>
-                                  <m:t>)</m:t>
-                                </m:r>
-                              </m:e>
-                            </m:d>
-                          </m:e>
-                          <m:sup>
-                            <m:r>
-                              <a:rPr lang="ar-AE"/>
-                              <m:t>2</m:t>
-                            </m:r>
-                          </m:sup>
-                        </m:sSup>
-                      </m:e>
-                    </m:d>
-                  </m:oMath>
-                </a14:m>
-                <a:endParaRPr lang="ar-AE" dirty="0"/>
-              </a:p>
-              <a:p>
-                <a:endParaRPr lang="en-US" dirty="0"/>
-              </a:p>
-            </p:txBody>
-          </p:sp>
-        </mc:Choice>
-        <mc:Fallback>
-          <p:sp>
-            <p:nvSpPr>
-              <p:cNvPr id="4" name="Content Placeholder 3">
-                <a:extLst>
-                  <a:ext uri="{FF2B5EF4-FFF2-40B4-BE49-F238E27FC236}">
-                    <a16:creationId xmlns:a16="http://schemas.microsoft.com/office/drawing/2014/main" id="{A115A7E1-21F4-7DD9-E149-771F0FD3728E}"/>
-                  </a:ext>
-                </a:extLst>
-              </p:cNvPr>
-              <p:cNvSpPr>
-                <a:spLocks noGrp="1" noRot="1" noChangeAspect="1" noMove="1" noResize="1" noEditPoints="1" noAdjustHandles="1" noChangeArrowheads="1" noChangeShapeType="1" noTextEdit="1"/>
-              </p:cNvSpPr>
-              <p:nvPr>
-                <p:ph sz="half" idx="2"/>
-              </p:nvPr>
-            </p:nvSpPr>
-            <p:spPr>
-              <a:xfrm>
-                <a:off x="704088" y="1682305"/>
-                <a:ext cx="5212080" cy="3519185"/>
-              </a:xfrm>
-              <a:blipFill>
-                <a:blip r:embed="rId2"/>
-                <a:stretch>
-                  <a:fillRect l="-936" t="-1040" r="-1053"/>
-                </a:stretch>
-              </a:blipFill>
-            </p:spPr>
-            <p:txBody>
-              <a:bodyPr/>
-              <a:lstStyle/>
-              <a:p>
-                <a:r>
-                  <a:rPr lang="en-US">
-                    <a:noFill/>
-                  </a:rPr>
-                  <a:t> </a:t>
-                </a:r>
-              </a:p>
-            </p:txBody>
-          </p:sp>
-        </mc:Fallback>
-      </mc:AlternateContent>
-      <mc:AlternateContent xmlns:mc="http://schemas.openxmlformats.org/markup-compatibility/2006">
-        <mc:Choice xmlns:a14="http://schemas.microsoft.com/office/drawing/2010/main" Requires="a14">
-          <p:sp>
-            <p:nvSpPr>
-              <p:cNvPr id="6" name="Content Placeholder 5">
-                <a:extLst>
-                  <a:ext uri="{FF2B5EF4-FFF2-40B4-BE49-F238E27FC236}">
-                    <a16:creationId xmlns:a16="http://schemas.microsoft.com/office/drawing/2014/main" id="{2B77987E-1EED-C6F7-FF43-794A92C808ED}"/>
-                  </a:ext>
-                </a:extLst>
-              </p:cNvPr>
-              <p:cNvSpPr>
-                <a:spLocks noGrp="1"/>
-              </p:cNvSpPr>
-              <p:nvPr>
-                <p:ph sz="quarter" idx="4"/>
-              </p:nvPr>
-            </p:nvSpPr>
-            <p:spPr>
-              <a:xfrm>
-                <a:off x="6181344" y="1682305"/>
-                <a:ext cx="5212080" cy="3519185"/>
-              </a:xfrm>
-            </p:spPr>
-            <p:txBody>
-              <a:bodyPr>
-                <a:normAutofit fontScale="92500" lnSpcReduction="10000"/>
-              </a:bodyPr>
-              <a:lstStyle/>
-              <a:p>
-                <a:pPr marL="0" indent="0">
-                  <a:buNone/>
-                </a:pPr>
-                <a:r>
-                  <a:rPr lang="en-US" dirty="0"/>
-                  <a:t>The importance of feature </a:t>
-                </a:r>
-                <a14:m>
-                  <m:oMath xmlns:m="http://schemas.openxmlformats.org/officeDocument/2006/math">
-                    <m:sSub>
-                      <m:sSubPr>
-                        <m:ctrlPr>
-                          <a:rPr lang="ar-AE"/>
-                        </m:ctrlPr>
-                      </m:sSubPr>
-                      <m:e>
-                        <m:r>
-                          <a:rPr lang="ar-AE" i="1"/>
-                          <m:t>𝑥</m:t>
-                        </m:r>
-                      </m:e>
-                      <m:sub>
-                        <m:r>
-                          <a:rPr lang="ar-AE" i="1"/>
-                          <m:t>𝑗</m:t>
-                        </m:r>
-                      </m:sub>
-                    </m:sSub>
-                  </m:oMath>
-                </a14:m>
-                <a:r>
-                  <a:rPr lang="en-US" dirty="0"/>
-                  <a:t>is the </a:t>
-                </a:r>
-                <a:r>
-                  <a:rPr lang="en-US" b="1" dirty="0"/>
-                  <a:t>total impurity reduction contributed by splits on that feature</a:t>
-                </a:r>
-                <a:r>
-                  <a:rPr lang="en-US" dirty="0"/>
-                  <a:t>:</a:t>
-                </a:r>
-              </a:p>
-              <a:p>
-                <a:pPr marL="0" indent="0">
-                  <a:buNone/>
-                </a:pPr>
-                <a14:m>
-                  <m:oMathPara xmlns:m="http://schemas.openxmlformats.org/officeDocument/2006/math">
-                    <m:oMathParaPr>
-                      <m:jc m:val="centerGroup"/>
-                    </m:oMathParaPr>
-                    <m:oMath xmlns:m="http://schemas.openxmlformats.org/officeDocument/2006/math">
-                      <m:borderBox>
-                        <m:borderBoxPr>
-                          <m:ctrlPr>
-                            <a:rPr lang="ar-AE"/>
-                          </m:ctrlPr>
-                        </m:borderBoxPr>
-                        <m:e>
-                          <m:r>
-                            <a:rPr lang="ar-AE" i="1"/>
-                            <m:t>𝑉</m:t>
-                          </m:r>
-                          <m:sSubSup>
-                            <m:sSubSupPr>
-                              <m:ctrlPr>
-                                <a:rPr lang="ar-AE" i="1"/>
-                              </m:ctrlPr>
-                            </m:sSubSupPr>
-                            <m:e>
-                              <m:r>
-                                <a:rPr lang="ar-AE" i="1"/>
-                                <m:t>𝐼</m:t>
-                              </m:r>
-                            </m:e>
-                            <m:sub>
-                              <m:r>
-                                <a:rPr lang="ar-AE" i="1"/>
-                                <m:t>𝑗</m:t>
-                              </m:r>
-                            </m:sub>
-                            <m:sup>
-                              <m:r>
-                                <m:rPr>
-                                  <m:nor/>
-                                </m:rPr>
-                                <a:rPr lang="en-US" i="1"/>
-                                <m:t>tree</m:t>
-                              </m:r>
-                            </m:sup>
-                          </m:sSubSup>
-                          <m:r>
-                            <a:rPr lang="ar-AE"/>
-                            <m:t>=</m:t>
-                          </m:r>
-                          <m:nary>
-                            <m:naryPr>
-                              <m:chr m:val="∑"/>
-                              <m:grow m:val="on"/>
-                              <m:supHide m:val="on"/>
-                              <m:ctrlPr>
-                                <a:rPr lang="ar-AE" i="1"/>
-                              </m:ctrlPr>
-                            </m:naryPr>
-                            <m:sub>
-                              <m:r>
-                                <a:rPr lang="ar-AE" i="1"/>
-                                <m:t>𝑡</m:t>
-                              </m:r>
-                              <m:r>
-                                <a:rPr lang="ar-AE"/>
-                                <m:t>∈</m:t>
-                              </m:r>
-                              <m:r>
-                                <a:rPr lang="ar-AE" i="1"/>
-                                <m:t>𝑇</m:t>
-                              </m:r>
-                              <m:r>
-                                <a:rPr lang="ar-AE"/>
-                                <m:t>:</m:t>
-                              </m:r>
-                              <m:r>
-                                <m:rPr>
-                                  <m:nor/>
-                                </m:rPr>
-                                <a:rPr lang="ar-AE" i="1"/>
-                                <m:t> </m:t>
-                              </m:r>
-                              <m:r>
-                                <m:rPr>
-                                  <m:nor/>
-                                </m:rPr>
-                                <a:rPr lang="en-US" i="1"/>
-                                <m:t>split</m:t>
-                              </m:r>
-                              <m:r>
-                                <m:rPr>
-                                  <m:nor/>
-                                </m:rPr>
-                                <a:rPr lang="en-US" i="1"/>
-                                <m:t> </m:t>
-                              </m:r>
-                              <m:r>
-                                <m:rPr>
-                                  <m:nor/>
-                                </m:rPr>
-                                <a:rPr lang="en-US" i="1"/>
-                                <m:t>on</m:t>
-                              </m:r>
-                              <m:r>
-                                <m:rPr>
-                                  <m:nor/>
-                                </m:rPr>
-                                <a:rPr lang="en-US" i="1"/>
-                                <m:t> </m:t>
-                              </m:r>
-                              <m:sSub>
-                                <m:sSubPr>
-                                  <m:ctrlPr>
-                                    <a:rPr lang="ar-AE" i="1"/>
-                                  </m:ctrlPr>
-                                </m:sSubPr>
-                                <m:e>
-                                  <m:r>
-                                    <a:rPr lang="ar-AE" i="1"/>
-                                    <m:t>𝑥</m:t>
-                                  </m:r>
-                                </m:e>
-                                <m:sub>
-                                  <m:r>
-                                    <a:rPr lang="ar-AE" i="1"/>
-                                    <m:t>𝑗</m:t>
-                                  </m:r>
-                                </m:sub>
-                              </m:sSub>
-                            </m:sub>
-                            <m:sup/>
-                            <m:e>
-                              <m:f>
-                                <m:fPr>
-                                  <m:ctrlPr>
-                                    <a:rPr lang="ar-AE" i="1"/>
-                                  </m:ctrlPr>
-                                </m:fPr>
-                                <m:num>
-                                  <m:sSub>
-                                    <m:sSubPr>
-                                      <m:ctrlPr>
-                                        <a:rPr lang="ar-AE" i="1"/>
-                                      </m:ctrlPr>
-                                    </m:sSubPr>
-                                    <m:e>
-                                      <m:r>
-                                        <a:rPr lang="ar-AE" i="1"/>
-                                        <m:t>𝑛</m:t>
-                                      </m:r>
-                                    </m:e>
-                                    <m:sub>
-                                      <m:r>
-                                        <a:rPr lang="ar-AE" i="1"/>
-                                        <m:t>𝑡</m:t>
-                                      </m:r>
-                                    </m:sub>
-                                  </m:sSub>
-                                </m:num>
-                                <m:den>
-                                  <m:r>
-                                    <a:rPr lang="ar-AE" i="1"/>
-                                    <m:t>𝑛</m:t>
-                                  </m:r>
-                                </m:den>
-                              </m:f>
-                            </m:e>
-                          </m:nary>
-                          <m:r>
-                            <m:rPr>
-                              <m:nor/>
-                            </m:rPr>
-                            <a:rPr lang="ar-AE" i="1"/>
-                            <m:t> </m:t>
-                          </m:r>
-                          <m:r>
-                            <m:rPr>
-                              <m:sty m:val="p"/>
-                            </m:rPr>
-                            <a:rPr lang="el-GR"/>
-                            <m:t>Δ</m:t>
-                          </m:r>
-                          <m:r>
-                            <a:rPr lang="el-GR" i="1"/>
-                            <m:t>𝐼</m:t>
-                          </m:r>
-                          <m:d>
-                            <m:dPr>
-                              <m:ctrlPr>
-                                <a:rPr lang="ar-AE" i="1"/>
-                              </m:ctrlPr>
-                            </m:dPr>
-                            <m:e>
-                              <m:r>
-                                <a:rPr lang="ar-AE" i="1"/>
-                                <m:t>𝑡</m:t>
-                              </m:r>
-                            </m:e>
-                          </m:d>
-                        </m:e>
-                      </m:borderBox>
-                    </m:oMath>
-                  </m:oMathPara>
-                </a14:m>
-                <a:endParaRPr lang="ar-AE" b="0" dirty="0"/>
-              </a:p>
-              <a:p>
-                <a:pPr marL="0" indent="0">
-                  <a:buNone/>
-                </a:pPr>
-                <a:r>
-                  <a:rPr lang="en-US" dirty="0"/>
-                  <a:t>where:</a:t>
-                </a:r>
-              </a:p>
-              <a:p>
-                <a14:m>
-                  <m:oMath xmlns:m="http://schemas.openxmlformats.org/officeDocument/2006/math">
-                    <m:f>
-                      <m:fPr>
-                        <m:ctrlPr>
-                          <a:rPr lang="ar-AE"/>
-                        </m:ctrlPr>
-                      </m:fPr>
-                      <m:num>
-                        <m:sSub>
-                          <m:sSubPr>
-                            <m:ctrlPr>
-                              <a:rPr lang="ar-AE"/>
-                            </m:ctrlPr>
-                          </m:sSubPr>
-                          <m:e>
-                            <m:r>
-                              <a:rPr lang="ar-AE" i="1"/>
-                              <m:t>𝑛</m:t>
-                            </m:r>
-                          </m:e>
-                          <m:sub>
-                            <m:r>
-                              <a:rPr lang="ar-AE" i="1"/>
-                              <m:t>𝑡</m:t>
-                            </m:r>
-                          </m:sub>
-                        </m:sSub>
-                      </m:num>
-                      <m:den>
-                        <m:r>
-                          <a:rPr lang="ar-AE" i="1"/>
-                          <m:t>𝑛</m:t>
-                        </m:r>
-                      </m:den>
-                    </m:f>
-                  </m:oMath>
-                </a14:m>
-                <a:r>
-                  <a:rPr lang="ar-AE" dirty="0"/>
-                  <a:t>: </a:t>
-                </a:r>
-                <a:r>
-                  <a:rPr lang="en-US" dirty="0"/>
-                  <a:t>weights splits by how many samples reach node </a:t>
-                </a:r>
-                <a14:m>
-                  <m:oMath xmlns:m="http://schemas.openxmlformats.org/officeDocument/2006/math">
-                    <m:r>
-                      <a:rPr lang="en-US" i="1"/>
-                      <m:t>𝑡</m:t>
-                    </m:r>
-                  </m:oMath>
-                </a14:m>
-                <a:endParaRPr lang="en-US" dirty="0"/>
-              </a:p>
-              <a:p>
-                <a14:m>
-                  <m:oMath xmlns:m="http://schemas.openxmlformats.org/officeDocument/2006/math">
-                    <m:r>
-                      <a:rPr lang="en-US" i="1"/>
-                      <m:t>𝑛</m:t>
-                    </m:r>
-                  </m:oMath>
-                </a14:m>
-                <a:r>
-                  <a:rPr lang="en-US" dirty="0"/>
-                  <a:t>: total number of samples</a:t>
-                </a:r>
-              </a:p>
-              <a:p>
-                <a:endParaRPr lang="en-US" dirty="0"/>
-              </a:p>
-            </p:txBody>
-          </p:sp>
-        </mc:Choice>
-        <mc:Fallback>
-          <p:sp>
-            <p:nvSpPr>
-              <p:cNvPr id="6" name="Content Placeholder 5">
-                <a:extLst>
-                  <a:ext uri="{FF2B5EF4-FFF2-40B4-BE49-F238E27FC236}">
-                    <a16:creationId xmlns:a16="http://schemas.microsoft.com/office/drawing/2014/main" id="{2B77987E-1EED-C6F7-FF43-794A92C808ED}"/>
-                  </a:ext>
-                </a:extLst>
-              </p:cNvPr>
-              <p:cNvSpPr>
-                <a:spLocks noGrp="1" noRot="1" noChangeAspect="1" noMove="1" noResize="1" noEditPoints="1" noAdjustHandles="1" noChangeArrowheads="1" noChangeShapeType="1" noTextEdit="1"/>
-              </p:cNvSpPr>
-              <p:nvPr>
-                <p:ph sz="quarter" idx="4"/>
-              </p:nvPr>
-            </p:nvSpPr>
-            <p:spPr>
-              <a:xfrm>
-                <a:off x="6181344" y="1682305"/>
-                <a:ext cx="5212080" cy="3519185"/>
-              </a:xfrm>
-              <a:blipFill>
-                <a:blip r:embed="rId3"/>
-                <a:stretch>
-                  <a:fillRect l="-1053" t="-1040" r="-1871"/>
-                </a:stretch>
-              </a:blipFill>
-            </p:spPr>
-            <p:txBody>
-              <a:bodyPr/>
-              <a:lstStyle/>
-              <a:p>
-                <a:r>
-                  <a:rPr lang="en-US">
-                    <a:noFill/>
-                  </a:rPr>
-                  <a:t> </a:t>
-                </a:r>
-              </a:p>
-            </p:txBody>
-          </p:sp>
-        </mc:Fallback>
-      </mc:AlternateContent>
-    </p:spTree>
-    <p:extLst>
-      <p:ext uri="{BB962C8B-B14F-4D97-AF65-F5344CB8AC3E}">
-        <p14:creationId xmlns:p14="http://schemas.microsoft.com/office/powerpoint/2010/main" val="471226164"/>
       </p:ext>
     </p:extLst>
   </p:cSld>
